--- a/docs/pitch/deck.pptx
+++ b/docs/pitch/deck.pptx
@@ -15,9 +15,10 @@
     <p:sldId id="263" r:id="rId9"/>
     <p:sldId id="264" r:id="rId10"/>
     <p:sldId id="265" r:id="rId11"/>
+    <p:sldId id="266" r:id="rId12"/>
   </p:sldIdLst>
   <p:notesMasterIdLst>
-    <p:notesMasterId r:id="rId12"/>
+    <p:notesMasterId r:id="rId13"/>
   </p:notesMasterIdLst>
   <p:sldSz cx="12192000" cy="6858000"/>
   <p:notesSz cx="6858000" cy="12192000"/>
@@ -599,7 +600,7 @@
           <a:p>
             <a:r>
               <a:rPr lang="en-US" dirty="0"/>
-              <a:t>2:58-3:00. "In one day we built an always-on agent that onboards a client through its own AI, drafts the work, catches a losing campaign, and cannot approve itself. Sixty-one tests pass, nothing leaves the box. Monday our next real client goes through it. Thank you." Stop at 3:00.</a:t>
+              <a:t>2:50-2:58. Who pays? The agency owner. ACE is customer zero; every Google Ads agency serving e-commerce has the same unbilled onboarding hours. Pricing hypothesis: $500/month per agency; 12 senior hours at $100 is $1,200 saved per onboarding, five a year pay for it. Wedge: intake + break-even; SDLC makes it recurring. Say 'hypothesis' out loud. Demand evidence today is one customer.</a:t>
             </a:r>
             <a:endParaRPr lang="en-US" dirty="0"/>
           </a:p>
@@ -623,6 +624,94 @@
             <a:fld id="{F7021451-1387-4CA6-816F-3879F97B5CBC}" type="slidenum">
               <a:rPr lang="en-US"/>
               <a:t>10</a:t>
+            </a:fld>
+            <a:endParaRPr lang="en-US"/>
+          </a:p>
+        </p:txBody>
+      </p:sp>
+    </p:spTree>
+    <p:extLst>
+      <p:ext uri="{BB962C8B-B14F-4D97-AF65-F5344CB8AC3E}">
+        <p14:creationId xmlns:p14="http://schemas.microsoft.com/office/powerpoint/2010/main" val="1024086991"/>
+      </p:ext>
+    </p:extLst>
+  </p:cSld>
+  <p:clrMapOvr>
+    <a:masterClrMapping/>
+  </p:clrMapOvr>
+</p:notes>
+</file>
+
+<file path=ppt/notesSlides/notesSlide11.xml><?xml version="1.0" encoding="utf-8"?>
+<p:notes xmlns:a="http://schemas.openxmlformats.org/drawingml/2006/main" xmlns:r="http://schemas.openxmlformats.org/officeDocument/2006/relationships" xmlns:p="http://schemas.openxmlformats.org/presentationml/2006/main">
+  <p:cSld>
+    <p:spTree>
+      <p:nvGrpSpPr>
+        <p:cNvPr id="1" name=""/>
+        <p:cNvGrpSpPr/>
+        <p:nvPr/>
+      </p:nvGrpSpPr>
+      <p:grpSpPr>
+        <a:xfrm>
+          <a:off x="0" y="0"/>
+          <a:ext cx="0" cy="0"/>
+          <a:chOff x="0" y="0"/>
+          <a:chExt cx="0" cy="0"/>
+        </a:xfrm>
+      </p:grpSpPr>
+      <p:sp>
+        <p:nvSpPr>
+          <p:cNvPr id="2" name="Slide Image Placeholder 1"/>
+          <p:cNvSpPr>
+            <a:spLocks noGrp="1" noRot="1" noChangeAspect="1"/>
+          </p:cNvSpPr>
+          <p:nvPr>
+            <p:ph type="sldImg"/>
+          </p:nvPr>
+        </p:nvSpPr>
+        <p:spPr/>
+      </p:sp>
+      <p:sp>
+        <p:nvSpPr>
+          <p:cNvPr id="3" name="Notes Placeholder 2"/>
+          <p:cNvSpPr>
+            <a:spLocks noGrp="1"/>
+          </p:cNvSpPr>
+          <p:nvPr>
+            <p:ph type="body" idx="1"/>
+          </p:nvPr>
+        </p:nvSpPr>
+        <p:spPr/>
+        <p:txBody>
+          <a:bodyPr/>
+          <a:lstStyle/>
+          <a:p>
+            <a:r>
+              <a:rPr lang="en-US" dirty="0"/>
+              <a:t>2:58-3:00. "In one day we built an always-on agent that onboards a client through its own AI, drafts the work, catches a losing campaign, and cannot approve itself. Seventy-eight tests pass, nothing leaves the box. Monday our next real client goes through it. Thank you." Stop at 3:00.</a:t>
+            </a:r>
+            <a:endParaRPr lang="en-US" dirty="0"/>
+          </a:p>
+        </p:txBody>
+      </p:sp>
+      <p:sp>
+        <p:nvSpPr>
+          <p:cNvPr id="4" name="Slide Number Placeholder 3"/>
+          <p:cNvSpPr>
+            <a:spLocks noGrp="1"/>
+          </p:cNvSpPr>
+          <p:nvPr>
+            <p:ph type="sldNum" sz="quarter" idx="10"/>
+          </p:nvPr>
+        </p:nvSpPr>
+        <p:spPr/>
+        <p:txBody>
+          <a:bodyPr/>
+          <a:lstStyle/>
+          <a:p>
+            <a:fld id="{F7021451-1387-4CA6-816F-3879F97B5CBC}" type="slidenum">
+              <a:rPr lang="en-US"/>
+              <a:t>11</a:t>
             </a:fld>
             <a:endParaRPr lang="en-US"/>
           </a:p>
@@ -687,7 +776,7 @@
           <a:p>
             <a:r>
               <a:rPr lang="en-US" dirty="0"/>
-              <a:t>0:15-0:40. Onboarding is a kickoff call, a checklist in a doc, then weeks of email. Nobody chases, answers never become assigned work. In our sample client, 8 of 32 answers are missing at kickoff (fact: 30 work items, 8 gaps). Campaigns then optimize to revenue, not profit. 2-4 weeks and 12 hours are hypotheses; swap in ACE's real number.</a:t>
+              <a:t>0:15-0:40. Onboarding is a kickoff call, a checklist in a doc, then weeks of email. Nobody chases, answers never become assigned work. In our sample client, 8 of 32 answers are missing at kickoff (fact: 30 work items, 8 gaps). Campaigns then optimize to revenue, not profit, because nobody calculated break-even. 2-4 weeks and 12 hours are hypotheses; swap in ACE's real number.</a:t>
             </a:r>
             <a:endParaRPr lang="en-US" dirty="0"/>
           </a:p>
@@ -951,7 +1040,7 @@
           <a:p>
             <a:r>
               <a:rPr lang="en-US" dirty="0"/>
-              <a:t>1:30-2:00. Northline told intake their margins: tableware 58% down to seasonal decor 33%. Their stated break-even after shipping and returns: 2.1 to 3.4. The agent's draft ranks categories by margin and computes the margin-only floor from their own numbers, marked derived. Seasonal decor's floor is 3.03; the campaign targets 3x; every order loses money before shipping and returns. Arithmetic: 1/0.58=1.724, 1/0.46=2.174, 1/0.41=2.439, 1/0.33=3.030. Console: draft on SPEC-003-T02.</a:t>
+              <a:t>1:30-2:00. Northline told intake their margins: tableware 58% down to seasonal decor 33%. Their stated break-even after shipping and returns: 2.1 to 3.4. The agent's draft ranks categories by margin and computes the margin-only floor from their own numbers, marked derived. Seasonal decor's floor is 3.03; their stated break-even is 3.4. The dashed 3x line is for scale, not a client number: say 'any plan under 3.4 on seasonal decor loses money, and the agent shows that next to every draft'. Arithmetic: 1/0.58=1.724, 1/0.46=2.174, 1/0.41=2.439, 1/0.33=3.030. Console: draft on SPEC-003-T02.</a:t>
             </a:r>
             <a:endParaRPr lang="en-US" dirty="0"/>
           </a:p>
@@ -1127,7 +1216,7 @@
           <a:p>
             <a:r>
               <a:rPr lang="en-US" dirty="0"/>
-              <a:t>2:25-2:40. Local-first is the agency's trust promise, so it's in the code: the SDLC service refuses to start if the model URL isn't loopback; the console's CSP is default-src none; the pipeline is rules-first and still runs with the model killed; every artifact records rules vs model. One GB10, under OpenShell, egress blocked. Per client the box holds ad-account IDs, access, COGS, margins and targets; an agency aggregates 20-40 of these.</a:t>
+              <a:t>2:25-2:40. Local-first is the agency's trust promise, so it's in the code: the SDLC service refuses to start if the model URL isn't loopback; the console's CSP is default-src none; the pipeline is rules-first and still runs with the model killed; every artifact records rules vs model. One GB10, under OpenShell, egress blocked. Runtime: NemoClaw 0.0.137, OpenShell 0.0.116, OpenClaw registered against our intake and SDLC MCP servers, Nemotron 3 Nano 30B via Ollama. Per client the box holds ad-account IDs, access, COGS, margins and targets; an agency aggregates 20-40 of these.</a:t>
             </a:r>
             <a:endParaRPr lang="en-US" dirty="0"/>
           </a:p>
@@ -1215,7 +1304,7 @@
           <a:p>
             <a:r>
               <a:rPr lang="en-US" dirty="0"/>
-              <a:t>2:40-2:50 in the 3-minute pitch: point, don't click (or do the pre-staged two-click 409). In the 10-minute slot this slide stays up on the second screen while Moorthy drives the console. Switch personas with the 'Acting as' selector in the console header. If the model is slow, the drafts still appear from rules; say so. Recorded run is the fallback.</a:t>
+              <a:t>Autopilot: seven isolated stage agents, each its own process, no shared context between them. No agent reviews its own work: the 409 (reviewer must differ from the builder) applies to agents as well as people. Data room: a client's sales export becomes a promotion plan with one ticket per recommendation.</a:t>
             </a:r>
             <a:endParaRPr lang="en-US" dirty="0"/>
           </a:p>
@@ -1303,7 +1392,7 @@
           <a:p>
             <a:r>
               <a:rPr lang="en-US" dirty="0"/>
-              <a:t>2:50-2:58. Who pays? The agency owner. ACE is customer zero; every Google Ads agency serving e-commerce has the same unbilled onboarding hours. Pricing hypothesis: $500/month per agency; 12 senior hours at $100 is $1,200 saved per onboarding, two a year pay for it. Wedge: intake + break-even; SDLC makes it recurring. Say 'hypothesis' out loud. Demand evidence today is one customer.</a:t>
+              <a:t>2:40-2:50 in the 3-minute pitch: point, don't click (or do the pre-staged two-click 409). In the 10-minute slot this slide stays up on the second screen while Moorthy drives the console. Switch personas with the 'Acting as' selector in the console header. If the model is slow, the drafts still appear from rules; say so. Recorded run is the fallback.</a:t>
             </a:r>
             <a:endParaRPr lang="en-US" dirty="0"/>
           </a:p>
@@ -3785,7 +3874,7 @@
                 <a:ea typeface="Arial" pitchFamily="34" charset="-122"/>
                 <a:cs typeface="Arial" pitchFamily="34" charset="-120"/>
               </a:rPr>
-              <a:t>Carl · Tyler · Jasmine T · Moorthy</a:t>
+              <a:t>Carl · Tyler · Moorthy</a:t>
             </a:r>
             <a:pPr algn="ctr" indent="0" marL="0">
               <a:lnSpc>
@@ -3939,6 +4028,1157 @@
       </p:grpSpPr>
       <p:sp>
         <p:nvSpPr>
+          <p:cNvPr id="2" name="Text 0"/>
+          <p:cNvSpPr txBox="1"/>
+          <p:nvPr/>
+        </p:nvSpPr>
+        <p:spPr>
+          <a:xfrm>
+            <a:off x="685800" y="411480"/>
+            <a:ext cx="10820095" cy="320040"/>
+          </a:xfrm>
+          <a:prstGeom prst="rect">
+            <a:avLst/>
+          </a:prstGeom>
+          <a:noFill/>
+          <a:ln/>
+        </p:spPr>
+        <p:txBody>
+          <a:bodyPr wrap="square" lIns="0" tIns="0" rIns="0" bIns="0" rtlCol="0" anchor="ctr"/>
+          <a:lstStyle/>
+          <a:p>
+            <a:pPr indent="0" marL="0">
+              <a:buNone/>
+            </a:pPr>
+            <a:r>
+              <a:rPr lang="en-US" sz="1100" spc="600" kern="0" dirty="0">
+                <a:solidFill>
+                  <a:srgbClr val="E8C290"/>
+                </a:solidFill>
+                <a:latin typeface="Arial" pitchFamily="34" charset="0"/>
+                <a:ea typeface="Arial" pitchFamily="34" charset="-122"/>
+                <a:cs typeface="Arial" pitchFamily="34" charset="-120"/>
+              </a:rPr>
+              <a:t>WHY IT'S A BUSINESS</a:t>
+            </a:r>
+            <a:endParaRPr lang="en-US" sz="1100" dirty="0"/>
+          </a:p>
+        </p:txBody>
+      </p:sp>
+      <p:sp>
+        <p:nvSpPr>
+          <p:cNvPr id="3" name="Text 1"/>
+          <p:cNvSpPr txBox="1"/>
+          <p:nvPr/>
+        </p:nvSpPr>
+        <p:spPr>
+          <a:xfrm>
+            <a:off x="685800" y="731520"/>
+            <a:ext cx="10820095" cy="731520"/>
+          </a:xfrm>
+          <a:prstGeom prst="rect">
+            <a:avLst/>
+          </a:prstGeom>
+          <a:noFill/>
+          <a:ln/>
+        </p:spPr>
+        <p:txBody>
+          <a:bodyPr wrap="square" lIns="0" tIns="0" rIns="0" bIns="0" rtlCol="0" anchor="t"/>
+          <a:lstStyle/>
+          <a:p>
+            <a:pPr indent="0" marL="0">
+              <a:lnSpc>
+                <a:spcPct val="105000"/>
+              </a:lnSpc>
+              <a:buNone/>
+            </a:pPr>
+            <a:r>
+              <a:rPr lang="en-US" sz="3400" dirty="0">
+                <a:solidFill>
+                  <a:srgbClr val="FFF6E6"/>
+                </a:solidFill>
+                <a:latin typeface="Arial" pitchFamily="34" charset="0"/>
+                <a:ea typeface="Arial" pitchFamily="34" charset="-122"/>
+                <a:cs typeface="Arial" pitchFamily="34" charset="-120"/>
+              </a:rPr>
+              <a:t>The agency owner pays. </a:t>
+            </a:r>
+            <a:pPr indent="0" marL="0">
+              <a:lnSpc>
+                <a:spcPct val="105000"/>
+              </a:lnSpc>
+              <a:buNone/>
+            </a:pPr>
+            <a:r>
+              <a:rPr lang="en-US" sz="3400" dirty="0">
+                <a:solidFill>
+                  <a:srgbClr val="F3D9A4"/>
+                </a:solidFill>
+                <a:latin typeface="Arial" pitchFamily="34" charset="0"/>
+                <a:ea typeface="Arial" pitchFamily="34" charset="-122"/>
+                <a:cs typeface="Arial" pitchFamily="34" charset="-120"/>
+              </a:rPr>
+              <a:t>The client's AI is the channel.</a:t>
+            </a:r>
+            <a:endParaRPr lang="en-US" sz="3400" dirty="0"/>
+          </a:p>
+        </p:txBody>
+      </p:sp>
+      <p:sp>
+        <p:nvSpPr>
+          <p:cNvPr id="4" name="Shape 2"/>
+          <p:cNvSpPr/>
+          <p:nvPr/>
+        </p:nvSpPr>
+        <p:spPr>
+          <a:xfrm>
+            <a:off x="685800" y="1691640"/>
+            <a:ext cx="3454298" cy="3108960"/>
+          </a:xfrm>
+          <a:prstGeom prst="roundRect">
+            <a:avLst>
+              <a:gd name="adj" fmla="val 3529"/>
+            </a:avLst>
+          </a:prstGeom>
+          <a:solidFill>
+            <a:srgbClr val="1F1610"/>
+          </a:solidFill>
+          <a:ln w="9525">
+            <a:solidFill>
+              <a:srgbClr val="332A1F"/>
+            </a:solidFill>
+            <a:prstDash val="solid"/>
+          </a:ln>
+          <a:effectLst>
+            <a:outerShdw sx="100000" sy="100000" kx="0" ky="0" algn="bl" rotWithShape="0" blurRad="152400" dist="50800" dir="5400000">
+              <a:srgbClr val="000000">
+                <a:alpha val="35000"/>
+              </a:srgbClr>
+            </a:outerShdw>
+          </a:effectLst>
+        </p:spPr>
+      </p:sp>
+      <p:sp>
+        <p:nvSpPr>
+          <p:cNvPr id="5" name="Text 3"/>
+          <p:cNvSpPr txBox="1"/>
+          <p:nvPr/>
+        </p:nvSpPr>
+        <p:spPr>
+          <a:xfrm>
+            <a:off x="914400" y="1874520"/>
+            <a:ext cx="1828800" cy="228600"/>
+          </a:xfrm>
+          <a:prstGeom prst="rect">
+            <a:avLst/>
+          </a:prstGeom>
+          <a:noFill/>
+          <a:ln/>
+        </p:spPr>
+        <p:txBody>
+          <a:bodyPr wrap="square" lIns="0" tIns="0" rIns="0" bIns="0" rtlCol="0" anchor="t"/>
+          <a:lstStyle/>
+          <a:p>
+            <a:pPr indent="0" marL="0">
+              <a:buNone/>
+            </a:pPr>
+            <a:r>
+              <a:rPr lang="en-US" sz="850" b="1" spc="400" kern="0" dirty="0">
+                <a:solidFill>
+                  <a:srgbClr val="E8C290"/>
+                </a:solidFill>
+                <a:latin typeface="Arial" pitchFamily="34" charset="0"/>
+                <a:ea typeface="Arial" pitchFamily="34" charset="-122"/>
+                <a:cs typeface="Arial" pitchFamily="34" charset="-120"/>
+              </a:rPr>
+              <a:t>WHO PAYS</a:t>
+            </a:r>
+            <a:endParaRPr lang="en-US" sz="850" dirty="0"/>
+          </a:p>
+        </p:txBody>
+      </p:sp>
+      <p:sp>
+        <p:nvSpPr>
+          <p:cNvPr id="6" name="Shape 4"/>
+          <p:cNvSpPr/>
+          <p:nvPr/>
+        </p:nvSpPr>
+        <p:spPr>
+          <a:xfrm>
+            <a:off x="2768498" y="1874520"/>
+            <a:ext cx="1143000" cy="219456"/>
+          </a:xfrm>
+          <a:prstGeom prst="roundRect">
+            <a:avLst>
+              <a:gd name="adj" fmla="val 50000"/>
+            </a:avLst>
+          </a:prstGeom>
+          <a:solidFill>
+            <a:srgbClr val="E8C290">
+              <a:alpha val="12000"/>
+            </a:srgbClr>
+          </a:solidFill>
+          <a:ln w="9525">
+            <a:solidFill>
+              <a:srgbClr val="E8C290">
+                <a:alpha val="50000"/>
+              </a:srgbClr>
+            </a:solidFill>
+            <a:prstDash val="solid"/>
+          </a:ln>
+        </p:spPr>
+      </p:sp>
+      <p:sp>
+        <p:nvSpPr>
+          <p:cNvPr id="7" name="Text 5"/>
+          <p:cNvSpPr txBox="1"/>
+          <p:nvPr/>
+        </p:nvSpPr>
+        <p:spPr>
+          <a:xfrm>
+            <a:off x="2768498" y="1874520"/>
+            <a:ext cx="1143000" cy="219456"/>
+          </a:xfrm>
+          <a:prstGeom prst="rect">
+            <a:avLst/>
+          </a:prstGeom>
+          <a:noFill/>
+          <a:ln/>
+        </p:spPr>
+        <p:txBody>
+          <a:bodyPr wrap="square" lIns="0" tIns="0" rIns="0" bIns="0" rtlCol="0" anchor="ctr"/>
+          <a:lstStyle/>
+          <a:p>
+            <a:pPr algn="ctr" indent="0" marL="0">
+              <a:buNone/>
+            </a:pPr>
+            <a:r>
+              <a:rPr lang="en-US" sz="750" b="1" spc="200" kern="0" dirty="0">
+                <a:solidFill>
+                  <a:srgbClr val="E8C290"/>
+                </a:solidFill>
+                <a:latin typeface="Arial" pitchFamily="34" charset="0"/>
+                <a:ea typeface="Arial" pitchFamily="34" charset="-122"/>
+                <a:cs typeface="Arial" pitchFamily="34" charset="-120"/>
+              </a:rPr>
+              <a:t>HYPOTHESES</a:t>
+            </a:r>
+            <a:endParaRPr lang="en-US" sz="750" dirty="0"/>
+          </a:p>
+        </p:txBody>
+      </p:sp>
+      <p:sp>
+        <p:nvSpPr>
+          <p:cNvPr id="8" name="Text 6"/>
+          <p:cNvSpPr txBox="1"/>
+          <p:nvPr/>
+        </p:nvSpPr>
+        <p:spPr>
+          <a:xfrm>
+            <a:off x="914400" y="2240280"/>
+            <a:ext cx="2997098" cy="2377440"/>
+          </a:xfrm>
+          <a:prstGeom prst="rect">
+            <a:avLst/>
+          </a:prstGeom>
+          <a:noFill/>
+          <a:ln/>
+        </p:spPr>
+        <p:txBody>
+          <a:bodyPr wrap="square" lIns="0" tIns="0" rIns="0" bIns="0" rtlCol="0" anchor="t"/>
+          <a:lstStyle/>
+          <a:p>
+            <a:pPr indent="0" marL="0">
+              <a:buNone/>
+            </a:pPr>
+            <a:r>
+              <a:rPr lang="en-US" sz="1200" b="1" dirty="0">
+                <a:solidFill>
+                  <a:srgbClr val="FFF6E6"/>
+                </a:solidFill>
+                <a:latin typeface="Arial" pitchFamily="34" charset="0"/>
+                <a:ea typeface="Arial" pitchFamily="34" charset="-122"/>
+                <a:cs typeface="Arial" pitchFamily="34" charset="-120"/>
+              </a:rPr>
+              <a:t>ACE, customer zero.</a:t>
+            </a:r>
+            <a:pPr indent="0" marL="0">
+              <a:buNone/>
+            </a:pPr>
+            <a:r>
+              <a:rPr lang="en-US" sz="1200" dirty="0">
+                <a:solidFill>
+                  <a:srgbClr val="E4D8C6"/>
+                </a:solidFill>
+                <a:latin typeface="Arial" pitchFamily="34" charset="0"/>
+                <a:ea typeface="Arial" pitchFamily="34" charset="-122"/>
+                <a:cs typeface="Arial" pitchFamily="34" charset="-120"/>
+              </a:rPr>
+              <a:t> Buyer and user; our next real client runs through it Monday.
+</a:t>
+            </a:r>
+            <a:pPr indent="0" marL="0">
+              <a:buNone/>
+            </a:pPr>
+            <a:r>
+              <a:rPr lang="en-US" sz="1200" b="1" dirty="0">
+                <a:solidFill>
+                  <a:srgbClr val="FFF6E6"/>
+                </a:solidFill>
+                <a:latin typeface="Arial" pitchFamily="34" charset="0"/>
+                <a:ea typeface="Arial" pitchFamily="34" charset="-122"/>
+                <a:cs typeface="Arial" pitchFamily="34" charset="-120"/>
+              </a:rPr>
+              <a:t>Google Ads agencies serving e-commerce.</a:t>
+            </a:r>
+            <a:pPr indent="0" marL="0">
+              <a:buNone/>
+            </a:pPr>
+            <a:r>
+              <a:rPr lang="en-US" sz="1200" dirty="0">
+                <a:solidFill>
+                  <a:srgbClr val="E4D8C6"/>
+                </a:solidFill>
+                <a:latin typeface="Arial" pitchFamily="34" charset="0"/>
+                <a:ea typeface="Arial" pitchFamily="34" charset="-122"/>
+                <a:cs typeface="Arial" pitchFamily="34" charset="-120"/>
+              </a:rPr>
+              <a:t> Onboarding hours are unbilled; launch speed keeps clients.
+</a:t>
+            </a:r>
+            <a:pPr indent="0" marL="0">
+              <a:buNone/>
+            </a:pPr>
+            <a:r>
+              <a:rPr lang="en-US" sz="1200" b="1" dirty="0">
+                <a:solidFill>
+                  <a:srgbClr val="FFF6E6"/>
+                </a:solidFill>
+                <a:latin typeface="Arial" pitchFamily="34" charset="0"/>
+                <a:ea typeface="Arial" pitchFamily="34" charset="-122"/>
+                <a:cs typeface="Arial" pitchFamily="34" charset="-120"/>
+              </a:rPr>
+              <a:t>In-house growth teams</a:t>
+            </a:r>
+            <a:pPr indent="0" marL="0">
+              <a:buNone/>
+            </a:pPr>
+            <a:r>
+              <a:rPr lang="en-US" sz="1200" dirty="0">
+                <a:solidFill>
+                  <a:srgbClr val="E4D8C6"/>
+                </a:solidFill>
+                <a:latin typeface="Arial" pitchFamily="34" charset="0"/>
+                <a:ea typeface="Arial" pitchFamily="34" charset="-122"/>
+                <a:cs typeface="Arial" pitchFamily="34" charset="-120"/>
+              </a:rPr>
+              <a:t> onboarding agencies and freelancers: same checklist, reversed.</a:t>
+            </a:r>
+            <a:endParaRPr lang="en-US" sz="1200" dirty="0"/>
+          </a:p>
+        </p:txBody>
+      </p:sp>
+      <p:sp>
+        <p:nvSpPr>
+          <p:cNvPr id="9" name="Shape 7"/>
+          <p:cNvSpPr/>
+          <p:nvPr/>
+        </p:nvSpPr>
+        <p:spPr>
+          <a:xfrm>
+            <a:off x="4368698" y="1691640"/>
+            <a:ext cx="3454298" cy="3108960"/>
+          </a:xfrm>
+          <a:prstGeom prst="roundRect">
+            <a:avLst>
+              <a:gd name="adj" fmla="val 3529"/>
+            </a:avLst>
+          </a:prstGeom>
+          <a:solidFill>
+            <a:srgbClr val="1F1610"/>
+          </a:solidFill>
+          <a:ln w="9525">
+            <a:solidFill>
+              <a:srgbClr val="332A1F"/>
+            </a:solidFill>
+            <a:prstDash val="solid"/>
+          </a:ln>
+          <a:effectLst>
+            <a:outerShdw sx="100000" sy="100000" kx="0" ky="0" algn="bl" rotWithShape="0" blurRad="152400" dist="50800" dir="5400000">
+              <a:srgbClr val="000000">
+                <a:alpha val="35000"/>
+              </a:srgbClr>
+            </a:outerShdw>
+          </a:effectLst>
+        </p:spPr>
+      </p:sp>
+      <p:sp>
+        <p:nvSpPr>
+          <p:cNvPr id="10" name="Text 8"/>
+          <p:cNvSpPr txBox="1"/>
+          <p:nvPr/>
+        </p:nvSpPr>
+        <p:spPr>
+          <a:xfrm>
+            <a:off x="4597298" y="1874520"/>
+            <a:ext cx="1828800" cy="228600"/>
+          </a:xfrm>
+          <a:prstGeom prst="rect">
+            <a:avLst/>
+          </a:prstGeom>
+          <a:noFill/>
+          <a:ln/>
+        </p:spPr>
+        <p:txBody>
+          <a:bodyPr wrap="square" lIns="0" tIns="0" rIns="0" bIns="0" rtlCol="0" anchor="t"/>
+          <a:lstStyle/>
+          <a:p>
+            <a:pPr indent="0" marL="0">
+              <a:buNone/>
+            </a:pPr>
+            <a:r>
+              <a:rPr lang="en-US" sz="850" b="1" spc="400" kern="0" dirty="0">
+                <a:solidFill>
+                  <a:srgbClr val="E8C290"/>
+                </a:solidFill>
+                <a:latin typeface="Arial" pitchFamily="34" charset="0"/>
+                <a:ea typeface="Arial" pitchFamily="34" charset="-122"/>
+                <a:cs typeface="Arial" pitchFamily="34" charset="-120"/>
+              </a:rPr>
+              <a:t>PRICING</a:t>
+            </a:r>
+            <a:endParaRPr lang="en-US" sz="850" dirty="0"/>
+          </a:p>
+        </p:txBody>
+      </p:sp>
+      <p:sp>
+        <p:nvSpPr>
+          <p:cNvPr id="11" name="Shape 9"/>
+          <p:cNvSpPr/>
+          <p:nvPr/>
+        </p:nvSpPr>
+        <p:spPr>
+          <a:xfrm>
+            <a:off x="6451397" y="1874520"/>
+            <a:ext cx="1143000" cy="219456"/>
+          </a:xfrm>
+          <a:prstGeom prst="roundRect">
+            <a:avLst>
+              <a:gd name="adj" fmla="val 50000"/>
+            </a:avLst>
+          </a:prstGeom>
+          <a:solidFill>
+            <a:srgbClr val="E8C290">
+              <a:alpha val="12000"/>
+            </a:srgbClr>
+          </a:solidFill>
+          <a:ln w="9525">
+            <a:solidFill>
+              <a:srgbClr val="E8C290">
+                <a:alpha val="50000"/>
+              </a:srgbClr>
+            </a:solidFill>
+            <a:prstDash val="solid"/>
+          </a:ln>
+        </p:spPr>
+      </p:sp>
+      <p:sp>
+        <p:nvSpPr>
+          <p:cNvPr id="12" name="Text 10"/>
+          <p:cNvSpPr txBox="1"/>
+          <p:nvPr/>
+        </p:nvSpPr>
+        <p:spPr>
+          <a:xfrm>
+            <a:off x="6451397" y="1874520"/>
+            <a:ext cx="1143000" cy="219456"/>
+          </a:xfrm>
+          <a:prstGeom prst="rect">
+            <a:avLst/>
+          </a:prstGeom>
+          <a:noFill/>
+          <a:ln/>
+        </p:spPr>
+        <p:txBody>
+          <a:bodyPr wrap="square" lIns="0" tIns="0" rIns="0" bIns="0" rtlCol="0" anchor="ctr"/>
+          <a:lstStyle/>
+          <a:p>
+            <a:pPr algn="ctr" indent="0" marL="0">
+              <a:buNone/>
+            </a:pPr>
+            <a:r>
+              <a:rPr lang="en-US" sz="750" b="1" spc="200" kern="0" dirty="0">
+                <a:solidFill>
+                  <a:srgbClr val="E8C290"/>
+                </a:solidFill>
+                <a:latin typeface="Arial" pitchFamily="34" charset="0"/>
+                <a:ea typeface="Arial" pitchFamily="34" charset="-122"/>
+                <a:cs typeface="Arial" pitchFamily="34" charset="-120"/>
+              </a:rPr>
+              <a:t>HYPOTHESIS</a:t>
+            </a:r>
+            <a:endParaRPr lang="en-US" sz="750" dirty="0"/>
+          </a:p>
+        </p:txBody>
+      </p:sp>
+      <p:sp>
+        <p:nvSpPr>
+          <p:cNvPr id="13" name="Text 11"/>
+          <p:cNvSpPr txBox="1"/>
+          <p:nvPr/>
+        </p:nvSpPr>
+        <p:spPr>
+          <a:xfrm>
+            <a:off x="4597298" y="2194560"/>
+            <a:ext cx="2997098" cy="822960"/>
+          </a:xfrm>
+          <a:prstGeom prst="rect">
+            <a:avLst/>
+          </a:prstGeom>
+          <a:noFill/>
+          <a:ln/>
+        </p:spPr>
+        <p:txBody>
+          <a:bodyPr wrap="square" lIns="0" tIns="0" rIns="0" bIns="0" rtlCol="0" anchor="ctr"/>
+          <a:lstStyle/>
+          <a:p>
+            <a:pPr indent="0" marL="0">
+              <a:buNone/>
+            </a:pPr>
+            <a:r>
+              <a:rPr lang="en-US" sz="4400" dirty="0">
+                <a:solidFill>
+                  <a:srgbClr val="FFF6E6"/>
+                </a:solidFill>
+                <a:latin typeface="Arial" pitchFamily="34" charset="0"/>
+                <a:ea typeface="Arial" pitchFamily="34" charset="-122"/>
+                <a:cs typeface="Arial" pitchFamily="34" charset="-120"/>
+              </a:rPr>
+              <a:t>$500</a:t>
+            </a:r>
+            <a:pPr indent="0" marL="0">
+              <a:buNone/>
+            </a:pPr>
+            <a:r>
+              <a:rPr lang="en-US" sz="1300" dirty="0">
+                <a:solidFill>
+                  <a:srgbClr val="B5A186"/>
+                </a:solidFill>
+                <a:latin typeface="Arial" pitchFamily="34" charset="0"/>
+                <a:ea typeface="Arial" pitchFamily="34" charset="-122"/>
+                <a:cs typeface="Arial" pitchFamily="34" charset="-120"/>
+              </a:rPr>
+              <a:t>  / month per agency</a:t>
+            </a:r>
+            <a:endParaRPr lang="en-US" sz="4400" dirty="0"/>
+          </a:p>
+        </p:txBody>
+      </p:sp>
+      <p:sp>
+        <p:nvSpPr>
+          <p:cNvPr id="14" name="Text 12"/>
+          <p:cNvSpPr txBox="1"/>
+          <p:nvPr/>
+        </p:nvSpPr>
+        <p:spPr>
+          <a:xfrm>
+            <a:off x="4597298" y="3063240"/>
+            <a:ext cx="2997098" cy="1554480"/>
+          </a:xfrm>
+          <a:prstGeom prst="rect">
+            <a:avLst/>
+          </a:prstGeom>
+          <a:noFill/>
+          <a:ln/>
+        </p:spPr>
+        <p:txBody>
+          <a:bodyPr wrap="square" lIns="0" tIns="0" rIns="0" bIns="0" rtlCol="0" anchor="t"/>
+          <a:lstStyle/>
+          <a:p>
+            <a:pPr indent="0" marL="0">
+              <a:buNone/>
+            </a:pPr>
+            <a:r>
+              <a:rPr lang="en-US" sz="1200" dirty="0">
+                <a:solidFill>
+                  <a:srgbClr val="E4D8C6"/>
+                </a:solidFill>
+                <a:latin typeface="Arial" pitchFamily="34" charset="0"/>
+                <a:ea typeface="Arial" pitchFamily="34" charset="-122"/>
+                <a:cs typeface="Arial" pitchFamily="34" charset="-120"/>
+              </a:rPr>
+              <a:t>up to 20 active clients; the box bought or leased.
+</a:t>
+            </a:r>
+            <a:pPr indent="0" marL="0">
+              <a:buNone/>
+            </a:pPr>
+            <a:r>
+              <a:rPr lang="en-US" sz="1200" b="1" dirty="0">
+                <a:solidFill>
+                  <a:srgbClr val="FFF6E6"/>
+                </a:solidFill>
+                <a:latin typeface="Arial" pitchFamily="34" charset="0"/>
+                <a:ea typeface="Arial" pitchFamily="34" charset="-122"/>
+                <a:cs typeface="Arial" pitchFamily="34" charset="-120"/>
+              </a:rPr>
+              <a:t>12 h × $100/h ≈ $1,200</a:t>
+            </a:r>
+            <a:pPr indent="0" marL="0">
+              <a:buNone/>
+            </a:pPr>
+            <a:r>
+              <a:rPr lang="en-US" sz="1200" dirty="0">
+                <a:solidFill>
+                  <a:srgbClr val="E4D8C6"/>
+                </a:solidFill>
+                <a:latin typeface="Arial" pitchFamily="34" charset="0"/>
+                <a:ea typeface="Arial" pitchFamily="34" charset="-122"/>
+                <a:cs typeface="Arial" pitchFamily="34" charset="-120"/>
+              </a:rPr>
+              <a:t> saved per onboarding. Five a year cover it. Fixed box, not a token bill.</a:t>
+            </a:r>
+            <a:endParaRPr lang="en-US" sz="1200" dirty="0"/>
+          </a:p>
+        </p:txBody>
+      </p:sp>
+      <p:sp>
+        <p:nvSpPr>
+          <p:cNvPr id="15" name="Shape 13"/>
+          <p:cNvSpPr/>
+          <p:nvPr/>
+        </p:nvSpPr>
+        <p:spPr>
+          <a:xfrm>
+            <a:off x="8051597" y="1691640"/>
+            <a:ext cx="3454298" cy="3108960"/>
+          </a:xfrm>
+          <a:prstGeom prst="roundRect">
+            <a:avLst>
+              <a:gd name="adj" fmla="val 3529"/>
+            </a:avLst>
+          </a:prstGeom>
+          <a:solidFill>
+            <a:srgbClr val="1F1610"/>
+          </a:solidFill>
+          <a:ln w="9525">
+            <a:solidFill>
+              <a:srgbClr val="332A1F"/>
+            </a:solidFill>
+            <a:prstDash val="solid"/>
+          </a:ln>
+          <a:effectLst>
+            <a:outerShdw sx="100000" sy="100000" kx="0" ky="0" algn="bl" rotWithShape="0" blurRad="152400" dist="50800" dir="5400000">
+              <a:srgbClr val="000000">
+                <a:alpha val="35000"/>
+              </a:srgbClr>
+            </a:outerShdw>
+          </a:effectLst>
+        </p:spPr>
+      </p:sp>
+      <p:sp>
+        <p:nvSpPr>
+          <p:cNvPr id="16" name="Text 14"/>
+          <p:cNvSpPr txBox="1"/>
+          <p:nvPr/>
+        </p:nvSpPr>
+        <p:spPr>
+          <a:xfrm>
+            <a:off x="8280197" y="1874520"/>
+            <a:ext cx="2743200" cy="228600"/>
+          </a:xfrm>
+          <a:prstGeom prst="rect">
+            <a:avLst/>
+          </a:prstGeom>
+          <a:noFill/>
+          <a:ln/>
+        </p:spPr>
+        <p:txBody>
+          <a:bodyPr wrap="square" lIns="0" tIns="0" rIns="0" bIns="0" rtlCol="0" anchor="t"/>
+          <a:lstStyle/>
+          <a:p>
+            <a:pPr indent="0" marL="0">
+              <a:buNone/>
+            </a:pPr>
+            <a:r>
+              <a:rPr lang="en-US" sz="850" b="1" spc="400" kern="0" dirty="0">
+                <a:solidFill>
+                  <a:srgbClr val="E8C290"/>
+                </a:solidFill>
+                <a:latin typeface="Arial" pitchFamily="34" charset="0"/>
+                <a:ea typeface="Arial" pitchFamily="34" charset="-122"/>
+                <a:cs typeface="Arial" pitchFamily="34" charset="-120"/>
+              </a:rPr>
+              <a:t>WEDGE → EXPANSION</a:t>
+            </a:r>
+            <a:endParaRPr lang="en-US" sz="850" dirty="0"/>
+          </a:p>
+        </p:txBody>
+      </p:sp>
+      <p:sp>
+        <p:nvSpPr>
+          <p:cNvPr id="17" name="Shape 15"/>
+          <p:cNvSpPr/>
+          <p:nvPr/>
+        </p:nvSpPr>
+        <p:spPr>
+          <a:xfrm>
+            <a:off x="8280197" y="2240280"/>
+            <a:ext cx="2997098" cy="713232"/>
+          </a:xfrm>
+          <a:prstGeom prst="roundRect">
+            <a:avLst>
+              <a:gd name="adj" fmla="val 10256"/>
+            </a:avLst>
+          </a:prstGeom>
+          <a:solidFill>
+            <a:srgbClr val="281D15"/>
+          </a:solidFill>
+          <a:ln w="9525">
+            <a:solidFill>
+              <a:srgbClr val="332A1F"/>
+            </a:solidFill>
+            <a:prstDash val="solid"/>
+          </a:ln>
+        </p:spPr>
+      </p:sp>
+      <p:sp>
+        <p:nvSpPr>
+          <p:cNvPr id="18" name="Text 16"/>
+          <p:cNvSpPr txBox="1"/>
+          <p:nvPr/>
+        </p:nvSpPr>
+        <p:spPr>
+          <a:xfrm>
+            <a:off x="8417357" y="2240280"/>
+            <a:ext cx="2722778" cy="713232"/>
+          </a:xfrm>
+          <a:prstGeom prst="rect">
+            <a:avLst/>
+          </a:prstGeom>
+          <a:noFill/>
+          <a:ln/>
+        </p:spPr>
+        <p:txBody>
+          <a:bodyPr wrap="square" lIns="0" tIns="0" rIns="0" bIns="0" rtlCol="0" anchor="ctr"/>
+          <a:lstStyle/>
+          <a:p>
+            <a:pPr indent="0" marL="0">
+              <a:buNone/>
+            </a:pPr>
+            <a:r>
+              <a:rPr lang="en-US" sz="1200" b="1" dirty="0">
+                <a:solidFill>
+                  <a:srgbClr val="FFF6E6"/>
+                </a:solidFill>
+                <a:latin typeface="Arial" pitchFamily="34" charset="0"/>
+                <a:ea typeface="Arial" pitchFamily="34" charset="-122"/>
+                <a:cs typeface="Arial" pitchFamily="34" charset="-120"/>
+              </a:rPr>
+              <a:t>One link.</a:t>
+            </a:r>
+            <a:pPr indent="0" marL="0">
+              <a:buNone/>
+            </a:pPr>
+            <a:endParaRPr lang="en-US" sz="1200" dirty="0"/>
+          </a:p>
+          <a:p>
+            <a:pPr indent="0" marL="0">
+              <a:buNone/>
+            </a:pPr>
+            <a:r>
+              <a:rPr lang="en-US" sz="1050" dirty="0">
+                <a:solidFill>
+                  <a:srgbClr val="E4D8C6"/>
+                </a:solidFill>
+                <a:latin typeface="Arial" pitchFamily="34" charset="0"/>
+                <a:ea typeface="Arial" pitchFamily="34" charset="-122"/>
+                <a:cs typeface="Arial" pitchFamily="34" charset="-120"/>
+              </a:rPr>
+              <a:t>The client's AI answers; an hour later: BRD, gap list, break-even table. Sells on its own.</a:t>
+            </a:r>
+            <a:endParaRPr lang="en-US" sz="1200" dirty="0"/>
+          </a:p>
+        </p:txBody>
+      </p:sp>
+      <p:sp>
+        <p:nvSpPr>
+          <p:cNvPr id="19" name="Shape 17"/>
+          <p:cNvSpPr/>
+          <p:nvPr/>
+        </p:nvSpPr>
+        <p:spPr>
+          <a:xfrm>
+            <a:off x="8280197" y="3063240"/>
+            <a:ext cx="2997098" cy="713232"/>
+          </a:xfrm>
+          <a:prstGeom prst="roundRect">
+            <a:avLst>
+              <a:gd name="adj" fmla="val 10256"/>
+            </a:avLst>
+          </a:prstGeom>
+          <a:solidFill>
+            <a:srgbClr val="281D15"/>
+          </a:solidFill>
+          <a:ln w="9525">
+            <a:solidFill>
+              <a:srgbClr val="332A1F"/>
+            </a:solidFill>
+            <a:prstDash val="solid"/>
+          </a:ln>
+        </p:spPr>
+      </p:sp>
+      <p:sp>
+        <p:nvSpPr>
+          <p:cNvPr id="20" name="Text 18"/>
+          <p:cNvSpPr txBox="1"/>
+          <p:nvPr/>
+        </p:nvSpPr>
+        <p:spPr>
+          <a:xfrm>
+            <a:off x="8417357" y="3063240"/>
+            <a:ext cx="2722778" cy="713232"/>
+          </a:xfrm>
+          <a:prstGeom prst="rect">
+            <a:avLst/>
+          </a:prstGeom>
+          <a:noFill/>
+          <a:ln/>
+        </p:spPr>
+        <p:txBody>
+          <a:bodyPr wrap="square" lIns="0" tIns="0" rIns="0" bIns="0" rtlCol="0" anchor="ctr"/>
+          <a:lstStyle/>
+          <a:p>
+            <a:pPr indent="0" marL="0">
+              <a:buNone/>
+            </a:pPr>
+            <a:r>
+              <a:rPr lang="en-US" sz="1200" b="1" dirty="0">
+                <a:solidFill>
+                  <a:srgbClr val="FFF6E6"/>
+                </a:solidFill>
+                <a:latin typeface="Arial" pitchFamily="34" charset="0"/>
+                <a:ea typeface="Arial" pitchFamily="34" charset="-122"/>
+                <a:cs typeface="Arial" pitchFamily="34" charset="-120"/>
+              </a:rPr>
+              <a:t>SDLC makes it recurring.</a:t>
+            </a:r>
+            <a:pPr indent="0" marL="0">
+              <a:buNone/>
+            </a:pPr>
+            <a:endParaRPr lang="en-US" sz="1200" dirty="0"/>
+          </a:p>
+          <a:p>
+            <a:pPr indent="0" marL="0">
+              <a:buNone/>
+            </a:pPr>
+            <a:r>
+              <a:rPr lang="en-US" sz="1050" dirty="0">
+                <a:solidFill>
+                  <a:srgbClr val="E4D8C6"/>
+                </a:solidFill>
+                <a:latin typeface="Arial" pitchFamily="34" charset="0"/>
+                <a:ea typeface="Arial" pitchFamily="34" charset="-122"/>
+                <a:cs typeface="Arial" pitchFamily="34" charset="-120"/>
+              </a:rPr>
+              <a:t>Specs, tickets, gated delivery, client updates for the life of the account.</a:t>
+            </a:r>
+            <a:endParaRPr lang="en-US" sz="1200" dirty="0"/>
+          </a:p>
+        </p:txBody>
+      </p:sp>
+      <p:sp>
+        <p:nvSpPr>
+          <p:cNvPr id="21" name="Text 19"/>
+          <p:cNvSpPr txBox="1"/>
+          <p:nvPr/>
+        </p:nvSpPr>
+        <p:spPr>
+          <a:xfrm>
+            <a:off x="8325917" y="2880360"/>
+            <a:ext cx="274320" cy="182880"/>
+          </a:xfrm>
+          <a:prstGeom prst="rect">
+            <a:avLst/>
+          </a:prstGeom>
+          <a:noFill/>
+          <a:ln/>
+        </p:spPr>
+        <p:txBody>
+          <a:bodyPr wrap="square" lIns="0" tIns="0" rIns="0" bIns="0" rtlCol="0" anchor="ctr"/>
+          <a:lstStyle/>
+          <a:p>
+            <a:pPr indent="0" marL="0">
+              <a:buNone/>
+            </a:pPr>
+            <a:r>
+              <a:rPr lang="en-US" sz="1000" dirty="0">
+                <a:solidFill>
+                  <a:srgbClr val="C9955A"/>
+                </a:solidFill>
+                <a:latin typeface="Arial" pitchFamily="34" charset="0"/>
+                <a:ea typeface="Arial" pitchFamily="34" charset="-122"/>
+                <a:cs typeface="Arial" pitchFamily="34" charset="-120"/>
+              </a:rPr>
+              <a:t>↓</a:t>
+            </a:r>
+            <a:endParaRPr lang="en-US" sz="1000" dirty="0"/>
+          </a:p>
+        </p:txBody>
+      </p:sp>
+      <p:sp>
+        <p:nvSpPr>
+          <p:cNvPr id="22" name="Shape 20"/>
+          <p:cNvSpPr/>
+          <p:nvPr/>
+        </p:nvSpPr>
+        <p:spPr>
+          <a:xfrm>
+            <a:off x="8280197" y="3886200"/>
+            <a:ext cx="2997098" cy="713232"/>
+          </a:xfrm>
+          <a:prstGeom prst="roundRect">
+            <a:avLst>
+              <a:gd name="adj" fmla="val 10256"/>
+            </a:avLst>
+          </a:prstGeom>
+          <a:solidFill>
+            <a:srgbClr val="281D15"/>
+          </a:solidFill>
+          <a:ln w="9525">
+            <a:solidFill>
+              <a:srgbClr val="332A1F"/>
+            </a:solidFill>
+            <a:prstDash val="solid"/>
+          </a:ln>
+        </p:spPr>
+      </p:sp>
+      <p:sp>
+        <p:nvSpPr>
+          <p:cNvPr id="23" name="Text 21"/>
+          <p:cNvSpPr txBox="1"/>
+          <p:nvPr/>
+        </p:nvSpPr>
+        <p:spPr>
+          <a:xfrm>
+            <a:off x="8417357" y="3886200"/>
+            <a:ext cx="2722778" cy="713232"/>
+          </a:xfrm>
+          <a:prstGeom prst="rect">
+            <a:avLst/>
+          </a:prstGeom>
+          <a:noFill/>
+          <a:ln/>
+        </p:spPr>
+        <p:txBody>
+          <a:bodyPr wrap="square" lIns="0" tIns="0" rIns="0" bIns="0" rtlCol="0" anchor="ctr"/>
+          <a:lstStyle/>
+          <a:p>
+            <a:pPr indent="0" marL="0">
+              <a:buNone/>
+            </a:pPr>
+            <a:r>
+              <a:rPr lang="en-US" sz="1200" b="1" dirty="0">
+                <a:solidFill>
+                  <a:srgbClr val="FFF6E6"/>
+                </a:solidFill>
+                <a:latin typeface="Arial" pitchFamily="34" charset="0"/>
+                <a:ea typeface="Arial" pitchFamily="34" charset="-122"/>
+                <a:cs typeface="Arial" pitchFamily="34" charset="-120"/>
+              </a:rPr>
+              <a:t>Every agency workflow.</a:t>
+            </a:r>
+            <a:pPr indent="0" marL="0">
+              <a:buNone/>
+            </a:pPr>
+            <a:endParaRPr lang="en-US" sz="1200" dirty="0"/>
+          </a:p>
+          <a:p>
+            <a:pPr indent="0" marL="0">
+              <a:buNone/>
+            </a:pPr>
+            <a:r>
+              <a:rPr lang="en-US" sz="1050" dirty="0">
+                <a:solidFill>
+                  <a:srgbClr val="E4D8C6"/>
+                </a:solidFill>
+                <a:latin typeface="Arial" pitchFamily="34" charset="0"/>
+                <a:ea typeface="Arial" pitchFamily="34" charset="-122"/>
+                <a:cs typeface="Arial" pitchFamily="34" charset="-120"/>
+              </a:rPr>
+              <a:t>The checklist is config; the gates are generic.</a:t>
+            </a:r>
+            <a:endParaRPr lang="en-US" sz="1200" dirty="0"/>
+          </a:p>
+        </p:txBody>
+      </p:sp>
+      <p:sp>
+        <p:nvSpPr>
+          <p:cNvPr id="24" name="Text 22"/>
+          <p:cNvSpPr txBox="1"/>
+          <p:nvPr/>
+        </p:nvSpPr>
+        <p:spPr>
+          <a:xfrm>
+            <a:off x="8325917" y="3703320"/>
+            <a:ext cx="274320" cy="182880"/>
+          </a:xfrm>
+          <a:prstGeom prst="rect">
+            <a:avLst/>
+          </a:prstGeom>
+          <a:noFill/>
+          <a:ln/>
+        </p:spPr>
+        <p:txBody>
+          <a:bodyPr wrap="square" lIns="0" tIns="0" rIns="0" bIns="0" rtlCol="0" anchor="ctr"/>
+          <a:lstStyle/>
+          <a:p>
+            <a:pPr indent="0" marL="0">
+              <a:buNone/>
+            </a:pPr>
+            <a:r>
+              <a:rPr lang="en-US" sz="1000" dirty="0">
+                <a:solidFill>
+                  <a:srgbClr val="C9955A"/>
+                </a:solidFill>
+                <a:latin typeface="Arial" pitchFamily="34" charset="0"/>
+                <a:ea typeface="Arial" pitchFamily="34" charset="-122"/>
+                <a:cs typeface="Arial" pitchFamily="34" charset="-120"/>
+              </a:rPr>
+              <a:t>↓</a:t>
+            </a:r>
+            <a:endParaRPr lang="en-US" sz="1000" dirty="0"/>
+          </a:p>
+        </p:txBody>
+      </p:sp>
+      <p:sp>
+        <p:nvSpPr>
+          <p:cNvPr id="25" name="Text 23"/>
+          <p:cNvSpPr txBox="1"/>
+          <p:nvPr/>
+        </p:nvSpPr>
+        <p:spPr>
+          <a:xfrm>
+            <a:off x="685800" y="4983480"/>
+            <a:ext cx="10820095" cy="822960"/>
+          </a:xfrm>
+          <a:prstGeom prst="rect">
+            <a:avLst/>
+          </a:prstGeom>
+          <a:noFill/>
+          <a:ln/>
+        </p:spPr>
+        <p:txBody>
+          <a:bodyPr wrap="square" lIns="0" tIns="0" rIns="0" bIns="0" rtlCol="0" anchor="t"/>
+          <a:lstStyle/>
+          <a:p>
+            <a:pPr indent="0" marL="0">
+              <a:buNone/>
+            </a:pPr>
+            <a:r>
+              <a:rPr lang="en-US" sz="1300" b="1" dirty="0">
+                <a:solidFill>
+                  <a:srgbClr val="F3D9A4"/>
+                </a:solidFill>
+                <a:latin typeface="Arial" pitchFamily="34" charset="0"/>
+                <a:ea typeface="Arial" pitchFamily="34" charset="-122"/>
+                <a:cs typeface="Arial" pitchFamily="34" charset="-120"/>
+              </a:rPr>
+              <a:t>Why now: </a:t>
+            </a:r>
+            <a:pPr indent="0" marL="0">
+              <a:buNone/>
+            </a:pPr>
+            <a:r>
+              <a:rPr lang="en-US" sz="1300" dirty="0">
+                <a:solidFill>
+                  <a:srgbClr val="E4D8C6"/>
+                </a:solidFill>
+                <a:latin typeface="Arial" pitchFamily="34" charset="0"/>
+                <a:ea typeface="Arial" pitchFamily="34" charset="-122"/>
+                <a:cs typeface="Arial" pitchFamily="34" charset="-120"/>
+              </a:rPr>
+              <a:t>owners already work inside AI assistants, and MCP lets them call another company's tools · a desk-side 128 GB box runs capable open models · NVIDIA's sandbox makes an unattended agent acceptable.</a:t>
+            </a:r>
+            <a:endParaRPr lang="en-US" sz="1300" dirty="0"/>
+          </a:p>
+        </p:txBody>
+      </p:sp>
+      <p:sp>
+        <p:nvSpPr>
+          <p:cNvPr id="25" name="Slide Number Placeholder 0"/>
+          <p:cNvSpPr>
+            <a:spLocks noGrp="1"/>
+          </p:cNvSpPr>
+          <p:nvPr>
+            <p:ph type="sldNum" sz="quarter" idx="4294967295"/>
+          </p:nvPr>
+        </p:nvSpPr>
+        <p:spPr>
+          <a:xfrm>
+            <a:off x="10408615" y="6355080"/>
+            <a:ext cx="1097280" cy="274320"/>
+          </a:xfrm>
+          <a:prstGeom prst="rect">
+            <a:avLst/>
+          </a:prstGeom>
+          <a:extLst>
+            <a:ext uri="{C572A759-6A51-4108-AA02-DFA0A04FC94B}">
+              <ma14:wrappingTextBoxFlag xmlns:ma14="http://schemas.microsoft.com/office/mac/drawingml/2011/main" val="0"/>
+            </a:ext>
+          </a:extLst>
+        </p:spPr>
+        <p:txBody>
+          <a:bodyPr/>
+          <a:lstStyle>
+            <a:lvl1pPr>
+              <a:defRPr sz="900">
+                <a:solidFill>
+                  <a:srgbClr val="8C7961"/>
+                </a:solidFill>
+                <a:latin typeface="Arial"/>
+                <a:ea typeface="Arial"/>
+                <a:cs typeface="Arial"/>
+              </a:defRPr>
+            </a:lvl1pPr>
+          </a:lstStyle>
+          <a:p>
+            <a:pPr algn="r"/>
+            <a:fld id="{F7021451-1387-4CA6-816F-3879F97B5CBC}" type="slidenum">
+              <a:rPr b="0" lang="en-US"/>
+              <a:t>10</a:t>
+            </a:fld>
+            <a:endParaRPr lang="en-US"/>
+          </a:p>
+        </p:txBody>
+      </p:sp>
+    </p:spTree>
+  </p:cSld>
+  <p:clrMapOvr>
+    <a:masterClrMapping/>
+  </p:clrMapOvr>
+</p:sld>
+</file>
+
+<file path=ppt/slides/slide11.xml><?xml version="1.0" encoding="utf-8"?>
+<p:sld xmlns:a="http://schemas.openxmlformats.org/drawingml/2006/main" xmlns:r="http://schemas.openxmlformats.org/officeDocument/2006/relationships" xmlns:p="http://schemas.openxmlformats.org/presentationml/2006/main">
+  <p:cSld name="Slide 11">
+    <p:spTree>
+      <p:nvGrpSpPr>
+        <p:cNvPr id="1" name=""/>
+        <p:cNvGrpSpPr/>
+        <p:nvPr/>
+      </p:nvGrpSpPr>
+      <p:grpSpPr>
+        <a:xfrm>
+          <a:off x="0" y="0"/>
+          <a:ext cx="0" cy="0"/>
+          <a:chOff x="0" y="0"/>
+          <a:chExt cx="0" cy="0"/>
+        </a:xfrm>
+      </p:grpSpPr>
+      <p:sp>
+        <p:nvSpPr>
           <p:cNvPr id="2" name="Shape 0"/>
           <p:cNvSpPr/>
           <p:nvPr/>
@@ -4666,7 +5906,7 @@
         </p:nvSpPr>
         <p:spPr>
           <a:xfrm>
-            <a:off x="685800" y="2720721"/>
+            <a:off x="685800" y="2621026"/>
             <a:ext cx="201168" cy="27432"/>
           </a:xfrm>
           <a:prstGeom prst="rect">
@@ -4691,8 +5931,8 @@
         </p:nvSpPr>
         <p:spPr>
           <a:xfrm>
-            <a:off x="1069848" y="2606040"/>
-            <a:ext cx="7509967" cy="568452"/>
+            <a:off x="1069848" y="2514600"/>
+            <a:ext cx="7509967" cy="535432"/>
           </a:xfrm>
           <a:prstGeom prst="rect">
             <a:avLst/>
@@ -4708,7 +5948,7 @@
               <a:buNone/>
             </a:pPr>
             <a:r>
-              <a:rPr lang="en-US" sz="1500" b="1" dirty="0">
+              <a:rPr lang="en-US" sz="1400" b="1" dirty="0">
                 <a:solidFill>
                   <a:srgbClr val="FFF6E6"/>
                 </a:solidFill>
@@ -4722,7 +5962,7 @@
               <a:buNone/>
             </a:pPr>
             <a:r>
-              <a:rPr lang="en-US" sz="1500" dirty="0">
+              <a:rPr lang="en-US" sz="1400" dirty="0">
                 <a:solidFill>
                   <a:srgbClr val="E4D8C6"/>
                 </a:solidFill>
@@ -4736,7 +5976,7 @@
               <a:buNone/>
             </a:pPr>
             <a:r>
-              <a:rPr lang="en-US" sz="1500" b="1" dirty="0">
+              <a:rPr lang="en-US" sz="1400" b="1" dirty="0">
                 <a:solidFill>
                   <a:srgbClr val="FFF6E6"/>
                 </a:solidFill>
@@ -4744,13 +5984,13 @@
                 <a:ea typeface="Arial" pitchFamily="34" charset="-122"/>
                 <a:cs typeface="Arial" pitchFamily="34" charset="-120"/>
               </a:rPr>
-              <a:t>61 tests pass.</a:t>
-            </a:r>
-            <a:pPr indent="0" marL="0">
-              <a:buNone/>
-            </a:pPr>
-            <a:r>
-              <a:rPr lang="en-US" sz="1500" dirty="0">
+              <a:t>78 tests pass.</a:t>
+            </a:r>
+            <a:pPr indent="0" marL="0">
+              <a:buNone/>
+            </a:pPr>
+            <a:r>
+              <a:rPr lang="en-US" sz="1400" dirty="0">
                 <a:solidFill>
                   <a:srgbClr val="E4D8C6"/>
                 </a:solidFill>
@@ -4760,7 +6000,7 @@
               </a:rPr>
               <a:t> One GB10, all on loopback.</a:t>
             </a:r>
-            <a:endParaRPr lang="en-US" sz="1500" dirty="0"/>
+            <a:endParaRPr lang="en-US" sz="1400" dirty="0"/>
           </a:p>
         </p:txBody>
       </p:sp>
@@ -4772,7 +6012,7 @@
         </p:nvSpPr>
         <p:spPr>
           <a:xfrm>
-            <a:off x="685800" y="3417189"/>
+            <a:off x="685800" y="3266186"/>
             <a:ext cx="201168" cy="27432"/>
           </a:xfrm>
           <a:prstGeom prst="rect">
@@ -4797,8 +6037,8 @@
         </p:nvSpPr>
         <p:spPr>
           <a:xfrm>
-            <a:off x="1069848" y="3302508"/>
-            <a:ext cx="7509967" cy="568452"/>
+            <a:off x="1069848" y="3159760"/>
+            <a:ext cx="7509967" cy="304292"/>
           </a:xfrm>
           <a:prstGeom prst="rect">
             <a:avLst/>
@@ -4814,7 +6054,7 @@
               <a:buNone/>
             </a:pPr>
             <a:r>
-              <a:rPr lang="en-US" sz="1500" b="1" dirty="0">
+              <a:rPr lang="en-US" sz="1400" b="1" dirty="0">
                 <a:solidFill>
                   <a:srgbClr val="FFF6E6"/>
                 </a:solidFill>
@@ -4822,13 +6062,91 @@
                 <a:ea typeface="Arial" pitchFamily="34" charset="-122"/>
                 <a:cs typeface="Arial" pitchFamily="34" charset="-120"/>
               </a:rPr>
+              <a:t>Seven stage agents under autopilot</a:t>
+            </a:r>
+            <a:pPr indent="0" marL="0">
+              <a:buNone/>
+            </a:pPr>
+            <a:r>
+              <a:rPr lang="en-US" sz="1400" dirty="0">
+                <a:solidFill>
+                  <a:srgbClr val="E4D8C6"/>
+                </a:solidFill>
+                <a:latin typeface="Arial" pitchFamily="34" charset="0"/>
+                <a:ea typeface="Arial" pitchFamily="34" charset="-122"/>
+                <a:cs typeface="Arial" pitchFamily="34" charset="-120"/>
+              </a:rPr>
+              <a:t> · Data room: client export to promotion plan</a:t>
+            </a:r>
+            <a:endParaRPr lang="en-US" sz="1400" dirty="0"/>
+          </a:p>
+        </p:txBody>
+      </p:sp>
+      <p:sp>
+        <p:nvSpPr>
+          <p:cNvPr id="33" name="Shape 31"/>
+          <p:cNvSpPr/>
+          <p:nvPr/>
+        </p:nvSpPr>
+        <p:spPr>
+          <a:xfrm>
+            <a:off x="685800" y="3680206"/>
+            <a:ext cx="201168" cy="27432"/>
+          </a:xfrm>
+          <a:prstGeom prst="rect">
+            <a:avLst/>
+          </a:prstGeom>
+          <a:solidFill>
+            <a:srgbClr val="C9955A"/>
+          </a:solidFill>
+          <a:ln w="12700">
+            <a:solidFill>
+              <a:srgbClr val="C9955A"/>
+            </a:solidFill>
+            <a:prstDash val="solid"/>
+          </a:ln>
+        </p:spPr>
+      </p:sp>
+      <p:sp>
+        <p:nvSpPr>
+          <p:cNvPr id="34" name="Text 32"/>
+          <p:cNvSpPr txBox="1"/>
+          <p:nvPr/>
+        </p:nvSpPr>
+        <p:spPr>
+          <a:xfrm>
+            <a:off x="1069848" y="3573780"/>
+            <a:ext cx="7509967" cy="535432"/>
+          </a:xfrm>
+          <a:prstGeom prst="rect">
+            <a:avLst/>
+          </a:prstGeom>
+          <a:noFill/>
+          <a:ln/>
+        </p:spPr>
+        <p:txBody>
+          <a:bodyPr wrap="square" lIns="0" tIns="0" rIns="0" bIns="0" rtlCol="0" anchor="t"/>
+          <a:lstStyle/>
+          <a:p>
+            <a:pPr indent="0" marL="0">
+              <a:buNone/>
+            </a:pPr>
+            <a:r>
+              <a:rPr lang="en-US" sz="1400" b="1" dirty="0">
+                <a:solidFill>
+                  <a:srgbClr val="FFF6E6"/>
+                </a:solidFill>
+                <a:latin typeface="Arial" pitchFamily="34" charset="0"/>
+                <a:ea typeface="Arial" pitchFamily="34" charset="-122"/>
+                <a:cs typeface="Arial" pitchFamily="34" charset="-120"/>
+              </a:rPr>
               <a:t>Next week:</a:t>
             </a:r>
             <a:pPr indent="0" marL="0">
               <a:buNone/>
             </a:pPr>
             <a:r>
-              <a:rPr lang="en-US" sz="1500" dirty="0">
+              <a:rPr lang="en-US" sz="1400" dirty="0">
                 <a:solidFill>
                   <a:srgbClr val="E4D8C6"/>
                 </a:solidFill>
@@ -4838,19 +6156,19 @@
               </a:rPr>
               <a:t> ACE's next real client goes through it; we measure days to first spend against the last three clients.</a:t>
             </a:r>
-            <a:endParaRPr lang="en-US" sz="1500" dirty="0"/>
-          </a:p>
-        </p:txBody>
-      </p:sp>
-      <p:sp>
-        <p:nvSpPr>
-          <p:cNvPr id="33" name="Shape 31"/>
-          <p:cNvSpPr/>
-          <p:nvPr/>
-        </p:nvSpPr>
-        <p:spPr>
-          <a:xfrm>
-            <a:off x="685800" y="4113657"/>
+            <a:endParaRPr lang="en-US" sz="1400" dirty="0"/>
+          </a:p>
+        </p:txBody>
+      </p:sp>
+      <p:sp>
+        <p:nvSpPr>
+          <p:cNvPr id="35" name="Shape 33"/>
+          <p:cNvSpPr/>
+          <p:nvPr/>
+        </p:nvSpPr>
+        <p:spPr>
+          <a:xfrm>
+            <a:off x="685800" y="4325366"/>
             <a:ext cx="201168" cy="27432"/>
           </a:xfrm>
           <a:prstGeom prst="rect">
@@ -4869,14 +6187,14 @@
       </p:sp>
       <p:sp>
         <p:nvSpPr>
-          <p:cNvPr id="34" name="Text 32"/>
-          <p:cNvSpPr txBox="1"/>
-          <p:nvPr/>
-        </p:nvSpPr>
-        <p:spPr>
-          <a:xfrm>
-            <a:off x="1069848" y="3998976"/>
-            <a:ext cx="7509967" cy="568452"/>
+          <p:cNvPr id="36" name="Text 34"/>
+          <p:cNvSpPr txBox="1"/>
+          <p:nvPr/>
+        </p:nvSpPr>
+        <p:spPr>
+          <a:xfrm>
+            <a:off x="1069848" y="4218940"/>
+            <a:ext cx="7509967" cy="535432"/>
           </a:xfrm>
           <a:prstGeom prst="rect">
             <a:avLst/>
@@ -4892,7 +6210,7 @@
               <a:buNone/>
             </a:pPr>
             <a:r>
-              <a:rPr lang="en-US" sz="1500" b="1" dirty="0">
+              <a:rPr lang="en-US" sz="1400" b="1" dirty="0">
                 <a:solidFill>
                   <a:srgbClr val="FFF6E6"/>
                 </a:solidFill>
@@ -4906,7 +6224,7 @@
               <a:buNone/>
             </a:pPr>
             <a:r>
-              <a:rPr lang="en-US" sz="1500" dirty="0">
+              <a:rPr lang="en-US" sz="1400" dirty="0">
                 <a:solidFill>
                   <a:srgbClr val="E4D8C6"/>
                 </a:solidFill>
@@ -4916,19 +6234,19 @@
               </a:rPr>
               <a:t> five agency owners, a $500 pilot each, and a second agency running it unaided.</a:t>
             </a:r>
-            <a:endParaRPr lang="en-US" sz="1500" dirty="0"/>
-          </a:p>
-        </p:txBody>
-      </p:sp>
-      <p:sp>
-        <p:nvSpPr>
-          <p:cNvPr id="35" name="Shape 33"/>
-          <p:cNvSpPr/>
-          <p:nvPr/>
-        </p:nvSpPr>
-        <p:spPr>
-          <a:xfrm>
-            <a:off x="685800" y="4810125"/>
+            <a:endParaRPr lang="en-US" sz="1400" dirty="0"/>
+          </a:p>
+        </p:txBody>
+      </p:sp>
+      <p:sp>
+        <p:nvSpPr>
+          <p:cNvPr id="37" name="Shape 35"/>
+          <p:cNvSpPr/>
+          <p:nvPr/>
+        </p:nvSpPr>
+        <p:spPr>
+          <a:xfrm>
+            <a:off x="685800" y="4970526"/>
             <a:ext cx="201168" cy="27432"/>
           </a:xfrm>
           <a:prstGeom prst="rect">
@@ -4947,14 +6265,14 @@
       </p:sp>
       <p:sp>
         <p:nvSpPr>
-          <p:cNvPr id="36" name="Text 34"/>
-          <p:cNvSpPr txBox="1"/>
-          <p:nvPr/>
-        </p:nvSpPr>
-        <p:spPr>
-          <a:xfrm>
-            <a:off x="1069848" y="4695444"/>
-            <a:ext cx="7509967" cy="320802"/>
+          <p:cNvPr id="38" name="Text 36"/>
+          <p:cNvSpPr txBox="1"/>
+          <p:nvPr/>
+        </p:nvSpPr>
+        <p:spPr>
+          <a:xfrm>
+            <a:off x="1069848" y="4864100"/>
+            <a:ext cx="7509967" cy="304292"/>
           </a:xfrm>
           <a:prstGeom prst="rect">
             <a:avLst/>
@@ -4970,7 +6288,7 @@
               <a:buNone/>
             </a:pPr>
             <a:r>
-              <a:rPr lang="en-US" sz="1500" b="1" dirty="0">
+              <a:rPr lang="en-US" sz="1400" b="1" dirty="0">
                 <a:solidFill>
                   <a:srgbClr val="FFF6E6"/>
                 </a:solidFill>
@@ -4984,7 +6302,7 @@
               <a:buNone/>
             </a:pPr>
             <a:r>
-              <a:rPr lang="en-US" sz="1500" dirty="0">
+              <a:rPr lang="en-US" sz="1400" dirty="0">
                 <a:solidFill>
                   <a:srgbClr val="E4D8C6"/>
                 </a:solidFill>
@@ -4994,20 +6312,20 @@
               </a:rPr>
               <a:t> leave the GB10 under an agency's desk and let it earn its keep.</a:t>
             </a:r>
-            <a:endParaRPr lang="en-US" sz="1500" dirty="0"/>
-          </a:p>
-        </p:txBody>
-      </p:sp>
-      <p:sp>
-        <p:nvSpPr>
-          <p:cNvPr id="37" name="Text 35"/>
-          <p:cNvSpPr txBox="1"/>
-          <p:nvPr/>
-        </p:nvSpPr>
-        <p:spPr>
-          <a:xfrm>
-            <a:off x="685800" y="5074920"/>
-            <a:ext cx="5486400" cy="731520"/>
+            <a:endParaRPr lang="en-US" sz="1400" dirty="0"/>
+          </a:p>
+        </p:txBody>
+      </p:sp>
+      <p:sp>
+        <p:nvSpPr>
+          <p:cNvPr id="39" name="Text 37"/>
+          <p:cNvSpPr txBox="1"/>
+          <p:nvPr/>
+        </p:nvSpPr>
+        <p:spPr>
+          <a:xfrm>
+            <a:off x="685800" y="5303520"/>
+            <a:ext cx="5486400" cy="594360"/>
           </a:xfrm>
           <a:prstGeom prst="rect">
             <a:avLst/>
@@ -5023,7 +6341,7 @@
               <a:buNone/>
             </a:pPr>
             <a:r>
-              <a:rPr lang="en-US" sz="4000" spc="2000" kern="0" dirty="0">
+              <a:rPr lang="en-US" sz="3600" spc="2000" kern="0" dirty="0">
                 <a:solidFill>
                   <a:srgbClr val="FFFFFF"/>
                 </a:solidFill>
@@ -5040,19 +6358,19 @@
               </a:rPr>
               <a:t>ACE OPS</a:t>
             </a:r>
-            <a:endParaRPr lang="en-US" sz="4000" dirty="0"/>
-          </a:p>
-        </p:txBody>
-      </p:sp>
-      <p:sp>
-        <p:nvSpPr>
-          <p:cNvPr id="38" name="Text 36"/>
-          <p:cNvSpPr txBox="1"/>
-          <p:nvPr/>
-        </p:nvSpPr>
-        <p:spPr>
-          <a:xfrm>
-            <a:off x="685800" y="5852160"/>
+            <a:endParaRPr lang="en-US" sz="3600" dirty="0"/>
+          </a:p>
+        </p:txBody>
+      </p:sp>
+      <p:sp>
+        <p:nvSpPr>
+          <p:cNvPr id="40" name="Text 38"/>
+          <p:cNvSpPr txBox="1"/>
+          <p:nvPr/>
+        </p:nvSpPr>
+        <p:spPr>
+          <a:xfrm>
+            <a:off x="685800" y="5943600"/>
             <a:ext cx="6400800" cy="274320"/>
           </a:xfrm>
           <a:prstGeom prst="rect">
@@ -5085,13 +6403,13 @@
       </p:sp>
       <p:sp>
         <p:nvSpPr>
-          <p:cNvPr id="39" name="Text 37"/>
-          <p:cNvSpPr txBox="1"/>
-          <p:nvPr/>
-        </p:nvSpPr>
-        <p:spPr>
-          <a:xfrm>
-            <a:off x="6476695" y="5394960"/>
+          <p:cNvPr id="41" name="Text 39"/>
+          <p:cNvSpPr txBox="1"/>
+          <p:nvPr/>
+        </p:nvSpPr>
+        <p:spPr>
+          <a:xfrm>
+            <a:off x="6476695" y="5577840"/>
             <a:ext cx="5029200" cy="640080"/>
           </a:xfrm>
           <a:prstGeom prst="rect">
@@ -5119,7 +6437,7 @@
                 <a:ea typeface="Arial" pitchFamily="34" charset="-122"/>
                 <a:cs typeface="Arial" pitchFamily="34" charset="-120"/>
               </a:rPr>
-              <a:t>Carl · Tyler · Jasmine T · Moorthy</a:t>
+              <a:t>Carl · Tyler · Moorthy</a:t>
             </a:r>
             <a:pPr algn="r" indent="0" marL="0">
               <a:lnSpc>
@@ -5193,7 +6511,7 @@
             <a:pPr algn="r"/>
             <a:fld id="{F7021451-1387-4CA6-816F-3879F97B5CBC}" type="slidenum">
               <a:rPr b="0" lang="en-US"/>
-              <a:t>10</a:t>
+              <a:t>11</a:t>
             </a:fld>
             <a:endParaRPr lang="en-US"/>
           </a:p>
@@ -6474,7 +7792,7 @@
                 <a:ea typeface="Arial" pitchFamily="34" charset="-122"/>
                 <a:cs typeface="Arial" pitchFamily="34" charset="-120"/>
               </a:rPr>
-              <a:t> numbers, not profit. Our demo client had never calculated break-even ROAS.</a:t>
+              <a:t> numbers, not profit. Most clients have never calculated break-even ROAS; Northline had, and the agent still checked it.</a:t>
             </a:r>
             <a:endParaRPr lang="en-US" sz="1900" dirty="0"/>
           </a:p>
@@ -10284,7 +11602,7 @@
                 <a:ea typeface="Arial" pitchFamily="34" charset="-122"/>
                 <a:cs typeface="Arial" pitchFamily="34" charset="-120"/>
               </a:rPr>
-              <a:t>A 3× campaign on seasonal decor </a:t>
+              <a:t>Seasonal decor needs 3.4× to break even. </a:t>
             </a:r>
             <a:pPr indent="0" marL="0">
               <a:lnSpc>
@@ -10301,24 +11619,7 @@
                 <a:ea typeface="Arial" pitchFamily="34" charset="-122"/>
                 <a:cs typeface="Arial" pitchFamily="34" charset="-120"/>
               </a:rPr>
-              <a:t>loses money.</a:t>
-            </a:r>
-            <a:pPr indent="0" marL="0">
-              <a:lnSpc>
-                <a:spcPct val="105000"/>
-              </a:lnSpc>
-              <a:buNone/>
-            </a:pPr>
-            <a:r>
-              <a:rPr lang="en-US" sz="3400" dirty="0">
-                <a:solidFill>
-                  <a:srgbClr val="FFF6E6"/>
-                </a:solidFill>
-                <a:latin typeface="Arial" pitchFamily="34" charset="0"/>
-                <a:ea typeface="Arial" pitchFamily="34" charset="-122"/>
-                <a:cs typeface="Arial" pitchFamily="34" charset="-120"/>
-              </a:rPr>
-              <a:t> The agent said so first.</a:t>
+              <a:t>The agent puts that next to every draft.</a:t>
             </a:r>
             <a:endParaRPr lang="en-US" sz="3400" dirty="0"/>
           </a:p>
@@ -10410,8 +11711,8 @@
         </p:nvSpPr>
         <p:spPr>
           <a:xfrm>
-            <a:off x="3886200" y="1947672"/>
-            <a:ext cx="7619695" cy="228600"/>
+            <a:off x="4023360" y="1947672"/>
+            <a:ext cx="7482535" cy="228600"/>
           </a:xfrm>
           <a:prstGeom prst="rect">
             <a:avLst/>
@@ -10581,7 +11882,7 @@
         </p:nvSpPr>
         <p:spPr>
           <a:xfrm>
-            <a:off x="6156829" y="2267712"/>
+            <a:off x="5973949" y="2267712"/>
             <a:ext cx="914400" cy="402336"/>
           </a:xfrm>
           <a:prstGeom prst="rect">
@@ -10816,7 +12117,7 @@
         </p:nvSpPr>
         <p:spPr>
           <a:xfrm>
-            <a:off x="7014045" y="2798064"/>
+            <a:off x="6831165" y="2798064"/>
             <a:ext cx="914400" cy="402336"/>
           </a:xfrm>
           <a:prstGeom prst="rect">
@@ -11051,7 +12352,7 @@
         </p:nvSpPr>
         <p:spPr>
           <a:xfrm>
-            <a:off x="7528374" y="3328416"/>
+            <a:off x="7345494" y="3328416"/>
             <a:ext cx="914400" cy="402336"/>
           </a:xfrm>
           <a:prstGeom prst="rect">
@@ -11325,7 +12626,7 @@
         </p:nvSpPr>
         <p:spPr>
           <a:xfrm>
-            <a:off x="8652279" y="3858768"/>
+            <a:off x="8469399" y="3858768"/>
             <a:ext cx="914400" cy="402336"/>
           </a:xfrm>
           <a:prstGeom prst="rect">
@@ -11632,7 +12933,7 @@
                 <a:ea typeface="Arial" pitchFamily="34" charset="-122"/>
                 <a:cs typeface="Arial" pitchFamily="34" charset="-120"/>
               </a:rPr>
-              <a:t>3× CAMPAIGN TARGET</a:t>
+              <a:t>A 3× PLAN, FOR SCALE</a:t>
             </a:r>
             <a:endParaRPr lang="en-US" sz="800" dirty="0"/>
           </a:p>
@@ -11646,12 +12947,12 @@
         </p:nvSpPr>
         <p:spPr>
           <a:xfrm>
-            <a:off x="685800" y="4754880"/>
-            <a:ext cx="10820095" cy="457200"/>
+            <a:off x="685800" y="4681728"/>
+            <a:ext cx="10820095" cy="585216"/>
           </a:xfrm>
           <a:prstGeom prst="roundRect">
             <a:avLst>
-              <a:gd name="adj" fmla="val 20000"/>
+              <a:gd name="adj" fmla="val 15625"/>
             </a:avLst>
           </a:prstGeom>
           <a:solidFill>
@@ -11673,8 +12974,8 @@
         </p:nvSpPr>
         <p:spPr>
           <a:xfrm>
-            <a:off x="914400" y="4754880"/>
-            <a:ext cx="10362895" cy="457200"/>
+            <a:off x="914400" y="4681728"/>
+            <a:ext cx="10362895" cy="585216"/>
           </a:xfrm>
           <a:prstGeom prst="rect">
             <a:avLst/>
@@ -11690,7 +12991,7 @@
               <a:buNone/>
             </a:pPr>
             <a:r>
-              <a:rPr lang="en-US" sz="1400" b="1" dirty="0">
+              <a:rPr lang="en-US" sz="1350" b="1" dirty="0">
                 <a:solidFill>
                   <a:srgbClr val="FFFFFF"/>
                 </a:solidFill>
@@ -11698,13 +12999,13 @@
                 <a:ea typeface="Arial" pitchFamily="34" charset="-122"/>
                 <a:cs typeface="Arial" pitchFamily="34" charset="-120"/>
               </a:rPr>
-              <a:t>3.00× &lt; ≈3.03×</a:t>
-            </a:r>
-            <a:pPr indent="0" marL="0">
-              <a:buNone/>
-            </a:pPr>
-            <a:r>
-              <a:rPr lang="en-US" sz="1400" dirty="0">
+              <a:t>Under 3.4× seasonal decor loses money;</a:t>
+            </a:r>
+            <a:pPr indent="0" marL="0">
+              <a:buNone/>
+            </a:pPr>
+            <a:r>
+              <a:rPr lang="en-US" sz="1350" dirty="0">
                 <a:solidFill>
                   <a:srgbClr val="FFD9D2"/>
                 </a:solidFill>
@@ -11712,9 +13013,9 @@
                 <a:ea typeface="Arial" pitchFamily="34" charset="-122"/>
                 <a:cs typeface="Arial" pitchFamily="34" charset="-120"/>
               </a:rPr>
-              <a:t>  — at the campaign target, every seasonal-decor order loses money before shipping and returns are counted.</a:t>
-            </a:r>
-            <a:endParaRPr lang="en-US" sz="1400" dirty="0"/>
+              <a:t> under ≈3.03× it loses money before shipping and returns are even counted. A draft that ignores this fails the review pre-check.</a:t>
+            </a:r>
+            <a:endParaRPr lang="en-US" sz="1350" dirty="0"/>
           </a:p>
         </p:txBody>
       </p:sp>
@@ -11726,7 +13027,7 @@
         </p:nvSpPr>
         <p:spPr>
           <a:xfrm>
-            <a:off x="685800" y="5349240"/>
+            <a:off x="685800" y="5394960"/>
             <a:ext cx="10820095" cy="731520"/>
           </a:xfrm>
           <a:prstGeom prst="rect">
@@ -13510,11 +14811,11 @@
         <p:spPr>
           <a:xfrm>
             <a:off x="6995160" y="1691640"/>
-            <a:ext cx="4510735" cy="3931920"/>
+            <a:ext cx="4510735" cy="4206240"/>
           </a:xfrm>
           <a:prstGeom prst="roundRect">
             <a:avLst>
-              <a:gd name="adj" fmla="val 2791"/>
+              <a:gd name="adj" fmla="val 2609"/>
             </a:avLst>
           </a:prstGeom>
           <a:solidFill>
@@ -14237,7 +15538,7 @@
                 <a:ea typeface="Courier New" pitchFamily="34" charset="-122"/>
                 <a:cs typeface="Courier New" pitchFamily="34" charset="-120"/>
               </a:rPr>
-              <a:t>every 5 s</a:t>
+              <a:t>every 3 s</a:t>
             </a:r>
             <a:endParaRPr lang="en-US" sz="950" dirty="0"/>
           </a:p>
@@ -14547,6 +15848,107 @@
               <a:t>cloud · APIs · CDNs</a:t>
             </a:r>
             <a:endParaRPr lang="en-US" sz="1050" dirty="0"/>
+          </a:p>
+        </p:txBody>
+      </p:sp>
+      <p:sp>
+        <p:nvSpPr>
+          <p:cNvPr id="43" name="Shape 41"/>
+          <p:cNvSpPr/>
+          <p:nvPr/>
+        </p:nvSpPr>
+        <p:spPr>
+          <a:xfrm>
+            <a:off x="7223760" y="5230368"/>
+            <a:ext cx="4053535" cy="0"/>
+          </a:xfrm>
+          <a:prstGeom prst="line">
+            <a:avLst/>
+          </a:prstGeom>
+          <a:noFill/>
+          <a:ln w="9525">
+            <a:solidFill>
+              <a:srgbClr val="332A1F"/>
+            </a:solidFill>
+            <a:prstDash val="solid"/>
+          </a:ln>
+        </p:spPr>
+      </p:sp>
+      <p:sp>
+        <p:nvSpPr>
+          <p:cNvPr id="44" name="Text 42"/>
+          <p:cNvSpPr txBox="1"/>
+          <p:nvPr/>
+        </p:nvSpPr>
+        <p:spPr>
+          <a:xfrm>
+            <a:off x="7223760" y="5294376"/>
+            <a:ext cx="914400" cy="182880"/>
+          </a:xfrm>
+          <a:prstGeom prst="rect">
+            <a:avLst/>
+          </a:prstGeom>
+          <a:noFill/>
+          <a:ln/>
+        </p:spPr>
+        <p:txBody>
+          <a:bodyPr wrap="square" lIns="0" tIns="0" rIns="0" bIns="0" rtlCol="0" anchor="t"/>
+          <a:lstStyle/>
+          <a:p>
+            <a:pPr indent="0" marL="0">
+              <a:buNone/>
+            </a:pPr>
+            <a:r>
+              <a:rPr lang="en-US" sz="750" b="1" spc="300" kern="0" dirty="0">
+                <a:solidFill>
+                  <a:srgbClr val="E8C290"/>
+                </a:solidFill>
+                <a:latin typeface="Arial" pitchFamily="34" charset="0"/>
+                <a:ea typeface="Arial" pitchFamily="34" charset="-122"/>
+                <a:cs typeface="Arial" pitchFamily="34" charset="-120"/>
+              </a:rPr>
+              <a:t>RUNTIME</a:t>
+            </a:r>
+            <a:endParaRPr lang="en-US" sz="750" dirty="0"/>
+          </a:p>
+        </p:txBody>
+      </p:sp>
+      <p:sp>
+        <p:nvSpPr>
+          <p:cNvPr id="45" name="Text 43"/>
+          <p:cNvSpPr txBox="1"/>
+          <p:nvPr/>
+        </p:nvSpPr>
+        <p:spPr>
+          <a:xfrm>
+            <a:off x="7223760" y="5458968"/>
+            <a:ext cx="4053535" cy="457200"/>
+          </a:xfrm>
+          <a:prstGeom prst="rect">
+            <a:avLst/>
+          </a:prstGeom>
+          <a:noFill/>
+          <a:ln/>
+        </p:spPr>
+        <p:txBody>
+          <a:bodyPr wrap="square" lIns="0" tIns="0" rIns="0" bIns="0" rtlCol="0" anchor="t"/>
+          <a:lstStyle/>
+          <a:p>
+            <a:pPr indent="0" marL="0">
+              <a:buNone/>
+            </a:pPr>
+            <a:r>
+              <a:rPr lang="en-US" sz="900" dirty="0">
+                <a:solidFill>
+                  <a:srgbClr val="E4D8C6"/>
+                </a:solidFill>
+                <a:latin typeface="Arial" pitchFamily="34" charset="0"/>
+                <a:ea typeface="Arial" pitchFamily="34" charset="-122"/>
+                <a:cs typeface="Arial" pitchFamily="34" charset="-120"/>
+              </a:rPr>
+              <a:t>NemoClaw 0.0.137 · OpenShell 0.0.116 · OpenClaw registered against our intake and SDLC MCP servers · Nemotron 3 Nano 30B via Ollama</a:t>
+            </a:r>
+            <a:endParaRPr lang="en-US" sz="900" dirty="0"/>
           </a:p>
         </p:txBody>
       </p:sp>
@@ -14656,7 +16058,7 @@
                 <a:ea typeface="Arial" pitchFamily="34" charset="-122"/>
                 <a:cs typeface="Arial" pitchFamily="34" charset="-120"/>
               </a:rPr>
-              <a:t>LIVE DEMO · 60 SECONDS · CONSOLE AT 127.0.0.1:8792</a:t>
+              <a:t>AUTOPILOT AND THE DATA ROOM</a:t>
             </a:r>
             <a:endParaRPr lang="en-US" sz="1100" dirty="0"/>
           </a:p>
@@ -14698,7 +16100,7 @@
                 <a:ea typeface="Arial" pitchFamily="34" charset="-122"/>
                 <a:cs typeface="Arial" pitchFamily="34" charset="-120"/>
               </a:rPr>
-              <a:t>Approve one spec. Watch it become </a:t>
+              <a:t>Seven stage agents under autopilot. </a:t>
             </a:r>
             <a:pPr indent="0" marL="0">
               <a:lnSpc>
@@ -14715,24 +16117,7 @@
                 <a:ea typeface="Arial" pitchFamily="34" charset="-122"/>
                 <a:cs typeface="Arial" pitchFamily="34" charset="-120"/>
               </a:rPr>
-              <a:t>released, reviewed work</a:t>
-            </a:r>
-            <a:pPr indent="0" marL="0">
-              <a:lnSpc>
-                <a:spcPct val="105000"/>
-              </a:lnSpc>
-              <a:buNone/>
-            </a:pPr>
-            <a:r>
-              <a:rPr lang="en-US" sz="3400" dirty="0">
-                <a:solidFill>
-                  <a:srgbClr val="FFF6E6"/>
-                </a:solidFill>
-                <a:latin typeface="Arial" pitchFamily="34" charset="0"/>
-                <a:ea typeface="Arial" pitchFamily="34" charset="-122"/>
-                <a:cs typeface="Arial" pitchFamily="34" charset="-120"/>
-              </a:rPr>
-              <a:t> and a client update.</a:t>
+              <a:t>No agent reviews its own work.</a:t>
             </a:r>
             <a:endParaRPr lang="en-US" sz="3400" dirty="0"/>
           </a:p>
@@ -14740,147 +16125,140 @@
       </p:sp>
       <p:sp>
         <p:nvSpPr>
-          <p:cNvPr id="4" name="Text 2"/>
-          <p:cNvSpPr txBox="1"/>
-          <p:nvPr/>
-        </p:nvSpPr>
-        <p:spPr>
-          <a:xfrm>
-            <a:off x="685800" y="2011680"/>
-            <a:ext cx="640080" cy="457200"/>
-          </a:xfrm>
-          <a:prstGeom prst="rect">
-            <a:avLst/>
-          </a:prstGeom>
-          <a:noFill/>
-          <a:ln/>
-        </p:spPr>
-        <p:txBody>
-          <a:bodyPr wrap="square" lIns="0" tIns="0" rIns="0" bIns="0" rtlCol="0" anchor="ctr"/>
-          <a:lstStyle/>
-          <a:p>
-            <a:pPr indent="0" marL="0">
-              <a:buNone/>
-            </a:pPr>
-            <a:r>
-              <a:rPr lang="en-US" sz="1200" dirty="0">
-                <a:solidFill>
-                  <a:srgbClr val="B5A186"/>
-                </a:solidFill>
-                <a:latin typeface="Courier New" pitchFamily="34" charset="0"/>
-                <a:ea typeface="Courier New" pitchFamily="34" charset="-122"/>
-                <a:cs typeface="Courier New" pitchFamily="34" charset="-120"/>
-              </a:rPr>
-              <a:t>0:00</a:t>
-            </a:r>
-            <a:endParaRPr lang="en-US" sz="1200" dirty="0"/>
-          </a:p>
-        </p:txBody>
-      </p:sp>
-      <p:sp>
-        <p:nvSpPr>
-          <p:cNvPr id="5" name="Text 3"/>
-          <p:cNvSpPr txBox="1"/>
-          <p:nvPr/>
-        </p:nvSpPr>
-        <p:spPr>
-          <a:xfrm>
-            <a:off x="1371600" y="2011680"/>
-            <a:ext cx="1463040" cy="457200"/>
-          </a:xfrm>
-          <a:prstGeom prst="rect">
-            <a:avLst/>
-          </a:prstGeom>
-          <a:noFill/>
-          <a:ln/>
-        </p:spPr>
-        <p:txBody>
-          <a:bodyPr wrap="square" lIns="0" tIns="0" rIns="0" bIns="0" rtlCol="0" anchor="ctr"/>
-          <a:lstStyle/>
-          <a:p>
-            <a:pPr indent="0" marL="0">
-              <a:buNone/>
-            </a:pPr>
-            <a:r>
-              <a:rPr lang="en-US" sz="750" spc="200" kern="0" dirty="0">
-                <a:solidFill>
-                  <a:srgbClr val="8C7961"/>
-                </a:solidFill>
-                <a:latin typeface="Arial" pitchFamily="34" charset="0"/>
-                <a:ea typeface="Arial" pitchFamily="34" charset="-122"/>
-                <a:cs typeface="Arial" pitchFamily="34" charset="-120"/>
-              </a:rPr>
-              <a:t>AVERY PARK · OWNER</a:t>
-            </a:r>
-            <a:endParaRPr lang="en-US" sz="750" dirty="0"/>
-          </a:p>
-        </p:txBody>
-      </p:sp>
-      <p:sp>
-        <p:nvSpPr>
-          <p:cNvPr id="6" name="Shape 4"/>
-          <p:cNvSpPr/>
-          <p:nvPr/>
-        </p:nvSpPr>
-        <p:spPr>
-          <a:xfrm>
-            <a:off x="2880360" y="2084832"/>
-            <a:ext cx="2103120" cy="310896"/>
+          <p:cNvPr id="4" name="Shape 2"/>
+          <p:cNvSpPr/>
+          <p:nvPr/>
+        </p:nvSpPr>
+        <p:spPr>
+          <a:xfrm>
+            <a:off x="685800" y="2103120"/>
+            <a:ext cx="3454298" cy="2651760"/>
           </a:xfrm>
           <a:prstGeom prst="roundRect">
             <a:avLst>
-              <a:gd name="adj" fmla="val 50000"/>
+              <a:gd name="adj" fmla="val 4138"/>
             </a:avLst>
           </a:prstGeom>
           <a:solidFill>
-            <a:srgbClr val="F3D9A4"/>
+            <a:srgbClr val="1F1610"/>
           </a:solidFill>
           <a:ln w="9525">
             <a:solidFill>
-              <a:srgbClr val="F3D9A4"/>
-            </a:solidFill>
-            <a:prstDash val="solid"/>
-          </a:ln>
-        </p:spPr>
-      </p:sp>
-      <p:sp>
-        <p:nvSpPr>
-          <p:cNvPr id="7" name="Text 5"/>
-          <p:cNvSpPr txBox="1"/>
-          <p:nvPr/>
-        </p:nvSpPr>
-        <p:spPr>
-          <a:xfrm>
-            <a:off x="2880360" y="2084832"/>
-            <a:ext cx="2103120" cy="310896"/>
-          </a:xfrm>
-          <a:prstGeom prst="rect">
-            <a:avLst/>
-          </a:prstGeom>
-          <a:noFill/>
-          <a:ln/>
-        </p:spPr>
-        <p:txBody>
-          <a:bodyPr wrap="square" lIns="0" tIns="0" rIns="0" bIns="0" rtlCol="0" anchor="ctr"/>
-          <a:lstStyle/>
-          <a:p>
-            <a:pPr algn="ctr" indent="0" marL="0">
-              <a:buNone/>
-            </a:pPr>
-            <a:r>
-              <a:rPr lang="en-US" sz="1100" b="1" dirty="0">
-                <a:solidFill>
-                  <a:srgbClr val="2A1B0C"/>
-                </a:solidFill>
-                <a:latin typeface="Arial" pitchFamily="34" charset="0"/>
-                <a:ea typeface="Arial" pitchFamily="34" charset="-122"/>
-                <a:cs typeface="Arial" pitchFamily="34" charset="-120"/>
-              </a:rPr>
-              <a:t>Approve  G1</a:t>
-            </a:r>
-            <a:endParaRPr lang="en-US" sz="1100" dirty="0"/>
-          </a:p>
-        </p:txBody>
+              <a:srgbClr val="332A1F"/>
+            </a:solidFill>
+            <a:prstDash val="solid"/>
+          </a:ln>
+          <a:effectLst>
+            <a:outerShdw sx="100000" sy="100000" kx="0" ky="0" algn="bl" rotWithShape="0" blurRad="152400" dist="50800" dir="5400000">
+              <a:srgbClr val="000000">
+                <a:alpha val="35000"/>
+              </a:srgbClr>
+            </a:outerShdw>
+          </a:effectLst>
+        </p:spPr>
+      </p:sp>
+      <p:sp>
+        <p:nvSpPr>
+          <p:cNvPr id="5" name="Text 3"/>
+          <p:cNvSpPr txBox="1"/>
+          <p:nvPr/>
+        </p:nvSpPr>
+        <p:spPr>
+          <a:xfrm>
+            <a:off x="960120" y="2331720"/>
+            <a:ext cx="2905658" cy="228600"/>
+          </a:xfrm>
+          <a:prstGeom prst="rect">
+            <a:avLst/>
+          </a:prstGeom>
+          <a:noFill/>
+          <a:ln/>
+        </p:spPr>
+        <p:txBody>
+          <a:bodyPr wrap="square" lIns="0" tIns="0" rIns="0" bIns="0" rtlCol="0" anchor="t"/>
+          <a:lstStyle/>
+          <a:p>
+            <a:pPr indent="0" marL="0">
+              <a:buNone/>
+            </a:pPr>
+            <a:r>
+              <a:rPr lang="en-US" sz="850" b="1" spc="400" kern="0" dirty="0">
+                <a:solidFill>
+                  <a:srgbClr val="E8C290"/>
+                </a:solidFill>
+                <a:latin typeface="Arial" pitchFamily="34" charset="0"/>
+                <a:ea typeface="Arial" pitchFamily="34" charset="-122"/>
+                <a:cs typeface="Arial" pitchFamily="34" charset="-120"/>
+              </a:rPr>
+              <a:t>01 · AUTOPILOT</a:t>
+            </a:r>
+            <a:endParaRPr lang="en-US" sz="850" dirty="0"/>
+          </a:p>
+        </p:txBody>
+      </p:sp>
+      <p:sp>
+        <p:nvSpPr>
+          <p:cNvPr id="6" name="Text 4"/>
+          <p:cNvSpPr txBox="1"/>
+          <p:nvPr/>
+        </p:nvSpPr>
+        <p:spPr>
+          <a:xfrm>
+            <a:off x="960120" y="2651760"/>
+            <a:ext cx="2905658" cy="822960"/>
+          </a:xfrm>
+          <a:prstGeom prst="rect">
+            <a:avLst/>
+          </a:prstGeom>
+          <a:noFill/>
+          <a:ln/>
+        </p:spPr>
+        <p:txBody>
+          <a:bodyPr wrap="square" lIns="0" tIns="0" rIns="0" bIns="0" rtlCol="0" anchor="t"/>
+          <a:lstStyle/>
+          <a:p>
+            <a:pPr indent="0" marL="0">
+              <a:buNone/>
+            </a:pPr>
+            <a:r>
+              <a:rPr lang="en-US" sz="2000" dirty="0">
+                <a:solidFill>
+                  <a:srgbClr val="FFF6E6"/>
+                </a:solidFill>
+                <a:latin typeface="Arial" pitchFamily="34" charset="0"/>
+                <a:ea typeface="Arial" pitchFamily="34" charset="-122"/>
+                <a:cs typeface="Arial" pitchFamily="34" charset="-120"/>
+              </a:rPr>
+              <a:t>Seven isolated agents</a:t>
+            </a:r>
+            <a:endParaRPr lang="en-US" sz="2000" dirty="0"/>
+          </a:p>
+        </p:txBody>
+      </p:sp>
+      <p:sp>
+        <p:nvSpPr>
+          <p:cNvPr id="7" name="Shape 5"/>
+          <p:cNvSpPr/>
+          <p:nvPr/>
+        </p:nvSpPr>
+        <p:spPr>
+          <a:xfrm>
+            <a:off x="960120" y="3520440"/>
+            <a:ext cx="548640" cy="36576"/>
+          </a:xfrm>
+          <a:prstGeom prst="rect">
+            <a:avLst/>
+          </a:prstGeom>
+          <a:solidFill>
+            <a:srgbClr val="C9955A"/>
+          </a:solidFill>
+          <a:ln w="12700">
+            <a:solidFill>
+              <a:srgbClr val="C9955A"/>
+            </a:solidFill>
+            <a:prstDash val="solid"/>
+          </a:ln>
+        </p:spPr>
       </p:sp>
       <p:sp>
         <p:nvSpPr>
@@ -14890,33 +16268,19 @@
         </p:nvSpPr>
         <p:spPr>
           <a:xfrm>
-            <a:off x="5212080" y="2011680"/>
-            <a:ext cx="6293815" cy="457200"/>
-          </a:xfrm>
-          <a:prstGeom prst="rect">
-            <a:avLst/>
-          </a:prstGeom>
-          <a:noFill/>
-          <a:ln/>
-        </p:spPr>
-        <p:txBody>
-          <a:bodyPr wrap="square" lIns="0" tIns="0" rIns="0" bIns="0" rtlCol="0" anchor="ctr"/>
-          <a:lstStyle/>
-          <a:p>
-            <a:pPr indent="0" marL="0">
-              <a:buNone/>
-            </a:pPr>
-            <a:r>
-              <a:rPr lang="en-US" sz="1300" b="1" dirty="0">
-                <a:solidFill>
-                  <a:srgbClr val="FFF6E6"/>
-                </a:solidFill>
-                <a:latin typeface="Arial" pitchFamily="34" charset="0"/>
-                <a:ea typeface="Arial" pitchFamily="34" charset="-122"/>
-                <a:cs typeface="Arial" pitchFamily="34" charset="-120"/>
-              </a:rPr>
-              <a:t>SPEC-003</a:t>
-            </a:r>
+            <a:off x="960120" y="3703320"/>
+            <a:ext cx="2905658" cy="914400"/>
+          </a:xfrm>
+          <a:prstGeom prst="rect">
+            <a:avLst/>
+          </a:prstGeom>
+          <a:noFill/>
+          <a:ln/>
+        </p:spPr>
+        <p:txBody>
+          <a:bodyPr wrap="square" lIns="0" tIns="0" rIns="0" bIns="0" rtlCol="0" anchor="t"/>
+          <a:lstStyle/>
+          <a:p>
             <a:pPr indent="0" marL="0">
               <a:buNone/>
             </a:pPr>
@@ -14929,35 +16293,7 @@
                 <a:ea typeface="Arial" pitchFamily="34" charset="-122"/>
                 <a:cs typeface="Arial" pitchFamily="34" charset="-120"/>
               </a:rPr>
-              <a:t> Profit model → agent splits it into </a:t>
-            </a:r>
-            <a:pPr indent="0" marL="0">
-              <a:buNone/>
-            </a:pPr>
-            <a:r>
-              <a:rPr lang="en-US" sz="1300" b="1" dirty="0">
-                <a:solidFill>
-                  <a:srgbClr val="FFF6E6"/>
-                </a:solidFill>
-                <a:latin typeface="Arial" pitchFamily="34" charset="0"/>
-                <a:ea typeface="Arial" pitchFamily="34" charset="-122"/>
-                <a:cs typeface="Arial" pitchFamily="34" charset="-120"/>
-              </a:rPr>
-              <a:t>5 tickets</a:t>
-            </a:r>
-            <a:pPr indent="0" marL="0">
-              <a:buNone/>
-            </a:pPr>
-            <a:r>
-              <a:rPr lang="en-US" sz="1300" dirty="0">
-                <a:solidFill>
-                  <a:srgbClr val="E4D8C6"/>
-                </a:solidFill>
-                <a:latin typeface="Arial" pitchFamily="34" charset="0"/>
-                <a:ea typeface="Arial" pitchFamily="34" charset="-122"/>
-                <a:cs typeface="Arial" pitchFamily="34" charset="-120"/>
-              </a:rPr>
-              <a:t> in dependency order</a:t>
+              <a:t>Each is its own process. No shared context.</a:t>
             </a:r>
             <a:endParaRPr lang="en-US" sz="1300" dirty="0"/>
           </a:p>
@@ -14971,121 +16307,130 @@
         </p:nvSpPr>
         <p:spPr>
           <a:xfrm>
-            <a:off x="685800" y="2542032"/>
-            <a:ext cx="10820095" cy="0"/>
-          </a:xfrm>
-          <a:prstGeom prst="line">
-            <a:avLst/>
-          </a:prstGeom>
-          <a:noFill/>
-          <a:ln w="9525">
-            <a:solidFill>
-              <a:srgbClr val="332A1F"/>
-            </a:solidFill>
-            <a:prstDash val="solid"/>
-          </a:ln>
-        </p:spPr>
-      </p:sp>
-      <p:sp>
-        <p:nvSpPr>
-          <p:cNvPr id="10" name="Text 8"/>
-          <p:cNvSpPr txBox="1"/>
-          <p:nvPr/>
-        </p:nvSpPr>
-        <p:spPr>
-          <a:xfrm>
-            <a:off x="685800" y="2587752"/>
-            <a:ext cx="640080" cy="457200"/>
-          </a:xfrm>
-          <a:prstGeom prst="rect">
-            <a:avLst/>
-          </a:prstGeom>
-          <a:noFill/>
-          <a:ln/>
-        </p:spPr>
-        <p:txBody>
-          <a:bodyPr wrap="square" lIns="0" tIns="0" rIns="0" bIns="0" rtlCol="0" anchor="ctr"/>
-          <a:lstStyle/>
-          <a:p>
-            <a:pPr indent="0" marL="0">
-              <a:buNone/>
-            </a:pPr>
-            <a:r>
-              <a:rPr lang="en-US" sz="1200" dirty="0">
-                <a:solidFill>
-                  <a:srgbClr val="B5A186"/>
-                </a:solidFill>
-                <a:latin typeface="Courier New" pitchFamily="34" charset="0"/>
-                <a:ea typeface="Courier New" pitchFamily="34" charset="-122"/>
-                <a:cs typeface="Courier New" pitchFamily="34" charset="-120"/>
-              </a:rPr>
-              <a:t>0:10</a:t>
-            </a:r>
-            <a:endParaRPr lang="en-US" sz="1200" dirty="0"/>
-          </a:p>
-        </p:txBody>
-      </p:sp>
-      <p:sp>
-        <p:nvSpPr>
-          <p:cNvPr id="11" name="Text 9"/>
-          <p:cNvSpPr txBox="1"/>
-          <p:nvPr/>
-        </p:nvSpPr>
-        <p:spPr>
-          <a:xfrm>
-            <a:off x="1371600" y="2587752"/>
-            <a:ext cx="1463040" cy="457200"/>
-          </a:xfrm>
-          <a:prstGeom prst="rect">
-            <a:avLst/>
-          </a:prstGeom>
-          <a:noFill/>
-          <a:ln/>
-        </p:spPr>
-        <p:txBody>
-          <a:bodyPr wrap="square" lIns="0" tIns="0" rIns="0" bIns="0" rtlCol="0" anchor="ctr"/>
-          <a:lstStyle/>
-          <a:p>
-            <a:pPr indent="0" marL="0">
-              <a:buNone/>
-            </a:pPr>
-            <a:r>
-              <a:rPr lang="en-US" sz="750" spc="200" kern="0" dirty="0">
-                <a:solidFill>
-                  <a:srgbClr val="8C7961"/>
-                </a:solidFill>
-                <a:latin typeface="Arial" pitchFamily="34" charset="0"/>
-                <a:ea typeface="Arial" pitchFamily="34" charset="-122"/>
-                <a:cs typeface="Arial" pitchFamily="34" charset="-120"/>
-              </a:rPr>
-              <a:t>JORDAN LEE · DA</a:t>
-            </a:r>
-            <a:endParaRPr lang="en-US" sz="750" dirty="0"/>
-          </a:p>
-        </p:txBody>
-      </p:sp>
-      <p:sp>
-        <p:nvSpPr>
-          <p:cNvPr id="12" name="Shape 10"/>
-          <p:cNvSpPr/>
-          <p:nvPr/>
-        </p:nvSpPr>
-        <p:spPr>
-          <a:xfrm>
-            <a:off x="2880360" y="2660904"/>
-            <a:ext cx="2103120" cy="310896"/>
+            <a:off x="4368698" y="2103120"/>
+            <a:ext cx="3454298" cy="2651760"/>
           </a:xfrm>
           <a:prstGeom prst="roundRect">
             <a:avLst>
-              <a:gd name="adj" fmla="val 50000"/>
+              <a:gd name="adj" fmla="val 4138"/>
             </a:avLst>
           </a:prstGeom>
           <a:solidFill>
-            <a:srgbClr val="281D15"/>
+            <a:srgbClr val="1F1610"/>
           </a:solidFill>
           <a:ln w="9525">
             <a:solidFill>
-              <a:srgbClr val="4A3D2C"/>
+              <a:srgbClr val="332A1F"/>
+            </a:solidFill>
+            <a:prstDash val="solid"/>
+          </a:ln>
+          <a:effectLst>
+            <a:outerShdw sx="100000" sy="100000" kx="0" ky="0" algn="bl" rotWithShape="0" blurRad="152400" dist="50800" dir="5400000">
+              <a:srgbClr val="000000">
+                <a:alpha val="35000"/>
+              </a:srgbClr>
+            </a:outerShdw>
+          </a:effectLst>
+        </p:spPr>
+      </p:sp>
+      <p:sp>
+        <p:nvSpPr>
+          <p:cNvPr id="10" name="Text 8"/>
+          <p:cNvSpPr txBox="1"/>
+          <p:nvPr/>
+        </p:nvSpPr>
+        <p:spPr>
+          <a:xfrm>
+            <a:off x="4643018" y="2331720"/>
+            <a:ext cx="2905658" cy="228600"/>
+          </a:xfrm>
+          <a:prstGeom prst="rect">
+            <a:avLst/>
+          </a:prstGeom>
+          <a:noFill/>
+          <a:ln/>
+        </p:spPr>
+        <p:txBody>
+          <a:bodyPr wrap="square" lIns="0" tIns="0" rIns="0" bIns="0" rtlCol="0" anchor="t"/>
+          <a:lstStyle/>
+          <a:p>
+            <a:pPr indent="0" marL="0">
+              <a:buNone/>
+            </a:pPr>
+            <a:r>
+              <a:rPr lang="en-US" sz="850" b="1" spc="400" kern="0" dirty="0">
+                <a:solidFill>
+                  <a:srgbClr val="E8C290"/>
+                </a:solidFill>
+                <a:latin typeface="Arial" pitchFamily="34" charset="0"/>
+                <a:ea typeface="Arial" pitchFamily="34" charset="-122"/>
+                <a:cs typeface="Arial" pitchFamily="34" charset="-120"/>
+              </a:rPr>
+              <a:t>02 · THE 409</a:t>
+            </a:r>
+            <a:endParaRPr lang="en-US" sz="850" dirty="0"/>
+          </a:p>
+        </p:txBody>
+      </p:sp>
+      <p:sp>
+        <p:nvSpPr>
+          <p:cNvPr id="11" name="Text 9"/>
+          <p:cNvSpPr txBox="1"/>
+          <p:nvPr/>
+        </p:nvSpPr>
+        <p:spPr>
+          <a:xfrm>
+            <a:off x="4643018" y="2651760"/>
+            <a:ext cx="2905658" cy="822960"/>
+          </a:xfrm>
+          <a:prstGeom prst="rect">
+            <a:avLst/>
+          </a:prstGeom>
+          <a:noFill/>
+          <a:ln/>
+        </p:spPr>
+        <p:txBody>
+          <a:bodyPr wrap="square" lIns="0" tIns="0" rIns="0" bIns="0" rtlCol="0" anchor="t"/>
+          <a:lstStyle/>
+          <a:p>
+            <a:pPr indent="0" marL="0">
+              <a:buNone/>
+            </a:pPr>
+            <a:r>
+              <a:rPr lang="en-US" sz="2000" dirty="0">
+                <a:solidFill>
+                  <a:srgbClr val="FFF6E6"/>
+                </a:solidFill>
+                <a:latin typeface="Arial" pitchFamily="34" charset="0"/>
+                <a:ea typeface="Arial" pitchFamily="34" charset="-122"/>
+                <a:cs typeface="Arial" pitchFamily="34" charset="-120"/>
+              </a:rPr>
+              <a:t>No agent reviews its own work</a:t>
+            </a:r>
+            <a:endParaRPr lang="en-US" sz="2000" dirty="0"/>
+          </a:p>
+        </p:txBody>
+      </p:sp>
+      <p:sp>
+        <p:nvSpPr>
+          <p:cNvPr id="12" name="Shape 10"/>
+          <p:cNvSpPr/>
+          <p:nvPr/>
+        </p:nvSpPr>
+        <p:spPr>
+          <a:xfrm>
+            <a:off x="4643018" y="3520440"/>
+            <a:ext cx="548640" cy="36576"/>
+          </a:xfrm>
+          <a:prstGeom prst="rect">
+            <a:avLst/>
+          </a:prstGeom>
+          <a:solidFill>
+            <a:srgbClr val="C9955A"/>
+          </a:solidFill>
+          <a:ln w="12700">
+            <a:solidFill>
+              <a:srgbClr val="C9955A"/>
             </a:solidFill>
             <a:prstDash val="solid"/>
           </a:ln>
@@ -15099,56 +16444,17 @@
         </p:nvSpPr>
         <p:spPr>
           <a:xfrm>
-            <a:off x="2880360" y="2660904"/>
-            <a:ext cx="2103120" cy="310896"/>
-          </a:xfrm>
-          <a:prstGeom prst="rect">
-            <a:avLst/>
-          </a:prstGeom>
-          <a:noFill/>
-          <a:ln/>
-        </p:spPr>
-        <p:txBody>
-          <a:bodyPr wrap="square" lIns="0" tIns="0" rIns="0" bIns="0" rtlCol="0" anchor="ctr"/>
-          <a:lstStyle/>
-          <a:p>
-            <a:pPr algn="ctr" indent="0" marL="0">
-              <a:buNone/>
-            </a:pPr>
-            <a:r>
-              <a:rPr lang="en-US" sz="1100" dirty="0">
-                <a:solidFill>
-                  <a:srgbClr val="F6EFE4"/>
-                </a:solidFill>
-                <a:latin typeface="Arial" pitchFamily="34" charset="0"/>
-                <a:ea typeface="Arial" pitchFamily="34" charset="-122"/>
-                <a:cs typeface="Arial" pitchFamily="34" charset="-120"/>
-              </a:rPr>
-              <a:t>Accept as Jordan Lee  G2</a:t>
-            </a:r>
-            <a:endParaRPr lang="en-US" sz="1100" dirty="0"/>
-          </a:p>
-        </p:txBody>
-      </p:sp>
-      <p:sp>
-        <p:nvSpPr>
-          <p:cNvPr id="14" name="Text 12"/>
-          <p:cNvSpPr txBox="1"/>
-          <p:nvPr/>
-        </p:nvSpPr>
-        <p:spPr>
-          <a:xfrm>
-            <a:off x="5212080" y="2587752"/>
-            <a:ext cx="6293815" cy="457200"/>
-          </a:xfrm>
-          <a:prstGeom prst="rect">
-            <a:avLst/>
-          </a:prstGeom>
-          <a:noFill/>
-          <a:ln/>
-        </p:spPr>
-        <p:txBody>
-          <a:bodyPr wrap="square" lIns="0" tIns="0" rIns="0" bIns="0" rtlCol="0" anchor="ctr"/>
+            <a:off x="4643018" y="3703320"/>
+            <a:ext cx="2905658" cy="914400"/>
+          </a:xfrm>
+          <a:prstGeom prst="rect">
+            <a:avLst/>
+          </a:prstGeom>
+          <a:noFill/>
+          <a:ln/>
+        </p:spPr>
+        <p:txBody>
+          <a:bodyPr wrap="square" lIns="0" tIns="0" rIns="0" bIns="0" rtlCol="0" anchor="t"/>
           <a:lstStyle/>
           <a:p>
             <a:pPr indent="0" marL="0">
@@ -15163,35 +16469,7 @@
                 <a:ea typeface="Arial" pitchFamily="34" charset="-122"/>
                 <a:cs typeface="Arial" pitchFamily="34" charset="-120"/>
               </a:rPr>
-              <a:t>Ticket moves to build → agent writes the </a:t>
-            </a:r>
-            <a:pPr indent="0" marL="0">
-              <a:buNone/>
-            </a:pPr>
-            <a:r>
-              <a:rPr lang="en-US" sz="1300" b="1" dirty="0">
-                <a:solidFill>
-                  <a:srgbClr val="FFF6E6"/>
-                </a:solidFill>
-                <a:latin typeface="Arial" pitchFamily="34" charset="0"/>
-                <a:ea typeface="Arial" pitchFamily="34" charset="-122"/>
-                <a:cs typeface="Arial" pitchFamily="34" charset="-120"/>
-              </a:rPr>
-              <a:t>break-even draft</a:t>
-            </a:r>
-            <a:pPr indent="0" marL="0">
-              <a:buNone/>
-            </a:pPr>
-            <a:r>
-              <a:rPr lang="en-US" sz="1300" dirty="0">
-                <a:solidFill>
-                  <a:srgbClr val="E4D8C6"/>
-                </a:solidFill>
-                <a:latin typeface="Arial" pitchFamily="34" charset="0"/>
-                <a:ea typeface="Arial" pitchFamily="34" charset="-122"/>
-                <a:cs typeface="Arial" pitchFamily="34" charset="-120"/>
-              </a:rPr>
-              <a:t> from the client's figures</a:t>
+              <a:t>The 409 applies to agents: the reviewer must differ from the builder.</a:t>
             </a:r>
             <a:endParaRPr lang="en-US" sz="1300" dirty="0"/>
           </a:p>
@@ -15199,131 +16477,179 @@
       </p:sp>
       <p:sp>
         <p:nvSpPr>
-          <p:cNvPr id="15" name="Shape 13"/>
-          <p:cNvSpPr/>
-          <p:nvPr/>
-        </p:nvSpPr>
-        <p:spPr>
-          <a:xfrm>
-            <a:off x="685800" y="3118104"/>
-            <a:ext cx="10820095" cy="0"/>
-          </a:xfrm>
-          <a:prstGeom prst="line">
-            <a:avLst/>
-          </a:prstGeom>
-          <a:noFill/>
-          <a:ln w="9525">
-            <a:solidFill>
-              <a:srgbClr val="332A1F"/>
-            </a:solidFill>
-            <a:prstDash val="solid"/>
-          </a:ln>
-        </p:spPr>
-      </p:sp>
-      <p:sp>
-        <p:nvSpPr>
-          <p:cNvPr id="16" name="Text 14"/>
-          <p:cNvSpPr txBox="1"/>
-          <p:nvPr/>
-        </p:nvSpPr>
-        <p:spPr>
-          <a:xfrm>
-            <a:off x="685800" y="3163824"/>
-            <a:ext cx="640080" cy="457200"/>
-          </a:xfrm>
-          <a:prstGeom prst="rect">
-            <a:avLst/>
-          </a:prstGeom>
-          <a:noFill/>
-          <a:ln/>
-        </p:spPr>
-        <p:txBody>
-          <a:bodyPr wrap="square" lIns="0" tIns="0" rIns="0" bIns="0" rtlCol="0" anchor="ctr"/>
-          <a:lstStyle/>
-          <a:p>
-            <a:pPr indent="0" marL="0">
-              <a:buNone/>
-            </a:pPr>
-            <a:r>
-              <a:rPr lang="en-US" sz="1200" dirty="0">
-                <a:solidFill>
-                  <a:srgbClr val="B5A186"/>
-                </a:solidFill>
-                <a:latin typeface="Courier New" pitchFamily="34" charset="0"/>
-                <a:ea typeface="Courier New" pitchFamily="34" charset="-122"/>
-                <a:cs typeface="Courier New" pitchFamily="34" charset="-120"/>
-              </a:rPr>
-              <a:t>0:25</a:t>
-            </a:r>
-            <a:endParaRPr lang="en-US" sz="1200" dirty="0"/>
-          </a:p>
-        </p:txBody>
-      </p:sp>
-      <p:sp>
-        <p:nvSpPr>
-          <p:cNvPr id="17" name="Text 15"/>
-          <p:cNvSpPr txBox="1"/>
-          <p:nvPr/>
-        </p:nvSpPr>
-        <p:spPr>
-          <a:xfrm>
-            <a:off x="1371600" y="3163824"/>
-            <a:ext cx="1463040" cy="457200"/>
-          </a:xfrm>
-          <a:prstGeom prst="rect">
-            <a:avLst/>
-          </a:prstGeom>
-          <a:noFill/>
-          <a:ln/>
-        </p:spPr>
-        <p:txBody>
-          <a:bodyPr wrap="square" lIns="0" tIns="0" rIns="0" bIns="0" rtlCol="0" anchor="ctr"/>
-          <a:lstStyle/>
-          <a:p>
-            <a:pPr indent="0" marL="0">
-              <a:buNone/>
-            </a:pPr>
-            <a:r>
-              <a:rPr lang="en-US" sz="750" spc="200" kern="0" dirty="0">
-                <a:solidFill>
-                  <a:srgbClr val="8C7961"/>
-                </a:solidFill>
-                <a:latin typeface="Arial" pitchFamily="34" charset="0"/>
-                <a:ea typeface="Arial" pitchFamily="34" charset="-122"/>
-                <a:cs typeface="Arial" pitchFamily="34" charset="-120"/>
-              </a:rPr>
-              <a:t>JORDAN LEE · DA</a:t>
-            </a:r>
-            <a:endParaRPr lang="en-US" sz="750" dirty="0"/>
-          </a:p>
-        </p:txBody>
-      </p:sp>
-      <p:sp>
-        <p:nvSpPr>
-          <p:cNvPr id="18" name="Shape 16"/>
-          <p:cNvSpPr/>
-          <p:nvPr/>
-        </p:nvSpPr>
-        <p:spPr>
-          <a:xfrm>
-            <a:off x="2880360" y="3236976"/>
-            <a:ext cx="2103120" cy="310896"/>
+          <p:cNvPr id="14" name="Shape 12"/>
+          <p:cNvSpPr/>
+          <p:nvPr/>
+        </p:nvSpPr>
+        <p:spPr>
+          <a:xfrm>
+            <a:off x="8051597" y="2103120"/>
+            <a:ext cx="3454298" cy="2651760"/>
           </a:xfrm>
           <a:prstGeom prst="roundRect">
             <a:avLst>
-              <a:gd name="adj" fmla="val 50000"/>
+              <a:gd name="adj" fmla="val 4138"/>
             </a:avLst>
           </a:prstGeom>
           <a:solidFill>
-            <a:srgbClr val="281D15"/>
+            <a:srgbClr val="1F1610"/>
           </a:solidFill>
           <a:ln w="9525">
             <a:solidFill>
-              <a:srgbClr val="4A3D2C"/>
-            </a:solidFill>
-            <a:prstDash val="solid"/>
-          </a:ln>
-        </p:spPr>
+              <a:srgbClr val="332A1F"/>
+            </a:solidFill>
+            <a:prstDash val="solid"/>
+          </a:ln>
+          <a:effectLst>
+            <a:outerShdw sx="100000" sy="100000" kx="0" ky="0" algn="bl" rotWithShape="0" blurRad="152400" dist="50800" dir="5400000">
+              <a:srgbClr val="000000">
+                <a:alpha val="35000"/>
+              </a:srgbClr>
+            </a:outerShdw>
+          </a:effectLst>
+        </p:spPr>
+      </p:sp>
+      <p:sp>
+        <p:nvSpPr>
+          <p:cNvPr id="15" name="Text 13"/>
+          <p:cNvSpPr txBox="1"/>
+          <p:nvPr/>
+        </p:nvSpPr>
+        <p:spPr>
+          <a:xfrm>
+            <a:off x="8325917" y="2331720"/>
+            <a:ext cx="2905658" cy="228600"/>
+          </a:xfrm>
+          <a:prstGeom prst="rect">
+            <a:avLst/>
+          </a:prstGeom>
+          <a:noFill/>
+          <a:ln/>
+        </p:spPr>
+        <p:txBody>
+          <a:bodyPr wrap="square" lIns="0" tIns="0" rIns="0" bIns="0" rtlCol="0" anchor="t"/>
+          <a:lstStyle/>
+          <a:p>
+            <a:pPr indent="0" marL="0">
+              <a:buNone/>
+            </a:pPr>
+            <a:r>
+              <a:rPr lang="en-US" sz="850" b="1" spc="400" kern="0" dirty="0">
+                <a:solidFill>
+                  <a:srgbClr val="E8C290"/>
+                </a:solidFill>
+                <a:latin typeface="Arial" pitchFamily="34" charset="0"/>
+                <a:ea typeface="Arial" pitchFamily="34" charset="-122"/>
+                <a:cs typeface="Arial" pitchFamily="34" charset="-120"/>
+              </a:rPr>
+              <a:t>03 · DATA ROOM</a:t>
+            </a:r>
+            <a:endParaRPr lang="en-US" sz="850" dirty="0"/>
+          </a:p>
+        </p:txBody>
+      </p:sp>
+      <p:sp>
+        <p:nvSpPr>
+          <p:cNvPr id="16" name="Text 14"/>
+          <p:cNvSpPr txBox="1"/>
+          <p:nvPr/>
+        </p:nvSpPr>
+        <p:spPr>
+          <a:xfrm>
+            <a:off x="8325917" y="2651760"/>
+            <a:ext cx="2905658" cy="822960"/>
+          </a:xfrm>
+          <a:prstGeom prst="rect">
+            <a:avLst/>
+          </a:prstGeom>
+          <a:noFill/>
+          <a:ln/>
+        </p:spPr>
+        <p:txBody>
+          <a:bodyPr wrap="square" lIns="0" tIns="0" rIns="0" bIns="0" rtlCol="0" anchor="t"/>
+          <a:lstStyle/>
+          <a:p>
+            <a:pPr indent="0" marL="0">
+              <a:buNone/>
+            </a:pPr>
+            <a:r>
+              <a:rPr lang="en-US" sz="2000" dirty="0">
+                <a:solidFill>
+                  <a:srgbClr val="FFF6E6"/>
+                </a:solidFill>
+                <a:latin typeface="Arial" pitchFamily="34" charset="0"/>
+                <a:ea typeface="Arial" pitchFamily="34" charset="-122"/>
+                <a:cs typeface="Arial" pitchFamily="34" charset="-120"/>
+              </a:rPr>
+              <a:t>From export to plan</a:t>
+            </a:r>
+            <a:endParaRPr lang="en-US" sz="2000" dirty="0"/>
+          </a:p>
+        </p:txBody>
+      </p:sp>
+      <p:sp>
+        <p:nvSpPr>
+          <p:cNvPr id="17" name="Shape 15"/>
+          <p:cNvSpPr/>
+          <p:nvPr/>
+        </p:nvSpPr>
+        <p:spPr>
+          <a:xfrm>
+            <a:off x="8325917" y="3520440"/>
+            <a:ext cx="548640" cy="36576"/>
+          </a:xfrm>
+          <a:prstGeom prst="rect">
+            <a:avLst/>
+          </a:prstGeom>
+          <a:solidFill>
+            <a:srgbClr val="C9955A"/>
+          </a:solidFill>
+          <a:ln w="12700">
+            <a:solidFill>
+              <a:srgbClr val="C9955A"/>
+            </a:solidFill>
+            <a:prstDash val="solid"/>
+          </a:ln>
+        </p:spPr>
+      </p:sp>
+      <p:sp>
+        <p:nvSpPr>
+          <p:cNvPr id="18" name="Text 16"/>
+          <p:cNvSpPr txBox="1"/>
+          <p:nvPr/>
+        </p:nvSpPr>
+        <p:spPr>
+          <a:xfrm>
+            <a:off x="8325917" y="3703320"/>
+            <a:ext cx="2905658" cy="914400"/>
+          </a:xfrm>
+          <a:prstGeom prst="rect">
+            <a:avLst/>
+          </a:prstGeom>
+          <a:noFill/>
+          <a:ln/>
+        </p:spPr>
+        <p:txBody>
+          <a:bodyPr wrap="square" lIns="0" tIns="0" rIns="0" bIns="0" rtlCol="0" anchor="t"/>
+          <a:lstStyle/>
+          <a:p>
+            <a:pPr indent="0" marL="0">
+              <a:buNone/>
+            </a:pPr>
+            <a:r>
+              <a:rPr lang="en-US" sz="1300" dirty="0">
+                <a:solidFill>
+                  <a:srgbClr val="E4D8C6"/>
+                </a:solidFill>
+                <a:latin typeface="Arial" pitchFamily="34" charset="0"/>
+                <a:ea typeface="Arial" pitchFamily="34" charset="-122"/>
+                <a:cs typeface="Arial" pitchFamily="34" charset="-120"/>
+              </a:rPr>
+              <a:t>A client's sales export becomes a promotion plan, with one ticket per recommendation.</a:t>
+            </a:r>
+            <a:endParaRPr lang="en-US" sz="1300" dirty="0"/>
+          </a:p>
+        </p:txBody>
       </p:sp>
       <p:sp>
         <p:nvSpPr>
@@ -15333,58 +16659,33 @@
         </p:nvSpPr>
         <p:spPr>
           <a:xfrm>
-            <a:off x="2880360" y="3236976"/>
-            <a:ext cx="2103120" cy="310896"/>
-          </a:xfrm>
-          <a:prstGeom prst="rect">
-            <a:avLst/>
-          </a:prstGeom>
-          <a:noFill/>
-          <a:ln/>
-        </p:spPr>
-        <p:txBody>
-          <a:bodyPr wrap="square" lIns="0" tIns="0" rIns="0" bIns="0" rtlCol="0" anchor="ctr"/>
-          <a:lstStyle/>
-          <a:p>
-            <a:pPr algn="ctr" indent="0" marL="0">
-              <a:buNone/>
-            </a:pPr>
-            <a:r>
-              <a:rPr lang="en-US" sz="1100" dirty="0">
-                <a:solidFill>
-                  <a:srgbClr val="F6EFE4"/>
-                </a:solidFill>
-                <a:latin typeface="Arial" pitchFamily="34" charset="0"/>
-                <a:ea typeface="Arial" pitchFamily="34" charset="-122"/>
-                <a:cs typeface="Arial" pitchFamily="34" charset="-120"/>
-              </a:rPr>
-              <a:t>Submit for review</a:t>
-            </a:r>
-            <a:endParaRPr lang="en-US" sz="1100" dirty="0"/>
-          </a:p>
-        </p:txBody>
-      </p:sp>
-      <p:sp>
-        <p:nvSpPr>
-          <p:cNvPr id="20" name="Text 18"/>
-          <p:cNvSpPr txBox="1"/>
-          <p:nvPr/>
-        </p:nvSpPr>
-        <p:spPr>
-          <a:xfrm>
-            <a:off x="5212080" y="3163824"/>
-            <a:ext cx="6293815" cy="457200"/>
-          </a:xfrm>
-          <a:prstGeom prst="rect">
-            <a:avLst/>
-          </a:prstGeom>
-          <a:noFill/>
-          <a:ln/>
-        </p:spPr>
-        <p:txBody>
-          <a:bodyPr wrap="square" lIns="0" tIns="0" rIns="0" bIns="0" rtlCol="0" anchor="ctr"/>
-          <a:lstStyle/>
-          <a:p>
+            <a:off x="685800" y="5029200"/>
+            <a:ext cx="10820095" cy="731520"/>
+          </a:xfrm>
+          <a:prstGeom prst="rect">
+            <a:avLst/>
+          </a:prstGeom>
+          <a:noFill/>
+          <a:ln/>
+        </p:spPr>
+        <p:txBody>
+          <a:bodyPr wrap="square" lIns="0" tIns="0" rIns="0" bIns="0" rtlCol="0" anchor="t"/>
+          <a:lstStyle/>
+          <a:p>
+            <a:pPr indent="0" marL="0">
+              <a:buNone/>
+            </a:pPr>
+            <a:r>
+              <a:rPr lang="en-US" sz="1300" b="1" dirty="0">
+                <a:solidFill>
+                  <a:srgbClr val="F3D9A4"/>
+                </a:solidFill>
+                <a:latin typeface="Arial" pitchFamily="34" charset="0"/>
+                <a:ea typeface="Arial" pitchFamily="34" charset="-122"/>
+                <a:cs typeface="Arial" pitchFamily="34" charset="-120"/>
+              </a:rPr>
+              <a:t>Same rule for people and agents: </a:t>
+            </a:r>
             <a:pPr indent="0" marL="0">
               <a:buNone/>
             </a:pPr>
@@ -15397,943 +16698,7 @@
                 <a:ea typeface="Arial" pitchFamily="34" charset="-122"/>
                 <a:cs typeface="Arial" pitchFamily="34" charset="-120"/>
               </a:rPr>
-              <a:t>Agent pre-checks every criterion → </a:t>
-            </a:r>
-            <a:pPr indent="0" marL="0">
-              <a:buNone/>
-            </a:pPr>
-            <a:r>
-              <a:rPr lang="en-US" sz="1300" dirty="0">
-                <a:solidFill>
-                  <a:srgbClr val="8FD6A8"/>
-                </a:solidFill>
-                <a:latin typeface="Arial" pitchFamily="34" charset="0"/>
-                <a:ea typeface="Arial" pitchFamily="34" charset="-122"/>
-                <a:cs typeface="Arial" pitchFamily="34" charset="-120"/>
-              </a:rPr>
-              <a:t>traceability: every number traces or is ≈</a:t>
-            </a:r>
-            <a:endParaRPr lang="en-US" sz="1300" dirty="0"/>
-          </a:p>
-        </p:txBody>
-      </p:sp>
-      <p:sp>
-        <p:nvSpPr>
-          <p:cNvPr id="21" name="Shape 19"/>
-          <p:cNvSpPr/>
-          <p:nvPr/>
-        </p:nvSpPr>
-        <p:spPr>
-          <a:xfrm>
-            <a:off x="685800" y="3694176"/>
-            <a:ext cx="10820095" cy="0"/>
-          </a:xfrm>
-          <a:prstGeom prst="line">
-            <a:avLst/>
-          </a:prstGeom>
-          <a:noFill/>
-          <a:ln w="9525">
-            <a:solidFill>
-              <a:srgbClr val="332A1F"/>
-            </a:solidFill>
-            <a:prstDash val="solid"/>
-          </a:ln>
-        </p:spPr>
-      </p:sp>
-      <p:sp>
-        <p:nvSpPr>
-          <p:cNvPr id="22" name="Text 20"/>
-          <p:cNvSpPr txBox="1"/>
-          <p:nvPr/>
-        </p:nvSpPr>
-        <p:spPr>
-          <a:xfrm>
-            <a:off x="685800" y="3739896"/>
-            <a:ext cx="640080" cy="457200"/>
-          </a:xfrm>
-          <a:prstGeom prst="rect">
-            <a:avLst/>
-          </a:prstGeom>
-          <a:noFill/>
-          <a:ln/>
-        </p:spPr>
-        <p:txBody>
-          <a:bodyPr wrap="square" lIns="0" tIns="0" rIns="0" bIns="0" rtlCol="0" anchor="ctr"/>
-          <a:lstStyle/>
-          <a:p>
-            <a:pPr indent="0" marL="0">
-              <a:buNone/>
-            </a:pPr>
-            <a:r>
-              <a:rPr lang="en-US" sz="1200" dirty="0">
-                <a:solidFill>
-                  <a:srgbClr val="B5A186"/>
-                </a:solidFill>
-                <a:latin typeface="Courier New" pitchFamily="34" charset="0"/>
-                <a:ea typeface="Courier New" pitchFamily="34" charset="-122"/>
-                <a:cs typeface="Courier New" pitchFamily="34" charset="-120"/>
-              </a:rPr>
-              <a:t>0:35</a:t>
-            </a:r>
-            <a:endParaRPr lang="en-US" sz="1200" dirty="0"/>
-          </a:p>
-        </p:txBody>
-      </p:sp>
-      <p:sp>
-        <p:nvSpPr>
-          <p:cNvPr id="23" name="Text 21"/>
-          <p:cNvSpPr txBox="1"/>
-          <p:nvPr/>
-        </p:nvSpPr>
-        <p:spPr>
-          <a:xfrm>
-            <a:off x="1371600" y="3739896"/>
-            <a:ext cx="1463040" cy="457200"/>
-          </a:xfrm>
-          <a:prstGeom prst="rect">
-            <a:avLst/>
-          </a:prstGeom>
-          <a:noFill/>
-          <a:ln/>
-        </p:spPr>
-        <p:txBody>
-          <a:bodyPr wrap="square" lIns="0" tIns="0" rIns="0" bIns="0" rtlCol="0" anchor="ctr"/>
-          <a:lstStyle/>
-          <a:p>
-            <a:pPr indent="0" marL="0">
-              <a:buNone/>
-            </a:pPr>
-            <a:r>
-              <a:rPr lang="en-US" sz="750" spc="200" kern="0" dirty="0">
-                <a:solidFill>
-                  <a:srgbClr val="8C7961"/>
-                </a:solidFill>
-                <a:latin typeface="Arial" pitchFamily="34" charset="0"/>
-                <a:ea typeface="Arial" pitchFamily="34" charset="-122"/>
-                <a:cs typeface="Arial" pitchFamily="34" charset="-120"/>
-              </a:rPr>
-              <a:t>JORDAN LEE · DA</a:t>
-            </a:r>
-            <a:endParaRPr lang="en-US" sz="750" dirty="0"/>
-          </a:p>
-        </p:txBody>
-      </p:sp>
-      <p:sp>
-        <p:nvSpPr>
-          <p:cNvPr id="24" name="Shape 22"/>
-          <p:cNvSpPr/>
-          <p:nvPr/>
-        </p:nvSpPr>
-        <p:spPr>
-          <a:xfrm>
-            <a:off x="2880360" y="3813048"/>
-            <a:ext cx="2103120" cy="310896"/>
-          </a:xfrm>
-          <a:prstGeom prst="roundRect">
-            <a:avLst>
-              <a:gd name="adj" fmla="val 50000"/>
-            </a:avLst>
-          </a:prstGeom>
-          <a:solidFill>
-            <a:srgbClr val="3A1A14"/>
-          </a:solidFill>
-          <a:ln w="9525">
-            <a:solidFill>
-              <a:srgbClr val="F0A497"/>
-            </a:solidFill>
-            <a:prstDash val="solid"/>
-          </a:ln>
-        </p:spPr>
-      </p:sp>
-      <p:sp>
-        <p:nvSpPr>
-          <p:cNvPr id="25" name="Text 23"/>
-          <p:cNvSpPr txBox="1"/>
-          <p:nvPr/>
-        </p:nvSpPr>
-        <p:spPr>
-          <a:xfrm>
-            <a:off x="2880360" y="3813048"/>
-            <a:ext cx="2103120" cy="310896"/>
-          </a:xfrm>
-          <a:prstGeom prst="rect">
-            <a:avLst/>
-          </a:prstGeom>
-          <a:noFill/>
-          <a:ln/>
-        </p:spPr>
-        <p:txBody>
-          <a:bodyPr wrap="square" lIns="0" tIns="0" rIns="0" bIns="0" rtlCol="0" anchor="ctr"/>
-          <a:lstStyle/>
-          <a:p>
-            <a:pPr algn="ctr" indent="0" marL="0">
-              <a:buNone/>
-            </a:pPr>
-            <a:r>
-              <a:rPr lang="en-US" sz="1100" dirty="0">
-                <a:solidFill>
-                  <a:srgbClr val="F0A497"/>
-                </a:solidFill>
-                <a:latin typeface="Arial" pitchFamily="34" charset="0"/>
-                <a:ea typeface="Arial" pitchFamily="34" charset="-122"/>
-                <a:cs typeface="Arial" pitchFamily="34" charset="-120"/>
-              </a:rPr>
-              <a:t>Approve  G3</a:t>
-            </a:r>
-            <a:endParaRPr lang="en-US" sz="1100" dirty="0"/>
-          </a:p>
-        </p:txBody>
-      </p:sp>
-      <p:sp>
-        <p:nvSpPr>
-          <p:cNvPr id="26" name="Text 24"/>
-          <p:cNvSpPr txBox="1"/>
-          <p:nvPr/>
-        </p:nvSpPr>
-        <p:spPr>
-          <a:xfrm>
-            <a:off x="5212080" y="3739896"/>
-            <a:ext cx="6293815" cy="457200"/>
-          </a:xfrm>
-          <a:prstGeom prst="rect">
-            <a:avLst/>
-          </a:prstGeom>
-          <a:noFill/>
-          <a:ln/>
-        </p:spPr>
-        <p:txBody>
-          <a:bodyPr wrap="square" lIns="0" tIns="0" rIns="0" bIns="0" rtlCol="0" anchor="ctr"/>
-          <a:lstStyle/>
-          <a:p>
-            <a:pPr indent="0" marL="0">
-              <a:buNone/>
-            </a:pPr>
-            <a:r>
-              <a:rPr lang="en-US" sz="1300" b="1" dirty="0">
-                <a:solidFill>
-                  <a:srgbClr val="F0A497"/>
-                </a:solidFill>
-                <a:latin typeface="Arial" pitchFamily="34" charset="0"/>
-                <a:ea typeface="Arial" pitchFamily="34" charset="-122"/>
-                <a:cs typeface="Arial" pitchFamily="34" charset="-120"/>
-              </a:rPr>
-              <a:t>409</a:t>
-            </a:r>
-            <a:pPr indent="0" marL="0">
-              <a:buNone/>
-            </a:pPr>
-            <a:r>
-              <a:rPr lang="en-US" sz="1300" dirty="0">
-                <a:solidFill>
-                  <a:srgbClr val="E4D8C6"/>
-                </a:solidFill>
-                <a:latin typeface="Arial" pitchFamily="34" charset="0"/>
-                <a:ea typeface="Arial" pitchFamily="34" charset="-122"/>
-                <a:cs typeface="Arial" pitchFamily="34" charset="-120"/>
-              </a:rPr>
-              <a:t> — The reviewer must differ from the builder.</a:t>
-            </a:r>
-            <a:endParaRPr lang="en-US" sz="1300" dirty="0"/>
-          </a:p>
-        </p:txBody>
-      </p:sp>
-      <p:sp>
-        <p:nvSpPr>
-          <p:cNvPr id="27" name="Shape 25"/>
-          <p:cNvSpPr/>
-          <p:nvPr/>
-        </p:nvSpPr>
-        <p:spPr>
-          <a:xfrm>
-            <a:off x="685800" y="4270248"/>
-            <a:ext cx="10820095" cy="0"/>
-          </a:xfrm>
-          <a:prstGeom prst="line">
-            <a:avLst/>
-          </a:prstGeom>
-          <a:noFill/>
-          <a:ln w="9525">
-            <a:solidFill>
-              <a:srgbClr val="332A1F"/>
-            </a:solidFill>
-            <a:prstDash val="solid"/>
-          </a:ln>
-        </p:spPr>
-      </p:sp>
-      <p:sp>
-        <p:nvSpPr>
-          <p:cNvPr id="28" name="Text 26"/>
-          <p:cNvSpPr txBox="1"/>
-          <p:nvPr/>
-        </p:nvSpPr>
-        <p:spPr>
-          <a:xfrm>
-            <a:off x="685800" y="4315968"/>
-            <a:ext cx="640080" cy="457200"/>
-          </a:xfrm>
-          <a:prstGeom prst="rect">
-            <a:avLst/>
-          </a:prstGeom>
-          <a:noFill/>
-          <a:ln/>
-        </p:spPr>
-        <p:txBody>
-          <a:bodyPr wrap="square" lIns="0" tIns="0" rIns="0" bIns="0" rtlCol="0" anchor="ctr"/>
-          <a:lstStyle/>
-          <a:p>
-            <a:pPr indent="0" marL="0">
-              <a:buNone/>
-            </a:pPr>
-            <a:r>
-              <a:rPr lang="en-US" sz="1200" dirty="0">
-                <a:solidFill>
-                  <a:srgbClr val="B5A186"/>
-                </a:solidFill>
-                <a:latin typeface="Courier New" pitchFamily="34" charset="0"/>
-                <a:ea typeface="Courier New" pitchFamily="34" charset="-122"/>
-                <a:cs typeface="Courier New" pitchFamily="34" charset="-120"/>
-              </a:rPr>
-              <a:t>0:42</a:t>
-            </a:r>
-            <a:endParaRPr lang="en-US" sz="1200" dirty="0"/>
-          </a:p>
-        </p:txBody>
-      </p:sp>
-      <p:sp>
-        <p:nvSpPr>
-          <p:cNvPr id="29" name="Text 27"/>
-          <p:cNvSpPr txBox="1"/>
-          <p:nvPr/>
-        </p:nvSpPr>
-        <p:spPr>
-          <a:xfrm>
-            <a:off x="1371600" y="4315968"/>
-            <a:ext cx="1463040" cy="457200"/>
-          </a:xfrm>
-          <a:prstGeom prst="rect">
-            <a:avLst/>
-          </a:prstGeom>
-          <a:noFill/>
-          <a:ln/>
-        </p:spPr>
-        <p:txBody>
-          <a:bodyPr wrap="square" lIns="0" tIns="0" rIns="0" bIns="0" rtlCol="0" anchor="ctr"/>
-          <a:lstStyle/>
-          <a:p>
-            <a:pPr indent="0" marL="0">
-              <a:buNone/>
-            </a:pPr>
-            <a:r>
-              <a:rPr lang="en-US" sz="750" spc="200" kern="0" dirty="0">
-                <a:solidFill>
-                  <a:srgbClr val="8C7961"/>
-                </a:solidFill>
-                <a:latin typeface="Arial" pitchFamily="34" charset="0"/>
-                <a:ea typeface="Arial" pitchFamily="34" charset="-122"/>
-                <a:cs typeface="Arial" pitchFamily="34" charset="-120"/>
-              </a:rPr>
-              <a:t>MORGAN DIAZ · DA</a:t>
-            </a:r>
-            <a:endParaRPr lang="en-US" sz="750" dirty="0"/>
-          </a:p>
-        </p:txBody>
-      </p:sp>
-      <p:sp>
-        <p:nvSpPr>
-          <p:cNvPr id="30" name="Shape 28"/>
-          <p:cNvSpPr/>
-          <p:nvPr/>
-        </p:nvSpPr>
-        <p:spPr>
-          <a:xfrm>
-            <a:off x="2880360" y="4389120"/>
-            <a:ext cx="2103120" cy="310896"/>
-          </a:xfrm>
-          <a:prstGeom prst="roundRect">
-            <a:avLst>
-              <a:gd name="adj" fmla="val 50000"/>
-            </a:avLst>
-          </a:prstGeom>
-          <a:solidFill>
-            <a:srgbClr val="F3D9A4"/>
-          </a:solidFill>
-          <a:ln w="9525">
-            <a:solidFill>
-              <a:srgbClr val="F3D9A4"/>
-            </a:solidFill>
-            <a:prstDash val="solid"/>
-          </a:ln>
-        </p:spPr>
-      </p:sp>
-      <p:sp>
-        <p:nvSpPr>
-          <p:cNvPr id="31" name="Text 29"/>
-          <p:cNvSpPr txBox="1"/>
-          <p:nvPr/>
-        </p:nvSpPr>
-        <p:spPr>
-          <a:xfrm>
-            <a:off x="2880360" y="4389120"/>
-            <a:ext cx="2103120" cy="310896"/>
-          </a:xfrm>
-          <a:prstGeom prst="rect">
-            <a:avLst/>
-          </a:prstGeom>
-          <a:noFill/>
-          <a:ln/>
-        </p:spPr>
-        <p:txBody>
-          <a:bodyPr wrap="square" lIns="0" tIns="0" rIns="0" bIns="0" rtlCol="0" anchor="ctr"/>
-          <a:lstStyle/>
-          <a:p>
-            <a:pPr algn="ctr" indent="0" marL="0">
-              <a:buNone/>
-            </a:pPr>
-            <a:r>
-              <a:rPr lang="en-US" sz="1100" b="1" dirty="0">
-                <a:solidFill>
-                  <a:srgbClr val="2A1B0C"/>
-                </a:solidFill>
-                <a:latin typeface="Arial" pitchFamily="34" charset="0"/>
-                <a:ea typeface="Arial" pitchFamily="34" charset="-122"/>
-                <a:cs typeface="Arial" pitchFamily="34" charset="-120"/>
-              </a:rPr>
-              <a:t>Approve  G3</a:t>
-            </a:r>
-            <a:endParaRPr lang="en-US" sz="1100" dirty="0"/>
-          </a:p>
-        </p:txBody>
-      </p:sp>
-      <p:sp>
-        <p:nvSpPr>
-          <p:cNvPr id="32" name="Text 30"/>
-          <p:cNvSpPr txBox="1"/>
-          <p:nvPr/>
-        </p:nvSpPr>
-        <p:spPr>
-          <a:xfrm>
-            <a:off x="5212080" y="4315968"/>
-            <a:ext cx="6293815" cy="457200"/>
-          </a:xfrm>
-          <a:prstGeom prst="rect">
-            <a:avLst/>
-          </a:prstGeom>
-          <a:noFill/>
-          <a:ln/>
-        </p:spPr>
-        <p:txBody>
-          <a:bodyPr wrap="square" lIns="0" tIns="0" rIns="0" bIns="0" rtlCol="0" anchor="ctr"/>
-          <a:lstStyle/>
-          <a:p>
-            <a:pPr indent="0" marL="0">
-              <a:buNone/>
-            </a:pPr>
-            <a:r>
-              <a:rPr lang="en-US" sz="1300" dirty="0">
-                <a:solidFill>
-                  <a:srgbClr val="E4D8C6"/>
-                </a:solidFill>
-                <a:latin typeface="Arial" pitchFamily="34" charset="0"/>
-                <a:ea typeface="Arial" pitchFamily="34" charset="-122"/>
-                <a:cs typeface="Arial" pitchFamily="34" charset="-120"/>
-              </a:rPr>
-              <a:t>Approved by a </a:t>
-            </a:r>
-            <a:pPr indent="0" marL="0">
-              <a:buNone/>
-            </a:pPr>
-            <a:r>
-              <a:rPr lang="en-US" sz="1300" b="1" dirty="0">
-                <a:solidFill>
-                  <a:srgbClr val="FFF6E6"/>
-                </a:solidFill>
-                <a:latin typeface="Arial" pitchFamily="34" charset="0"/>
-                <a:ea typeface="Arial" pitchFamily="34" charset="-122"/>
-                <a:cs typeface="Arial" pitchFamily="34" charset="-120"/>
-              </a:rPr>
-              <a:t>different person</a:t>
-            </a:r>
-            <a:pPr indent="0" marL="0">
-              <a:buNone/>
-            </a:pPr>
-            <a:r>
-              <a:rPr lang="en-US" sz="1300" dirty="0">
-                <a:solidFill>
-                  <a:srgbClr val="E4D8C6"/>
-                </a:solidFill>
-                <a:latin typeface="Arial" pitchFamily="34" charset="0"/>
-                <a:ea typeface="Arial" pitchFamily="34" charset="-122"/>
-                <a:cs typeface="Arial" pitchFamily="34" charset="-120"/>
-              </a:rPr>
-              <a:t> in the role</a:t>
-            </a:r>
-            <a:endParaRPr lang="en-US" sz="1300" dirty="0"/>
-          </a:p>
-        </p:txBody>
-      </p:sp>
-      <p:sp>
-        <p:nvSpPr>
-          <p:cNvPr id="33" name="Shape 31"/>
-          <p:cNvSpPr/>
-          <p:nvPr/>
-        </p:nvSpPr>
-        <p:spPr>
-          <a:xfrm>
-            <a:off x="685800" y="4846320"/>
-            <a:ext cx="10820095" cy="0"/>
-          </a:xfrm>
-          <a:prstGeom prst="line">
-            <a:avLst/>
-          </a:prstGeom>
-          <a:noFill/>
-          <a:ln w="9525">
-            <a:solidFill>
-              <a:srgbClr val="332A1F"/>
-            </a:solidFill>
-            <a:prstDash val="solid"/>
-          </a:ln>
-        </p:spPr>
-      </p:sp>
-      <p:sp>
-        <p:nvSpPr>
-          <p:cNvPr id="34" name="Text 32"/>
-          <p:cNvSpPr txBox="1"/>
-          <p:nvPr/>
-        </p:nvSpPr>
-        <p:spPr>
-          <a:xfrm>
-            <a:off x="685800" y="4892040"/>
-            <a:ext cx="640080" cy="457200"/>
-          </a:xfrm>
-          <a:prstGeom prst="rect">
-            <a:avLst/>
-          </a:prstGeom>
-          <a:noFill/>
-          <a:ln/>
-        </p:spPr>
-        <p:txBody>
-          <a:bodyPr wrap="square" lIns="0" tIns="0" rIns="0" bIns="0" rtlCol="0" anchor="ctr"/>
-          <a:lstStyle/>
-          <a:p>
-            <a:pPr indent="0" marL="0">
-              <a:buNone/>
-            </a:pPr>
-            <a:r>
-              <a:rPr lang="en-US" sz="1200" dirty="0">
-                <a:solidFill>
-                  <a:srgbClr val="B5A186"/>
-                </a:solidFill>
-                <a:latin typeface="Courier New" pitchFamily="34" charset="0"/>
-                <a:ea typeface="Courier New" pitchFamily="34" charset="-122"/>
-                <a:cs typeface="Courier New" pitchFamily="34" charset="-120"/>
-              </a:rPr>
-              <a:t>0:50</a:t>
-            </a:r>
-            <a:endParaRPr lang="en-US" sz="1200" dirty="0"/>
-          </a:p>
-        </p:txBody>
-      </p:sp>
-      <p:sp>
-        <p:nvSpPr>
-          <p:cNvPr id="35" name="Text 33"/>
-          <p:cNvSpPr txBox="1"/>
-          <p:nvPr/>
-        </p:nvSpPr>
-        <p:spPr>
-          <a:xfrm>
-            <a:off x="1371600" y="4892040"/>
-            <a:ext cx="1463040" cy="457200"/>
-          </a:xfrm>
-          <a:prstGeom prst="rect">
-            <a:avLst/>
-          </a:prstGeom>
-          <a:noFill/>
-          <a:ln/>
-        </p:spPr>
-        <p:txBody>
-          <a:bodyPr wrap="square" lIns="0" tIns="0" rIns="0" bIns="0" rtlCol="0" anchor="ctr"/>
-          <a:lstStyle/>
-          <a:p>
-            <a:pPr indent="0" marL="0">
-              <a:buNone/>
-            </a:pPr>
-            <a:r>
-              <a:rPr lang="en-US" sz="750" spc="200" kern="0" dirty="0">
-                <a:solidFill>
-                  <a:srgbClr val="8C7961"/>
-                </a:solidFill>
-                <a:latin typeface="Arial" pitchFamily="34" charset="0"/>
-                <a:ea typeface="Arial" pitchFamily="34" charset="-122"/>
-                <a:cs typeface="Arial" pitchFamily="34" charset="-120"/>
-              </a:rPr>
-              <a:t>AVERY PARK · OWNER</a:t>
-            </a:r>
-            <a:endParaRPr lang="en-US" sz="750" dirty="0"/>
-          </a:p>
-        </p:txBody>
-      </p:sp>
-      <p:sp>
-        <p:nvSpPr>
-          <p:cNvPr id="36" name="Shape 34"/>
-          <p:cNvSpPr/>
-          <p:nvPr/>
-        </p:nvSpPr>
-        <p:spPr>
-          <a:xfrm>
-            <a:off x="2880360" y="4965192"/>
-            <a:ext cx="2103120" cy="310896"/>
-          </a:xfrm>
-          <a:prstGeom prst="roundRect">
-            <a:avLst>
-              <a:gd name="adj" fmla="val 50000"/>
-            </a:avLst>
-          </a:prstGeom>
-          <a:solidFill>
-            <a:srgbClr val="F3D9A4"/>
-          </a:solidFill>
-          <a:ln w="9525">
-            <a:solidFill>
-              <a:srgbClr val="F3D9A4"/>
-            </a:solidFill>
-            <a:prstDash val="solid"/>
-          </a:ln>
-        </p:spPr>
-      </p:sp>
-      <p:sp>
-        <p:nvSpPr>
-          <p:cNvPr id="37" name="Text 35"/>
-          <p:cNvSpPr txBox="1"/>
-          <p:nvPr/>
-        </p:nvSpPr>
-        <p:spPr>
-          <a:xfrm>
-            <a:off x="2880360" y="4965192"/>
-            <a:ext cx="2103120" cy="310896"/>
-          </a:xfrm>
-          <a:prstGeom prst="rect">
-            <a:avLst/>
-          </a:prstGeom>
-          <a:noFill/>
-          <a:ln/>
-        </p:spPr>
-        <p:txBody>
-          <a:bodyPr wrap="square" lIns="0" tIns="0" rIns="0" bIns="0" rtlCol="0" anchor="ctr"/>
-          <a:lstStyle/>
-          <a:p>
-            <a:pPr algn="ctr" indent="0" marL="0">
-              <a:buNone/>
-            </a:pPr>
-            <a:r>
-              <a:rPr lang="en-US" sz="1100" b="1" dirty="0">
-                <a:solidFill>
-                  <a:srgbClr val="2A1B0C"/>
-                </a:solidFill>
-                <a:latin typeface="Arial" pitchFamily="34" charset="0"/>
-                <a:ea typeface="Arial" pitchFamily="34" charset="-122"/>
-                <a:cs typeface="Arial" pitchFamily="34" charset="-120"/>
-              </a:rPr>
-              <a:t>Release SPEC-003…  G4</a:t>
-            </a:r>
-            <a:endParaRPr lang="en-US" sz="1100" dirty="0"/>
-          </a:p>
-        </p:txBody>
-      </p:sp>
-      <p:sp>
-        <p:nvSpPr>
-          <p:cNvPr id="38" name="Text 36"/>
-          <p:cNvSpPr txBox="1"/>
-          <p:nvPr/>
-        </p:nvSpPr>
-        <p:spPr>
-          <a:xfrm>
-            <a:off x="5212080" y="4892040"/>
-            <a:ext cx="6293815" cy="457200"/>
-          </a:xfrm>
-          <a:prstGeom prst="rect">
-            <a:avLst/>
-          </a:prstGeom>
-          <a:noFill/>
-          <a:ln/>
-        </p:spPr>
-        <p:txBody>
-          <a:bodyPr wrap="square" lIns="0" tIns="0" rIns="0" bIns="0" rtlCol="0" anchor="ctr"/>
-          <a:lstStyle/>
-          <a:p>
-            <a:pPr indent="0" marL="0">
-              <a:buNone/>
-            </a:pPr>
-            <a:r>
-              <a:rPr lang="en-US" sz="1300" dirty="0">
-                <a:solidFill>
-                  <a:srgbClr val="E4D8C6"/>
-                </a:solidFill>
-                <a:latin typeface="Arial" pitchFamily="34" charset="0"/>
-                <a:ea typeface="Arial" pitchFamily="34" charset="-122"/>
-                <a:cs typeface="Arial" pitchFamily="34" charset="-120"/>
-              </a:rPr>
-              <a:t>Release notes + client summary; </a:t>
-            </a:r>
-            <a:pPr indent="0" marL="0">
-              <a:buNone/>
-            </a:pPr>
-            <a:r>
-              <a:rPr lang="en-US" sz="1300" b="1" dirty="0">
-                <a:solidFill>
-                  <a:srgbClr val="FFF6E6"/>
-                </a:solidFill>
-                <a:latin typeface="Arial" pitchFamily="34" charset="0"/>
-                <a:ea typeface="Arial" pitchFamily="34" charset="-122"/>
-                <a:cs typeface="Arial" pitchFamily="34" charset="-120"/>
-              </a:rPr>
-              <a:t>client sign-off</a:t>
-            </a:r>
-            <a:pPr indent="0" marL="0">
-              <a:buNone/>
-            </a:pPr>
-            <a:r>
-              <a:rPr lang="en-US" sz="1300" dirty="0">
-                <a:solidFill>
-                  <a:srgbClr val="E4D8C6"/>
-                </a:solidFill>
-                <a:latin typeface="Arial" pitchFamily="34" charset="0"/>
-                <a:ea typeface="Arial" pitchFamily="34" charset="-122"/>
-                <a:cs typeface="Arial" pitchFamily="34" charset="-120"/>
-              </a:rPr>
-              <a:t> recorded because it touches their ad account</a:t>
-            </a:r>
-            <a:endParaRPr lang="en-US" sz="1300" dirty="0"/>
-          </a:p>
-        </p:txBody>
-      </p:sp>
-      <p:sp>
-        <p:nvSpPr>
-          <p:cNvPr id="39" name="Shape 37"/>
-          <p:cNvSpPr/>
-          <p:nvPr/>
-        </p:nvSpPr>
-        <p:spPr>
-          <a:xfrm>
-            <a:off x="685800" y="5422392"/>
-            <a:ext cx="10820095" cy="0"/>
-          </a:xfrm>
-          <a:prstGeom prst="line">
-            <a:avLst/>
-          </a:prstGeom>
-          <a:noFill/>
-          <a:ln w="9525">
-            <a:solidFill>
-              <a:srgbClr val="332A1F"/>
-            </a:solidFill>
-            <a:prstDash val="solid"/>
-          </a:ln>
-        </p:spPr>
-      </p:sp>
-      <p:sp>
-        <p:nvSpPr>
-          <p:cNvPr id="40" name="Text 38"/>
-          <p:cNvSpPr txBox="1"/>
-          <p:nvPr/>
-        </p:nvSpPr>
-        <p:spPr>
-          <a:xfrm>
-            <a:off x="685800" y="5468112"/>
-            <a:ext cx="640080" cy="457200"/>
-          </a:xfrm>
-          <a:prstGeom prst="rect">
-            <a:avLst/>
-          </a:prstGeom>
-          <a:noFill/>
-          <a:ln/>
-        </p:spPr>
-        <p:txBody>
-          <a:bodyPr wrap="square" lIns="0" tIns="0" rIns="0" bIns="0" rtlCol="0" anchor="ctr"/>
-          <a:lstStyle/>
-          <a:p>
-            <a:pPr indent="0" marL="0">
-              <a:buNone/>
-            </a:pPr>
-            <a:r>
-              <a:rPr lang="en-US" sz="1200" dirty="0">
-                <a:solidFill>
-                  <a:srgbClr val="B5A186"/>
-                </a:solidFill>
-                <a:latin typeface="Courier New" pitchFamily="34" charset="0"/>
-                <a:ea typeface="Courier New" pitchFamily="34" charset="-122"/>
-                <a:cs typeface="Courier New" pitchFamily="34" charset="-120"/>
-              </a:rPr>
-              <a:t>0:58</a:t>
-            </a:r>
-            <a:endParaRPr lang="en-US" sz="1200" dirty="0"/>
-          </a:p>
-        </p:txBody>
-      </p:sp>
-      <p:sp>
-        <p:nvSpPr>
-          <p:cNvPr id="41" name="Text 39"/>
-          <p:cNvSpPr txBox="1"/>
-          <p:nvPr/>
-        </p:nvSpPr>
-        <p:spPr>
-          <a:xfrm>
-            <a:off x="1371600" y="5468112"/>
-            <a:ext cx="1463040" cy="457200"/>
-          </a:xfrm>
-          <a:prstGeom prst="rect">
-            <a:avLst/>
-          </a:prstGeom>
-          <a:noFill/>
-          <a:ln/>
-        </p:spPr>
-        <p:txBody>
-          <a:bodyPr wrap="square" lIns="0" tIns="0" rIns="0" bIns="0" rtlCol="0" anchor="ctr"/>
-          <a:lstStyle/>
-          <a:p>
-            <a:pPr indent="0" marL="0">
-              <a:buNone/>
-            </a:pPr>
-            <a:r>
-              <a:rPr lang="en-US" sz="750" spc="200" kern="0" dirty="0">
-                <a:solidFill>
-                  <a:srgbClr val="8C7961"/>
-                </a:solidFill>
-                <a:latin typeface="Arial" pitchFamily="34" charset="0"/>
-                <a:ea typeface="Arial" pitchFamily="34" charset="-122"/>
-                <a:cs typeface="Arial" pitchFamily="34" charset="-120"/>
-              </a:rPr>
-              <a:t>AVERY PARK · OWNER</a:t>
-            </a:r>
-            <a:endParaRPr lang="en-US" sz="750" dirty="0"/>
-          </a:p>
-        </p:txBody>
-      </p:sp>
-      <p:sp>
-        <p:nvSpPr>
-          <p:cNvPr id="42" name="Shape 40"/>
-          <p:cNvSpPr/>
-          <p:nvPr/>
-        </p:nvSpPr>
-        <p:spPr>
-          <a:xfrm>
-            <a:off x="2880360" y="5541264"/>
-            <a:ext cx="2103120" cy="310896"/>
-          </a:xfrm>
-          <a:prstGeom prst="roundRect">
-            <a:avLst>
-              <a:gd name="adj" fmla="val 50000"/>
-            </a:avLst>
-          </a:prstGeom>
-          <a:solidFill>
-            <a:srgbClr val="F3D9A4"/>
-          </a:solidFill>
-          <a:ln w="9525">
-            <a:solidFill>
-              <a:srgbClr val="F3D9A4"/>
-            </a:solidFill>
-            <a:prstDash val="solid"/>
-          </a:ln>
-        </p:spPr>
-      </p:sp>
-      <p:sp>
-        <p:nvSpPr>
-          <p:cNvPr id="43" name="Text 41"/>
-          <p:cNvSpPr txBox="1"/>
-          <p:nvPr/>
-        </p:nvSpPr>
-        <p:spPr>
-          <a:xfrm>
-            <a:off x="2880360" y="5541264"/>
-            <a:ext cx="2103120" cy="310896"/>
-          </a:xfrm>
-          <a:prstGeom prst="rect">
-            <a:avLst/>
-          </a:prstGeom>
-          <a:noFill/>
-          <a:ln/>
-        </p:spPr>
-        <p:txBody>
-          <a:bodyPr wrap="square" lIns="0" tIns="0" rIns="0" bIns="0" rtlCol="0" anchor="ctr"/>
-          <a:lstStyle/>
-          <a:p>
-            <a:pPr algn="ctr" indent="0" marL="0">
-              <a:buNone/>
-            </a:pPr>
-            <a:r>
-              <a:rPr lang="en-US" sz="1100" b="1" dirty="0">
-                <a:solidFill>
-                  <a:srgbClr val="2A1B0C"/>
-                </a:solidFill>
-                <a:latin typeface="Arial" pitchFamily="34" charset="0"/>
-                <a:ea typeface="Arial" pitchFamily="34" charset="-122"/>
-                <a:cs typeface="Arial" pitchFamily="34" charset="-120"/>
-              </a:rPr>
-              <a:t>Approve &amp; send  G5</a:t>
-            </a:r>
-            <a:endParaRPr lang="en-US" sz="1100" dirty="0"/>
-          </a:p>
-        </p:txBody>
-      </p:sp>
-      <p:sp>
-        <p:nvSpPr>
-          <p:cNvPr id="44" name="Text 42"/>
-          <p:cNvSpPr txBox="1"/>
-          <p:nvPr/>
-        </p:nvSpPr>
-        <p:spPr>
-          <a:xfrm>
-            <a:off x="5212080" y="5468112"/>
-            <a:ext cx="6293815" cy="457200"/>
-          </a:xfrm>
-          <a:prstGeom prst="rect">
-            <a:avLst/>
-          </a:prstGeom>
-          <a:noFill/>
-          <a:ln/>
-        </p:spPr>
-        <p:txBody>
-          <a:bodyPr wrap="square" lIns="0" tIns="0" rIns="0" bIns="0" rtlCol="0" anchor="ctr"/>
-          <a:lstStyle/>
-          <a:p>
-            <a:pPr indent="0" marL="0">
-              <a:buNone/>
-            </a:pPr>
-            <a:r>
-              <a:rPr lang="en-US" sz="1300" dirty="0">
-                <a:solidFill>
-                  <a:srgbClr val="E4D8C6"/>
-                </a:solidFill>
-                <a:latin typeface="Arial" pitchFamily="34" charset="0"/>
-                <a:ea typeface="Arial" pitchFamily="34" charset="-122"/>
-                <a:cs typeface="Arial" pitchFamily="34" charset="-120"/>
-              </a:rPr>
-              <a:t>Plain-language </a:t>
-            </a:r>
-            <a:pPr indent="0" marL="0">
-              <a:buNone/>
-            </a:pPr>
-            <a:r>
-              <a:rPr lang="en-US" sz="1300" b="1" dirty="0">
-                <a:solidFill>
-                  <a:srgbClr val="FFF6E6"/>
-                </a:solidFill>
-                <a:latin typeface="Arial" pitchFamily="34" charset="0"/>
-                <a:ea typeface="Arial" pitchFamily="34" charset="-122"/>
-                <a:cs typeface="Arial" pitchFamily="34" charset="-120"/>
-              </a:rPr>
-              <a:t>client update</a:t>
-            </a:r>
-            <a:pPr indent="0" marL="0">
-              <a:buNone/>
-            </a:pPr>
-            <a:r>
-              <a:rPr lang="en-US" sz="1300" dirty="0">
-                <a:solidFill>
-                  <a:srgbClr val="E4D8C6"/>
-                </a:solidFill>
-                <a:latin typeface="Arial" pitchFamily="34" charset="0"/>
-                <a:ea typeface="Arial" pitchFamily="34" charset="-122"/>
-                <a:cs typeface="Arial" pitchFamily="34" charset="-120"/>
-              </a:rPr>
-              <a:t> with a follow-up question per open gap → back to the client's AI</a:t>
+              <a:t>the agent drafts, a different party approves, and every recommendation is a ticket someone owns.</a:t>
             </a:r>
             <a:endParaRPr lang="en-US" sz="1300" dirty="0"/>
           </a:p>
@@ -16445,7 +16810,7 @@
                 <a:ea typeface="Arial" pitchFamily="34" charset="-122"/>
                 <a:cs typeface="Arial" pitchFamily="34" charset="-120"/>
               </a:rPr>
-              <a:t>WHY IT'S A BUSINESS</a:t>
+              <a:t>LIVE DEMO · 60 SECONDS · CONSOLE AT 127.0.0.1:8792</a:t>
             </a:r>
             <a:endParaRPr lang="en-US" sz="1100" dirty="0"/>
           </a:p>
@@ -16487,7 +16852,7 @@
                 <a:ea typeface="Arial" pitchFamily="34" charset="-122"/>
                 <a:cs typeface="Arial" pitchFamily="34" charset="-120"/>
               </a:rPr>
-              <a:t>The agency owner pays. </a:t>
+              <a:t>Approve one spec. Watch it become </a:t>
             </a:r>
             <a:pPr indent="0" marL="0">
               <a:lnSpc>
@@ -16504,7 +16869,24 @@
                 <a:ea typeface="Arial" pitchFamily="34" charset="-122"/>
                 <a:cs typeface="Arial" pitchFamily="34" charset="-120"/>
               </a:rPr>
-              <a:t>The client's AI is the channel.</a:t>
+              <a:t>released, reviewed work</a:t>
+            </a:r>
+            <a:pPr indent="0" marL="0">
+              <a:lnSpc>
+                <a:spcPct val="105000"/>
+              </a:lnSpc>
+              <a:buNone/>
+            </a:pPr>
+            <a:r>
+              <a:rPr lang="en-US" sz="3400" dirty="0">
+                <a:solidFill>
+                  <a:srgbClr val="FFF6E6"/>
+                </a:solidFill>
+                <a:latin typeface="Arial" pitchFamily="34" charset="0"/>
+                <a:ea typeface="Arial" pitchFamily="34" charset="-122"/>
+                <a:cs typeface="Arial" pitchFamily="34" charset="-120"/>
+              </a:rPr>
+              <a:t> and a client update.</a:t>
             </a:r>
             <a:endParaRPr lang="en-US" sz="3400" dirty="0"/>
           </a:p>
@@ -16512,37 +16894,42 @@
       </p:sp>
       <p:sp>
         <p:nvSpPr>
-          <p:cNvPr id="4" name="Shape 2"/>
-          <p:cNvSpPr/>
-          <p:nvPr/>
-        </p:nvSpPr>
-        <p:spPr>
-          <a:xfrm>
-            <a:off x="685800" y="1691640"/>
-            <a:ext cx="3454298" cy="3108960"/>
-          </a:xfrm>
-          <a:prstGeom prst="roundRect">
-            <a:avLst>
-              <a:gd name="adj" fmla="val 3529"/>
-            </a:avLst>
-          </a:prstGeom>
-          <a:solidFill>
-            <a:srgbClr val="1F1610"/>
-          </a:solidFill>
-          <a:ln w="9525">
-            <a:solidFill>
-              <a:srgbClr val="332A1F"/>
-            </a:solidFill>
-            <a:prstDash val="solid"/>
-          </a:ln>
-          <a:effectLst>
-            <a:outerShdw sx="100000" sy="100000" kx="0" ky="0" algn="bl" rotWithShape="0" blurRad="152400" dist="50800" dir="5400000">
-              <a:srgbClr val="000000">
-                <a:alpha val="35000"/>
-              </a:srgbClr>
-            </a:outerShdw>
-          </a:effectLst>
-        </p:spPr>
+          <p:cNvPr id="4" name="Text 2"/>
+          <p:cNvSpPr txBox="1"/>
+          <p:nvPr/>
+        </p:nvSpPr>
+        <p:spPr>
+          <a:xfrm>
+            <a:off x="685800" y="2011680"/>
+            <a:ext cx="640080" cy="457200"/>
+          </a:xfrm>
+          <a:prstGeom prst="rect">
+            <a:avLst/>
+          </a:prstGeom>
+          <a:noFill/>
+          <a:ln/>
+        </p:spPr>
+        <p:txBody>
+          <a:bodyPr wrap="square" lIns="0" tIns="0" rIns="0" bIns="0" rtlCol="0" anchor="ctr"/>
+          <a:lstStyle/>
+          <a:p>
+            <a:pPr indent="0" marL="0">
+              <a:buNone/>
+            </a:pPr>
+            <a:r>
+              <a:rPr lang="en-US" sz="1200" dirty="0">
+                <a:solidFill>
+                  <a:srgbClr val="B5A186"/>
+                </a:solidFill>
+                <a:latin typeface="Courier New" pitchFamily="34" charset="0"/>
+                <a:ea typeface="Courier New" pitchFamily="34" charset="-122"/>
+                <a:cs typeface="Courier New" pitchFamily="34" charset="-120"/>
+              </a:rPr>
+              <a:t>0:00</a:t>
+            </a:r>
+            <a:endParaRPr lang="en-US" sz="1200" dirty="0"/>
+          </a:p>
+        </p:txBody>
       </p:sp>
       <p:sp>
         <p:nvSpPr>
@@ -16552,34 +16939,34 @@
         </p:nvSpPr>
         <p:spPr>
           <a:xfrm>
-            <a:off x="914400" y="1874520"/>
-            <a:ext cx="1828800" cy="228600"/>
-          </a:xfrm>
-          <a:prstGeom prst="rect">
-            <a:avLst/>
-          </a:prstGeom>
-          <a:noFill/>
-          <a:ln/>
-        </p:spPr>
-        <p:txBody>
-          <a:bodyPr wrap="square" lIns="0" tIns="0" rIns="0" bIns="0" rtlCol="0" anchor="t"/>
-          <a:lstStyle/>
-          <a:p>
-            <a:pPr indent="0" marL="0">
-              <a:buNone/>
-            </a:pPr>
-            <a:r>
-              <a:rPr lang="en-US" sz="850" b="1" spc="400" kern="0" dirty="0">
-                <a:solidFill>
-                  <a:srgbClr val="E8C290"/>
-                </a:solidFill>
-                <a:latin typeface="Arial" pitchFamily="34" charset="0"/>
-                <a:ea typeface="Arial" pitchFamily="34" charset="-122"/>
-                <a:cs typeface="Arial" pitchFamily="34" charset="-120"/>
-              </a:rPr>
-              <a:t>WHO PAYS</a:t>
-            </a:r>
-            <a:endParaRPr lang="en-US" sz="850" dirty="0"/>
+            <a:off x="1371600" y="2011680"/>
+            <a:ext cx="1463040" cy="457200"/>
+          </a:xfrm>
+          <a:prstGeom prst="rect">
+            <a:avLst/>
+          </a:prstGeom>
+          <a:noFill/>
+          <a:ln/>
+        </p:spPr>
+        <p:txBody>
+          <a:bodyPr wrap="square" lIns="0" tIns="0" rIns="0" bIns="0" rtlCol="0" anchor="ctr"/>
+          <a:lstStyle/>
+          <a:p>
+            <a:pPr indent="0" marL="0">
+              <a:buNone/>
+            </a:pPr>
+            <a:r>
+              <a:rPr lang="en-US" sz="750" spc="200" kern="0" dirty="0">
+                <a:solidFill>
+                  <a:srgbClr val="8C7961"/>
+                </a:solidFill>
+                <a:latin typeface="Arial" pitchFamily="34" charset="0"/>
+                <a:ea typeface="Arial" pitchFamily="34" charset="-122"/>
+                <a:cs typeface="Arial" pitchFamily="34" charset="-120"/>
+              </a:rPr>
+              <a:t>AVERY PARK · OWNER</a:t>
+            </a:r>
+            <a:endParaRPr lang="en-US" sz="750" dirty="0"/>
           </a:p>
         </p:txBody>
       </p:sp>
@@ -16591,8 +16978,8 @@
         </p:nvSpPr>
         <p:spPr>
           <a:xfrm>
-            <a:off x="2768498" y="1874520"/>
-            <a:ext cx="1143000" cy="219456"/>
+            <a:off x="2880360" y="2084832"/>
+            <a:ext cx="2103120" cy="310896"/>
           </a:xfrm>
           <a:prstGeom prst="roundRect">
             <a:avLst>
@@ -16600,15 +16987,11 @@
             </a:avLst>
           </a:prstGeom>
           <a:solidFill>
-            <a:srgbClr val="E8C290">
-              <a:alpha val="12000"/>
-            </a:srgbClr>
+            <a:srgbClr val="F3D9A4"/>
           </a:solidFill>
           <a:ln w="9525">
             <a:solidFill>
-              <a:srgbClr val="E8C290">
-                <a:alpha val="50000"/>
-              </a:srgbClr>
+              <a:srgbClr val="F3D9A4"/>
             </a:solidFill>
             <a:prstDash val="solid"/>
           </a:ln>
@@ -16622,8 +17005,8 @@
         </p:nvSpPr>
         <p:spPr>
           <a:xfrm>
-            <a:off x="2768498" y="1874520"/>
-            <a:ext cx="1143000" cy="219456"/>
+            <a:off x="2880360" y="2084832"/>
+            <a:ext cx="2103120" cy="310896"/>
           </a:xfrm>
           <a:prstGeom prst="rect">
             <a:avLst/>
@@ -16639,15 +17022,197 @@
               <a:buNone/>
             </a:pPr>
             <a:r>
-              <a:rPr lang="en-US" sz="750" b="1" spc="200" kern="0" dirty="0">
-                <a:solidFill>
-                  <a:srgbClr val="E8C290"/>
-                </a:solidFill>
-                <a:latin typeface="Arial" pitchFamily="34" charset="0"/>
-                <a:ea typeface="Arial" pitchFamily="34" charset="-122"/>
-                <a:cs typeface="Arial" pitchFamily="34" charset="-120"/>
-              </a:rPr>
-              <a:t>HYPOTHESES</a:t>
+              <a:rPr lang="en-US" sz="1100" b="1" dirty="0">
+                <a:solidFill>
+                  <a:srgbClr val="2A1B0C"/>
+                </a:solidFill>
+                <a:latin typeface="Arial" pitchFamily="34" charset="0"/>
+                <a:ea typeface="Arial" pitchFamily="34" charset="-122"/>
+                <a:cs typeface="Arial" pitchFamily="34" charset="-120"/>
+              </a:rPr>
+              <a:t>Approve  G1</a:t>
+            </a:r>
+            <a:endParaRPr lang="en-US" sz="1100" dirty="0"/>
+          </a:p>
+        </p:txBody>
+      </p:sp>
+      <p:sp>
+        <p:nvSpPr>
+          <p:cNvPr id="8" name="Text 6"/>
+          <p:cNvSpPr txBox="1"/>
+          <p:nvPr/>
+        </p:nvSpPr>
+        <p:spPr>
+          <a:xfrm>
+            <a:off x="5212080" y="2011680"/>
+            <a:ext cx="6293815" cy="457200"/>
+          </a:xfrm>
+          <a:prstGeom prst="rect">
+            <a:avLst/>
+          </a:prstGeom>
+          <a:noFill/>
+          <a:ln/>
+        </p:spPr>
+        <p:txBody>
+          <a:bodyPr wrap="square" lIns="0" tIns="0" rIns="0" bIns="0" rtlCol="0" anchor="ctr"/>
+          <a:lstStyle/>
+          <a:p>
+            <a:pPr indent="0" marL="0">
+              <a:buNone/>
+            </a:pPr>
+            <a:r>
+              <a:rPr lang="en-US" sz="1300" b="1" dirty="0">
+                <a:solidFill>
+                  <a:srgbClr val="FFF6E6"/>
+                </a:solidFill>
+                <a:latin typeface="Arial" pitchFamily="34" charset="0"/>
+                <a:ea typeface="Arial" pitchFamily="34" charset="-122"/>
+                <a:cs typeface="Arial" pitchFamily="34" charset="-120"/>
+              </a:rPr>
+              <a:t>SPEC-003</a:t>
+            </a:r>
+            <a:pPr indent="0" marL="0">
+              <a:buNone/>
+            </a:pPr>
+            <a:r>
+              <a:rPr lang="en-US" sz="1300" dirty="0">
+                <a:solidFill>
+                  <a:srgbClr val="E4D8C6"/>
+                </a:solidFill>
+                <a:latin typeface="Arial" pitchFamily="34" charset="0"/>
+                <a:ea typeface="Arial" pitchFamily="34" charset="-122"/>
+                <a:cs typeface="Arial" pitchFamily="34" charset="-120"/>
+              </a:rPr>
+              <a:t> Profit model → agent splits it into </a:t>
+            </a:r>
+            <a:pPr indent="0" marL="0">
+              <a:buNone/>
+            </a:pPr>
+            <a:r>
+              <a:rPr lang="en-US" sz="1300" b="1" dirty="0">
+                <a:solidFill>
+                  <a:srgbClr val="FFF6E6"/>
+                </a:solidFill>
+                <a:latin typeface="Arial" pitchFamily="34" charset="0"/>
+                <a:ea typeface="Arial" pitchFamily="34" charset="-122"/>
+                <a:cs typeface="Arial" pitchFamily="34" charset="-120"/>
+              </a:rPr>
+              <a:t>5 tickets</a:t>
+            </a:r>
+            <a:pPr indent="0" marL="0">
+              <a:buNone/>
+            </a:pPr>
+            <a:r>
+              <a:rPr lang="en-US" sz="1300" dirty="0">
+                <a:solidFill>
+                  <a:srgbClr val="E4D8C6"/>
+                </a:solidFill>
+                <a:latin typeface="Arial" pitchFamily="34" charset="0"/>
+                <a:ea typeface="Arial" pitchFamily="34" charset="-122"/>
+                <a:cs typeface="Arial" pitchFamily="34" charset="-120"/>
+              </a:rPr>
+              <a:t> in dependency order</a:t>
+            </a:r>
+            <a:endParaRPr lang="en-US" sz="1300" dirty="0"/>
+          </a:p>
+        </p:txBody>
+      </p:sp>
+      <p:sp>
+        <p:nvSpPr>
+          <p:cNvPr id="9" name="Shape 7"/>
+          <p:cNvSpPr/>
+          <p:nvPr/>
+        </p:nvSpPr>
+        <p:spPr>
+          <a:xfrm>
+            <a:off x="685800" y="2542032"/>
+            <a:ext cx="10820095" cy="0"/>
+          </a:xfrm>
+          <a:prstGeom prst="line">
+            <a:avLst/>
+          </a:prstGeom>
+          <a:noFill/>
+          <a:ln w="9525">
+            <a:solidFill>
+              <a:srgbClr val="332A1F"/>
+            </a:solidFill>
+            <a:prstDash val="solid"/>
+          </a:ln>
+        </p:spPr>
+      </p:sp>
+      <p:sp>
+        <p:nvSpPr>
+          <p:cNvPr id="10" name="Text 8"/>
+          <p:cNvSpPr txBox="1"/>
+          <p:nvPr/>
+        </p:nvSpPr>
+        <p:spPr>
+          <a:xfrm>
+            <a:off x="685800" y="2587752"/>
+            <a:ext cx="640080" cy="457200"/>
+          </a:xfrm>
+          <a:prstGeom prst="rect">
+            <a:avLst/>
+          </a:prstGeom>
+          <a:noFill/>
+          <a:ln/>
+        </p:spPr>
+        <p:txBody>
+          <a:bodyPr wrap="square" lIns="0" tIns="0" rIns="0" bIns="0" rtlCol="0" anchor="ctr"/>
+          <a:lstStyle/>
+          <a:p>
+            <a:pPr indent="0" marL="0">
+              <a:buNone/>
+            </a:pPr>
+            <a:r>
+              <a:rPr lang="en-US" sz="1200" dirty="0">
+                <a:solidFill>
+                  <a:srgbClr val="B5A186"/>
+                </a:solidFill>
+                <a:latin typeface="Courier New" pitchFamily="34" charset="0"/>
+                <a:ea typeface="Courier New" pitchFamily="34" charset="-122"/>
+                <a:cs typeface="Courier New" pitchFamily="34" charset="-120"/>
+              </a:rPr>
+              <a:t>0:10</a:t>
+            </a:r>
+            <a:endParaRPr lang="en-US" sz="1200" dirty="0"/>
+          </a:p>
+        </p:txBody>
+      </p:sp>
+      <p:sp>
+        <p:nvSpPr>
+          <p:cNvPr id="11" name="Text 9"/>
+          <p:cNvSpPr txBox="1"/>
+          <p:nvPr/>
+        </p:nvSpPr>
+        <p:spPr>
+          <a:xfrm>
+            <a:off x="1371600" y="2587752"/>
+            <a:ext cx="1463040" cy="457200"/>
+          </a:xfrm>
+          <a:prstGeom prst="rect">
+            <a:avLst/>
+          </a:prstGeom>
+          <a:noFill/>
+          <a:ln/>
+        </p:spPr>
+        <p:txBody>
+          <a:bodyPr wrap="square" lIns="0" tIns="0" rIns="0" bIns="0" rtlCol="0" anchor="ctr"/>
+          <a:lstStyle/>
+          <a:p>
+            <a:pPr indent="0" marL="0">
+              <a:buNone/>
+            </a:pPr>
+            <a:r>
+              <a:rPr lang="en-US" sz="750" spc="200" kern="0" dirty="0">
+                <a:solidFill>
+                  <a:srgbClr val="8C7961"/>
+                </a:solidFill>
+                <a:latin typeface="Arial" pitchFamily="34" charset="0"/>
+                <a:ea typeface="Arial" pitchFamily="34" charset="-122"/>
+                <a:cs typeface="Arial" pitchFamily="34" charset="-120"/>
+              </a:rPr>
+              <a:t>JORDAN LEE · DA</a:t>
             </a:r>
             <a:endParaRPr lang="en-US" sz="750" dirty="0"/>
           </a:p>
@@ -16655,198 +17220,14 @@
       </p:sp>
       <p:sp>
         <p:nvSpPr>
-          <p:cNvPr id="8" name="Text 6"/>
-          <p:cNvSpPr txBox="1"/>
-          <p:nvPr/>
-        </p:nvSpPr>
-        <p:spPr>
-          <a:xfrm>
-            <a:off x="914400" y="2240280"/>
-            <a:ext cx="2997098" cy="2377440"/>
-          </a:xfrm>
-          <a:prstGeom prst="rect">
-            <a:avLst/>
-          </a:prstGeom>
-          <a:noFill/>
-          <a:ln/>
-        </p:spPr>
-        <p:txBody>
-          <a:bodyPr wrap="square" lIns="0" tIns="0" rIns="0" bIns="0" rtlCol="0" anchor="t"/>
-          <a:lstStyle/>
-          <a:p>
-            <a:pPr indent="0" marL="0">
-              <a:buNone/>
-            </a:pPr>
-            <a:r>
-              <a:rPr lang="en-US" sz="1200" b="1" dirty="0">
-                <a:solidFill>
-                  <a:srgbClr val="FFF6E6"/>
-                </a:solidFill>
-                <a:latin typeface="Arial" pitchFamily="34" charset="0"/>
-                <a:ea typeface="Arial" pitchFamily="34" charset="-122"/>
-                <a:cs typeface="Arial" pitchFamily="34" charset="-120"/>
-              </a:rPr>
-              <a:t>ACE, customer zero.</a:t>
-            </a:r>
-            <a:pPr indent="0" marL="0">
-              <a:buNone/>
-            </a:pPr>
-            <a:r>
-              <a:rPr lang="en-US" sz="1200" dirty="0">
-                <a:solidFill>
-                  <a:srgbClr val="E4D8C6"/>
-                </a:solidFill>
-                <a:latin typeface="Arial" pitchFamily="34" charset="0"/>
-                <a:ea typeface="Arial" pitchFamily="34" charset="-122"/>
-                <a:cs typeface="Arial" pitchFamily="34" charset="-120"/>
-              </a:rPr>
-              <a:t> Buyer and user; our next real client runs through it Monday.
-</a:t>
-            </a:r>
-            <a:pPr indent="0" marL="0">
-              <a:buNone/>
-            </a:pPr>
-            <a:r>
-              <a:rPr lang="en-US" sz="1200" b="1" dirty="0">
-                <a:solidFill>
-                  <a:srgbClr val="FFF6E6"/>
-                </a:solidFill>
-                <a:latin typeface="Arial" pitchFamily="34" charset="0"/>
-                <a:ea typeface="Arial" pitchFamily="34" charset="-122"/>
-                <a:cs typeface="Arial" pitchFamily="34" charset="-120"/>
-              </a:rPr>
-              <a:t>Google Ads agencies serving e-commerce.</a:t>
-            </a:r>
-            <a:pPr indent="0" marL="0">
-              <a:buNone/>
-            </a:pPr>
-            <a:r>
-              <a:rPr lang="en-US" sz="1200" dirty="0">
-                <a:solidFill>
-                  <a:srgbClr val="E4D8C6"/>
-                </a:solidFill>
-                <a:latin typeface="Arial" pitchFamily="34" charset="0"/>
-                <a:ea typeface="Arial" pitchFamily="34" charset="-122"/>
-                <a:cs typeface="Arial" pitchFamily="34" charset="-120"/>
-              </a:rPr>
-              <a:t> Onboarding hours are unbilled; launch speed keeps clients.
-</a:t>
-            </a:r>
-            <a:pPr indent="0" marL="0">
-              <a:buNone/>
-            </a:pPr>
-            <a:r>
-              <a:rPr lang="en-US" sz="1200" b="1" dirty="0">
-                <a:solidFill>
-                  <a:srgbClr val="FFF6E6"/>
-                </a:solidFill>
-                <a:latin typeface="Arial" pitchFamily="34" charset="0"/>
-                <a:ea typeface="Arial" pitchFamily="34" charset="-122"/>
-                <a:cs typeface="Arial" pitchFamily="34" charset="-120"/>
-              </a:rPr>
-              <a:t>In-house growth teams</a:t>
-            </a:r>
-            <a:pPr indent="0" marL="0">
-              <a:buNone/>
-            </a:pPr>
-            <a:r>
-              <a:rPr lang="en-US" sz="1200" dirty="0">
-                <a:solidFill>
-                  <a:srgbClr val="E4D8C6"/>
-                </a:solidFill>
-                <a:latin typeface="Arial" pitchFamily="34" charset="0"/>
-                <a:ea typeface="Arial" pitchFamily="34" charset="-122"/>
-                <a:cs typeface="Arial" pitchFamily="34" charset="-120"/>
-              </a:rPr>
-              <a:t> onboarding agencies and freelancers: same checklist, reversed.</a:t>
-            </a:r>
-            <a:endParaRPr lang="en-US" sz="1200" dirty="0"/>
-          </a:p>
-        </p:txBody>
-      </p:sp>
-      <p:sp>
-        <p:nvSpPr>
-          <p:cNvPr id="9" name="Shape 7"/>
-          <p:cNvSpPr/>
-          <p:nvPr/>
-        </p:nvSpPr>
-        <p:spPr>
-          <a:xfrm>
-            <a:off x="4368698" y="1691640"/>
-            <a:ext cx="3454298" cy="3108960"/>
-          </a:xfrm>
-          <a:prstGeom prst="roundRect">
-            <a:avLst>
-              <a:gd name="adj" fmla="val 3529"/>
-            </a:avLst>
-          </a:prstGeom>
-          <a:solidFill>
-            <a:srgbClr val="1F1610"/>
-          </a:solidFill>
-          <a:ln w="9525">
-            <a:solidFill>
-              <a:srgbClr val="332A1F"/>
-            </a:solidFill>
-            <a:prstDash val="solid"/>
-          </a:ln>
-          <a:effectLst>
-            <a:outerShdw sx="100000" sy="100000" kx="0" ky="0" algn="bl" rotWithShape="0" blurRad="152400" dist="50800" dir="5400000">
-              <a:srgbClr val="000000">
-                <a:alpha val="35000"/>
-              </a:srgbClr>
-            </a:outerShdw>
-          </a:effectLst>
-        </p:spPr>
-      </p:sp>
-      <p:sp>
-        <p:nvSpPr>
-          <p:cNvPr id="10" name="Text 8"/>
-          <p:cNvSpPr txBox="1"/>
-          <p:nvPr/>
-        </p:nvSpPr>
-        <p:spPr>
-          <a:xfrm>
-            <a:off x="4597298" y="1874520"/>
-            <a:ext cx="1828800" cy="228600"/>
-          </a:xfrm>
-          <a:prstGeom prst="rect">
-            <a:avLst/>
-          </a:prstGeom>
-          <a:noFill/>
-          <a:ln/>
-        </p:spPr>
-        <p:txBody>
-          <a:bodyPr wrap="square" lIns="0" tIns="0" rIns="0" bIns="0" rtlCol="0" anchor="t"/>
-          <a:lstStyle/>
-          <a:p>
-            <a:pPr indent="0" marL="0">
-              <a:buNone/>
-            </a:pPr>
-            <a:r>
-              <a:rPr lang="en-US" sz="850" b="1" spc="400" kern="0" dirty="0">
-                <a:solidFill>
-                  <a:srgbClr val="E8C290"/>
-                </a:solidFill>
-                <a:latin typeface="Arial" pitchFamily="34" charset="0"/>
-                <a:ea typeface="Arial" pitchFamily="34" charset="-122"/>
-                <a:cs typeface="Arial" pitchFamily="34" charset="-120"/>
-              </a:rPr>
-              <a:t>PRICING</a:t>
-            </a:r>
-            <a:endParaRPr lang="en-US" sz="850" dirty="0"/>
-          </a:p>
-        </p:txBody>
-      </p:sp>
-      <p:sp>
-        <p:nvSpPr>
-          <p:cNvPr id="11" name="Shape 9"/>
-          <p:cNvSpPr/>
-          <p:nvPr/>
-        </p:nvSpPr>
-        <p:spPr>
-          <a:xfrm>
-            <a:off x="6451397" y="1874520"/>
-            <a:ext cx="1143000" cy="219456"/>
+          <p:cNvPr id="12" name="Shape 10"/>
+          <p:cNvSpPr/>
+          <p:nvPr/>
+        </p:nvSpPr>
+        <p:spPr>
+          <a:xfrm>
+            <a:off x="2880360" y="2660904"/>
+            <a:ext cx="2103120" cy="310896"/>
           </a:xfrm>
           <a:prstGeom prst="roundRect">
             <a:avLst>
@@ -16854,30 +17235,26 @@
             </a:avLst>
           </a:prstGeom>
           <a:solidFill>
-            <a:srgbClr val="E8C290">
-              <a:alpha val="12000"/>
-            </a:srgbClr>
+            <a:srgbClr val="281D15"/>
           </a:solidFill>
           <a:ln w="9525">
             <a:solidFill>
-              <a:srgbClr val="E8C290">
-                <a:alpha val="50000"/>
-              </a:srgbClr>
-            </a:solidFill>
-            <a:prstDash val="solid"/>
-          </a:ln>
-        </p:spPr>
-      </p:sp>
-      <p:sp>
-        <p:nvSpPr>
-          <p:cNvPr id="12" name="Text 10"/>
-          <p:cNvSpPr txBox="1"/>
-          <p:nvPr/>
-        </p:nvSpPr>
-        <p:spPr>
-          <a:xfrm>
-            <a:off x="6451397" y="1874520"/>
-            <a:ext cx="1143000" cy="219456"/>
+              <a:srgbClr val="4A3D2C"/>
+            </a:solidFill>
+            <a:prstDash val="solid"/>
+          </a:ln>
+        </p:spPr>
+      </p:sp>
+      <p:sp>
+        <p:nvSpPr>
+          <p:cNvPr id="13" name="Text 11"/>
+          <p:cNvSpPr txBox="1"/>
+          <p:nvPr/>
+        </p:nvSpPr>
+        <p:spPr>
+          <a:xfrm>
+            <a:off x="2880360" y="2660904"/>
+            <a:ext cx="2103120" cy="310896"/>
           </a:xfrm>
           <a:prstGeom prst="rect">
             <a:avLst/>
@@ -16893,15 +17270,183 @@
               <a:buNone/>
             </a:pPr>
             <a:r>
-              <a:rPr lang="en-US" sz="750" b="1" spc="200" kern="0" dirty="0">
-                <a:solidFill>
-                  <a:srgbClr val="E8C290"/>
-                </a:solidFill>
-                <a:latin typeface="Arial" pitchFamily="34" charset="0"/>
-                <a:ea typeface="Arial" pitchFamily="34" charset="-122"/>
-                <a:cs typeface="Arial" pitchFamily="34" charset="-120"/>
-              </a:rPr>
-              <a:t>HYPOTHESIS</a:t>
+              <a:rPr lang="en-US" sz="1100" dirty="0">
+                <a:solidFill>
+                  <a:srgbClr val="F6EFE4"/>
+                </a:solidFill>
+                <a:latin typeface="Arial" pitchFamily="34" charset="0"/>
+                <a:ea typeface="Arial" pitchFamily="34" charset="-122"/>
+                <a:cs typeface="Arial" pitchFamily="34" charset="-120"/>
+              </a:rPr>
+              <a:t>Accept as Jordan Lee  G2</a:t>
+            </a:r>
+            <a:endParaRPr lang="en-US" sz="1100" dirty="0"/>
+          </a:p>
+        </p:txBody>
+      </p:sp>
+      <p:sp>
+        <p:nvSpPr>
+          <p:cNvPr id="14" name="Text 12"/>
+          <p:cNvSpPr txBox="1"/>
+          <p:nvPr/>
+        </p:nvSpPr>
+        <p:spPr>
+          <a:xfrm>
+            <a:off x="5212080" y="2587752"/>
+            <a:ext cx="6293815" cy="457200"/>
+          </a:xfrm>
+          <a:prstGeom prst="rect">
+            <a:avLst/>
+          </a:prstGeom>
+          <a:noFill/>
+          <a:ln/>
+        </p:spPr>
+        <p:txBody>
+          <a:bodyPr wrap="square" lIns="0" tIns="0" rIns="0" bIns="0" rtlCol="0" anchor="ctr"/>
+          <a:lstStyle/>
+          <a:p>
+            <a:pPr indent="0" marL="0">
+              <a:buNone/>
+            </a:pPr>
+            <a:r>
+              <a:rPr lang="en-US" sz="1300" dirty="0">
+                <a:solidFill>
+                  <a:srgbClr val="E4D8C6"/>
+                </a:solidFill>
+                <a:latin typeface="Arial" pitchFamily="34" charset="0"/>
+                <a:ea typeface="Arial" pitchFamily="34" charset="-122"/>
+                <a:cs typeface="Arial" pitchFamily="34" charset="-120"/>
+              </a:rPr>
+              <a:t>Ticket moves to build → agent writes the </a:t>
+            </a:r>
+            <a:pPr indent="0" marL="0">
+              <a:buNone/>
+            </a:pPr>
+            <a:r>
+              <a:rPr lang="en-US" sz="1300" b="1" dirty="0">
+                <a:solidFill>
+                  <a:srgbClr val="FFF6E6"/>
+                </a:solidFill>
+                <a:latin typeface="Arial" pitchFamily="34" charset="0"/>
+                <a:ea typeface="Arial" pitchFamily="34" charset="-122"/>
+                <a:cs typeface="Arial" pitchFamily="34" charset="-120"/>
+              </a:rPr>
+              <a:t>break-even draft</a:t>
+            </a:r>
+            <a:pPr indent="0" marL="0">
+              <a:buNone/>
+            </a:pPr>
+            <a:r>
+              <a:rPr lang="en-US" sz="1300" dirty="0">
+                <a:solidFill>
+                  <a:srgbClr val="E4D8C6"/>
+                </a:solidFill>
+                <a:latin typeface="Arial" pitchFamily="34" charset="0"/>
+                <a:ea typeface="Arial" pitchFamily="34" charset="-122"/>
+                <a:cs typeface="Arial" pitchFamily="34" charset="-120"/>
+              </a:rPr>
+              <a:t> from the client's figures</a:t>
+            </a:r>
+            <a:endParaRPr lang="en-US" sz="1300" dirty="0"/>
+          </a:p>
+        </p:txBody>
+      </p:sp>
+      <p:sp>
+        <p:nvSpPr>
+          <p:cNvPr id="15" name="Shape 13"/>
+          <p:cNvSpPr/>
+          <p:nvPr/>
+        </p:nvSpPr>
+        <p:spPr>
+          <a:xfrm>
+            <a:off x="685800" y="3118104"/>
+            <a:ext cx="10820095" cy="0"/>
+          </a:xfrm>
+          <a:prstGeom prst="line">
+            <a:avLst/>
+          </a:prstGeom>
+          <a:noFill/>
+          <a:ln w="9525">
+            <a:solidFill>
+              <a:srgbClr val="332A1F"/>
+            </a:solidFill>
+            <a:prstDash val="solid"/>
+          </a:ln>
+        </p:spPr>
+      </p:sp>
+      <p:sp>
+        <p:nvSpPr>
+          <p:cNvPr id="16" name="Text 14"/>
+          <p:cNvSpPr txBox="1"/>
+          <p:nvPr/>
+        </p:nvSpPr>
+        <p:spPr>
+          <a:xfrm>
+            <a:off x="685800" y="3163824"/>
+            <a:ext cx="640080" cy="457200"/>
+          </a:xfrm>
+          <a:prstGeom prst="rect">
+            <a:avLst/>
+          </a:prstGeom>
+          <a:noFill/>
+          <a:ln/>
+        </p:spPr>
+        <p:txBody>
+          <a:bodyPr wrap="square" lIns="0" tIns="0" rIns="0" bIns="0" rtlCol="0" anchor="ctr"/>
+          <a:lstStyle/>
+          <a:p>
+            <a:pPr indent="0" marL="0">
+              <a:buNone/>
+            </a:pPr>
+            <a:r>
+              <a:rPr lang="en-US" sz="1200" dirty="0">
+                <a:solidFill>
+                  <a:srgbClr val="B5A186"/>
+                </a:solidFill>
+                <a:latin typeface="Courier New" pitchFamily="34" charset="0"/>
+                <a:ea typeface="Courier New" pitchFamily="34" charset="-122"/>
+                <a:cs typeface="Courier New" pitchFamily="34" charset="-120"/>
+              </a:rPr>
+              <a:t>0:25</a:t>
+            </a:r>
+            <a:endParaRPr lang="en-US" sz="1200" dirty="0"/>
+          </a:p>
+        </p:txBody>
+      </p:sp>
+      <p:sp>
+        <p:nvSpPr>
+          <p:cNvPr id="17" name="Text 15"/>
+          <p:cNvSpPr txBox="1"/>
+          <p:nvPr/>
+        </p:nvSpPr>
+        <p:spPr>
+          <a:xfrm>
+            <a:off x="1371600" y="3163824"/>
+            <a:ext cx="1463040" cy="457200"/>
+          </a:xfrm>
+          <a:prstGeom prst="rect">
+            <a:avLst/>
+          </a:prstGeom>
+          <a:noFill/>
+          <a:ln/>
+        </p:spPr>
+        <p:txBody>
+          <a:bodyPr wrap="square" lIns="0" tIns="0" rIns="0" bIns="0" rtlCol="0" anchor="ctr"/>
+          <a:lstStyle/>
+          <a:p>
+            <a:pPr indent="0" marL="0">
+              <a:buNone/>
+            </a:pPr>
+            <a:r>
+              <a:rPr lang="en-US" sz="750" spc="200" kern="0" dirty="0">
+                <a:solidFill>
+                  <a:srgbClr val="8C7961"/>
+                </a:solidFill>
+                <a:latin typeface="Arial" pitchFamily="34" charset="0"/>
+                <a:ea typeface="Arial" pitchFamily="34" charset="-122"/>
+                <a:cs typeface="Arial" pitchFamily="34" charset="-120"/>
+              </a:rPr>
+              <a:t>JORDAN LEE · DA</a:t>
             </a:r>
             <a:endParaRPr lang="en-US" sz="750" dirty="0"/>
           </a:p>
@@ -16909,219 +17454,360 @@
       </p:sp>
       <p:sp>
         <p:nvSpPr>
-          <p:cNvPr id="13" name="Text 11"/>
-          <p:cNvSpPr txBox="1"/>
-          <p:nvPr/>
-        </p:nvSpPr>
-        <p:spPr>
-          <a:xfrm>
-            <a:off x="4597298" y="2194560"/>
-            <a:ext cx="2997098" cy="822960"/>
-          </a:xfrm>
-          <a:prstGeom prst="rect">
-            <a:avLst/>
-          </a:prstGeom>
-          <a:noFill/>
-          <a:ln/>
-        </p:spPr>
-        <p:txBody>
-          <a:bodyPr wrap="square" lIns="0" tIns="0" rIns="0" bIns="0" rtlCol="0" anchor="ctr"/>
-          <a:lstStyle/>
-          <a:p>
-            <a:pPr indent="0" marL="0">
-              <a:buNone/>
-            </a:pPr>
-            <a:r>
-              <a:rPr lang="en-US" sz="4400" dirty="0">
-                <a:solidFill>
-                  <a:srgbClr val="FFF6E6"/>
-                </a:solidFill>
-                <a:latin typeface="Arial" pitchFamily="34" charset="0"/>
-                <a:ea typeface="Arial" pitchFamily="34" charset="-122"/>
-                <a:cs typeface="Arial" pitchFamily="34" charset="-120"/>
-              </a:rPr>
-              <a:t>$500</a:t>
-            </a:r>
-            <a:pPr indent="0" marL="0">
-              <a:buNone/>
-            </a:pPr>
-            <a:r>
-              <a:rPr lang="en-US" sz="1300" dirty="0">
-                <a:solidFill>
-                  <a:srgbClr val="B5A186"/>
-                </a:solidFill>
-                <a:latin typeface="Arial" pitchFamily="34" charset="0"/>
-                <a:ea typeface="Arial" pitchFamily="34" charset="-122"/>
-                <a:cs typeface="Arial" pitchFamily="34" charset="-120"/>
-              </a:rPr>
-              <a:t>  / month per agency</a:t>
-            </a:r>
-            <a:endParaRPr lang="en-US" sz="4400" dirty="0"/>
-          </a:p>
-        </p:txBody>
-      </p:sp>
-      <p:sp>
-        <p:nvSpPr>
-          <p:cNvPr id="14" name="Text 12"/>
-          <p:cNvSpPr txBox="1"/>
-          <p:nvPr/>
-        </p:nvSpPr>
-        <p:spPr>
-          <a:xfrm>
-            <a:off x="4597298" y="3063240"/>
-            <a:ext cx="2997098" cy="1554480"/>
-          </a:xfrm>
-          <a:prstGeom prst="rect">
-            <a:avLst/>
-          </a:prstGeom>
-          <a:noFill/>
-          <a:ln/>
-        </p:spPr>
-        <p:txBody>
-          <a:bodyPr wrap="square" lIns="0" tIns="0" rIns="0" bIns="0" rtlCol="0" anchor="t"/>
-          <a:lstStyle/>
-          <a:p>
-            <a:pPr indent="0" marL="0">
-              <a:buNone/>
-            </a:pPr>
-            <a:r>
-              <a:rPr lang="en-US" sz="1200" dirty="0">
-                <a:solidFill>
-                  <a:srgbClr val="E4D8C6"/>
-                </a:solidFill>
-                <a:latin typeface="Arial" pitchFamily="34" charset="0"/>
-                <a:ea typeface="Arial" pitchFamily="34" charset="-122"/>
-                <a:cs typeface="Arial" pitchFamily="34" charset="-120"/>
-              </a:rPr>
-              <a:t>up to 20 active clients; the box bought or leased.
-</a:t>
-            </a:r>
-            <a:pPr indent="0" marL="0">
-              <a:buNone/>
-            </a:pPr>
-            <a:r>
-              <a:rPr lang="en-US" sz="1200" b="1" dirty="0">
-                <a:solidFill>
-                  <a:srgbClr val="FFF6E6"/>
-                </a:solidFill>
-                <a:latin typeface="Arial" pitchFamily="34" charset="0"/>
-                <a:ea typeface="Arial" pitchFamily="34" charset="-122"/>
-                <a:cs typeface="Arial" pitchFamily="34" charset="-120"/>
-              </a:rPr>
-              <a:t>12 h × $100/h ≈ $1,200</a:t>
-            </a:r>
-            <a:pPr indent="0" marL="0">
-              <a:buNone/>
-            </a:pPr>
-            <a:r>
-              <a:rPr lang="en-US" sz="1200" dirty="0">
-                <a:solidFill>
-                  <a:srgbClr val="E4D8C6"/>
-                </a:solidFill>
-                <a:latin typeface="Arial" pitchFamily="34" charset="0"/>
-                <a:ea typeface="Arial" pitchFamily="34" charset="-122"/>
-                <a:cs typeface="Arial" pitchFamily="34" charset="-120"/>
-              </a:rPr>
-              <a:t> saved per onboarding. Two a year cover it. Fixed box, not a token bill.</a:t>
-            </a:r>
-            <a:endParaRPr lang="en-US" sz="1200" dirty="0"/>
-          </a:p>
-        </p:txBody>
-      </p:sp>
-      <p:sp>
-        <p:nvSpPr>
-          <p:cNvPr id="15" name="Shape 13"/>
-          <p:cNvSpPr/>
-          <p:nvPr/>
-        </p:nvSpPr>
-        <p:spPr>
-          <a:xfrm>
-            <a:off x="8051597" y="1691640"/>
-            <a:ext cx="3454298" cy="3108960"/>
+          <p:cNvPr id="18" name="Shape 16"/>
+          <p:cNvSpPr/>
+          <p:nvPr/>
+        </p:nvSpPr>
+        <p:spPr>
+          <a:xfrm>
+            <a:off x="2880360" y="3236976"/>
+            <a:ext cx="2103120" cy="310896"/>
           </a:xfrm>
           <a:prstGeom prst="roundRect">
             <a:avLst>
-              <a:gd name="adj" fmla="val 3529"/>
+              <a:gd name="adj" fmla="val 50000"/>
             </a:avLst>
           </a:prstGeom>
           <a:solidFill>
-            <a:srgbClr val="1F1610"/>
+            <a:srgbClr val="281D15"/>
           </a:solidFill>
           <a:ln w="9525">
             <a:solidFill>
+              <a:srgbClr val="4A3D2C"/>
+            </a:solidFill>
+            <a:prstDash val="solid"/>
+          </a:ln>
+        </p:spPr>
+      </p:sp>
+      <p:sp>
+        <p:nvSpPr>
+          <p:cNvPr id="19" name="Text 17"/>
+          <p:cNvSpPr txBox="1"/>
+          <p:nvPr/>
+        </p:nvSpPr>
+        <p:spPr>
+          <a:xfrm>
+            <a:off x="2880360" y="3236976"/>
+            <a:ext cx="2103120" cy="310896"/>
+          </a:xfrm>
+          <a:prstGeom prst="rect">
+            <a:avLst/>
+          </a:prstGeom>
+          <a:noFill/>
+          <a:ln/>
+        </p:spPr>
+        <p:txBody>
+          <a:bodyPr wrap="square" lIns="0" tIns="0" rIns="0" bIns="0" rtlCol="0" anchor="ctr"/>
+          <a:lstStyle/>
+          <a:p>
+            <a:pPr algn="ctr" indent="0" marL="0">
+              <a:buNone/>
+            </a:pPr>
+            <a:r>
+              <a:rPr lang="en-US" sz="1100" dirty="0">
+                <a:solidFill>
+                  <a:srgbClr val="F6EFE4"/>
+                </a:solidFill>
+                <a:latin typeface="Arial" pitchFamily="34" charset="0"/>
+                <a:ea typeface="Arial" pitchFamily="34" charset="-122"/>
+                <a:cs typeface="Arial" pitchFamily="34" charset="-120"/>
+              </a:rPr>
+              <a:t>Submit for review</a:t>
+            </a:r>
+            <a:endParaRPr lang="en-US" sz="1100" dirty="0"/>
+          </a:p>
+        </p:txBody>
+      </p:sp>
+      <p:sp>
+        <p:nvSpPr>
+          <p:cNvPr id="20" name="Text 18"/>
+          <p:cNvSpPr txBox="1"/>
+          <p:nvPr/>
+        </p:nvSpPr>
+        <p:spPr>
+          <a:xfrm>
+            <a:off x="5212080" y="3163824"/>
+            <a:ext cx="6293815" cy="457200"/>
+          </a:xfrm>
+          <a:prstGeom prst="rect">
+            <a:avLst/>
+          </a:prstGeom>
+          <a:noFill/>
+          <a:ln/>
+        </p:spPr>
+        <p:txBody>
+          <a:bodyPr wrap="square" lIns="0" tIns="0" rIns="0" bIns="0" rtlCol="0" anchor="ctr"/>
+          <a:lstStyle/>
+          <a:p>
+            <a:pPr indent="0" marL="0">
+              <a:buNone/>
+            </a:pPr>
+            <a:r>
+              <a:rPr lang="en-US" sz="1300" dirty="0">
+                <a:solidFill>
+                  <a:srgbClr val="E4D8C6"/>
+                </a:solidFill>
+                <a:latin typeface="Arial" pitchFamily="34" charset="0"/>
+                <a:ea typeface="Arial" pitchFamily="34" charset="-122"/>
+                <a:cs typeface="Arial" pitchFamily="34" charset="-120"/>
+              </a:rPr>
+              <a:t>Agent pre-checks every criterion → </a:t>
+            </a:r>
+            <a:pPr indent="0" marL="0">
+              <a:buNone/>
+            </a:pPr>
+            <a:r>
+              <a:rPr lang="en-US" sz="1300" dirty="0">
+                <a:solidFill>
+                  <a:srgbClr val="8FD6A8"/>
+                </a:solidFill>
+                <a:latin typeface="Arial" pitchFamily="34" charset="0"/>
+                <a:ea typeface="Arial" pitchFamily="34" charset="-122"/>
+                <a:cs typeface="Arial" pitchFamily="34" charset="-120"/>
+              </a:rPr>
+              <a:t>traceability: every number traces or is ≈</a:t>
+            </a:r>
+            <a:endParaRPr lang="en-US" sz="1300" dirty="0"/>
+          </a:p>
+        </p:txBody>
+      </p:sp>
+      <p:sp>
+        <p:nvSpPr>
+          <p:cNvPr id="21" name="Shape 19"/>
+          <p:cNvSpPr/>
+          <p:nvPr/>
+        </p:nvSpPr>
+        <p:spPr>
+          <a:xfrm>
+            <a:off x="685800" y="3694176"/>
+            <a:ext cx="10820095" cy="0"/>
+          </a:xfrm>
+          <a:prstGeom prst="line">
+            <a:avLst/>
+          </a:prstGeom>
+          <a:noFill/>
+          <a:ln w="9525">
+            <a:solidFill>
               <a:srgbClr val="332A1F"/>
             </a:solidFill>
             <a:prstDash val="solid"/>
           </a:ln>
-          <a:effectLst>
-            <a:outerShdw sx="100000" sy="100000" kx="0" ky="0" algn="bl" rotWithShape="0" blurRad="152400" dist="50800" dir="5400000">
-              <a:srgbClr val="000000">
-                <a:alpha val="35000"/>
-              </a:srgbClr>
-            </a:outerShdw>
-          </a:effectLst>
-        </p:spPr>
-      </p:sp>
-      <p:sp>
-        <p:nvSpPr>
-          <p:cNvPr id="16" name="Text 14"/>
-          <p:cNvSpPr txBox="1"/>
-          <p:nvPr/>
-        </p:nvSpPr>
-        <p:spPr>
-          <a:xfrm>
-            <a:off x="8280197" y="1874520"/>
-            <a:ext cx="2743200" cy="228600"/>
-          </a:xfrm>
-          <a:prstGeom prst="rect">
-            <a:avLst/>
-          </a:prstGeom>
-          <a:noFill/>
-          <a:ln/>
-        </p:spPr>
-        <p:txBody>
-          <a:bodyPr wrap="square" lIns="0" tIns="0" rIns="0" bIns="0" rtlCol="0" anchor="t"/>
-          <a:lstStyle/>
-          <a:p>
-            <a:pPr indent="0" marL="0">
-              <a:buNone/>
-            </a:pPr>
-            <a:r>
-              <a:rPr lang="en-US" sz="850" b="1" spc="400" kern="0" dirty="0">
-                <a:solidFill>
-                  <a:srgbClr val="E8C290"/>
-                </a:solidFill>
-                <a:latin typeface="Arial" pitchFamily="34" charset="0"/>
-                <a:ea typeface="Arial" pitchFamily="34" charset="-122"/>
-                <a:cs typeface="Arial" pitchFamily="34" charset="-120"/>
-              </a:rPr>
-              <a:t>WEDGE → EXPANSION</a:t>
-            </a:r>
-            <a:endParaRPr lang="en-US" sz="850" dirty="0"/>
-          </a:p>
-        </p:txBody>
-      </p:sp>
-      <p:sp>
-        <p:nvSpPr>
-          <p:cNvPr id="17" name="Shape 15"/>
-          <p:cNvSpPr/>
-          <p:nvPr/>
-        </p:nvSpPr>
-        <p:spPr>
-          <a:xfrm>
-            <a:off x="8280197" y="2240280"/>
-            <a:ext cx="2997098" cy="713232"/>
+        </p:spPr>
+      </p:sp>
+      <p:sp>
+        <p:nvSpPr>
+          <p:cNvPr id="22" name="Text 20"/>
+          <p:cNvSpPr txBox="1"/>
+          <p:nvPr/>
+        </p:nvSpPr>
+        <p:spPr>
+          <a:xfrm>
+            <a:off x="685800" y="3739896"/>
+            <a:ext cx="640080" cy="457200"/>
+          </a:xfrm>
+          <a:prstGeom prst="rect">
+            <a:avLst/>
+          </a:prstGeom>
+          <a:noFill/>
+          <a:ln/>
+        </p:spPr>
+        <p:txBody>
+          <a:bodyPr wrap="square" lIns="0" tIns="0" rIns="0" bIns="0" rtlCol="0" anchor="ctr"/>
+          <a:lstStyle/>
+          <a:p>
+            <a:pPr indent="0" marL="0">
+              <a:buNone/>
+            </a:pPr>
+            <a:r>
+              <a:rPr lang="en-US" sz="1200" dirty="0">
+                <a:solidFill>
+                  <a:srgbClr val="B5A186"/>
+                </a:solidFill>
+                <a:latin typeface="Courier New" pitchFamily="34" charset="0"/>
+                <a:ea typeface="Courier New" pitchFamily="34" charset="-122"/>
+                <a:cs typeface="Courier New" pitchFamily="34" charset="-120"/>
+              </a:rPr>
+              <a:t>0:35</a:t>
+            </a:r>
+            <a:endParaRPr lang="en-US" sz="1200" dirty="0"/>
+          </a:p>
+        </p:txBody>
+      </p:sp>
+      <p:sp>
+        <p:nvSpPr>
+          <p:cNvPr id="23" name="Text 21"/>
+          <p:cNvSpPr txBox="1"/>
+          <p:nvPr/>
+        </p:nvSpPr>
+        <p:spPr>
+          <a:xfrm>
+            <a:off x="1371600" y="3739896"/>
+            <a:ext cx="1463040" cy="457200"/>
+          </a:xfrm>
+          <a:prstGeom prst="rect">
+            <a:avLst/>
+          </a:prstGeom>
+          <a:noFill/>
+          <a:ln/>
+        </p:spPr>
+        <p:txBody>
+          <a:bodyPr wrap="square" lIns="0" tIns="0" rIns="0" bIns="0" rtlCol="0" anchor="ctr"/>
+          <a:lstStyle/>
+          <a:p>
+            <a:pPr indent="0" marL="0">
+              <a:buNone/>
+            </a:pPr>
+            <a:r>
+              <a:rPr lang="en-US" sz="750" spc="200" kern="0" dirty="0">
+                <a:solidFill>
+                  <a:srgbClr val="8C7961"/>
+                </a:solidFill>
+                <a:latin typeface="Arial" pitchFamily="34" charset="0"/>
+                <a:ea typeface="Arial" pitchFamily="34" charset="-122"/>
+                <a:cs typeface="Arial" pitchFamily="34" charset="-120"/>
+              </a:rPr>
+              <a:t>JORDAN LEE · DA</a:t>
+            </a:r>
+            <a:endParaRPr lang="en-US" sz="750" dirty="0"/>
+          </a:p>
+        </p:txBody>
+      </p:sp>
+      <p:sp>
+        <p:nvSpPr>
+          <p:cNvPr id="24" name="Shape 22"/>
+          <p:cNvSpPr/>
+          <p:nvPr/>
+        </p:nvSpPr>
+        <p:spPr>
+          <a:xfrm>
+            <a:off x="2880360" y="3813048"/>
+            <a:ext cx="2103120" cy="310896"/>
           </a:xfrm>
           <a:prstGeom prst="roundRect">
             <a:avLst>
-              <a:gd name="adj" fmla="val 10256"/>
+              <a:gd name="adj" fmla="val 50000"/>
             </a:avLst>
           </a:prstGeom>
           <a:solidFill>
-            <a:srgbClr val="281D15"/>
+            <a:srgbClr val="3A1A14"/>
           </a:solidFill>
           <a:ln w="9525">
             <a:solidFill>
+              <a:srgbClr val="F0A497"/>
+            </a:solidFill>
+            <a:prstDash val="solid"/>
+          </a:ln>
+        </p:spPr>
+      </p:sp>
+      <p:sp>
+        <p:nvSpPr>
+          <p:cNvPr id="25" name="Text 23"/>
+          <p:cNvSpPr txBox="1"/>
+          <p:nvPr/>
+        </p:nvSpPr>
+        <p:spPr>
+          <a:xfrm>
+            <a:off x="2880360" y="3813048"/>
+            <a:ext cx="2103120" cy="310896"/>
+          </a:xfrm>
+          <a:prstGeom prst="rect">
+            <a:avLst/>
+          </a:prstGeom>
+          <a:noFill/>
+          <a:ln/>
+        </p:spPr>
+        <p:txBody>
+          <a:bodyPr wrap="square" lIns="0" tIns="0" rIns="0" bIns="0" rtlCol="0" anchor="ctr"/>
+          <a:lstStyle/>
+          <a:p>
+            <a:pPr algn="ctr" indent="0" marL="0">
+              <a:buNone/>
+            </a:pPr>
+            <a:r>
+              <a:rPr lang="en-US" sz="1100" dirty="0">
+                <a:solidFill>
+                  <a:srgbClr val="F0A497"/>
+                </a:solidFill>
+                <a:latin typeface="Arial" pitchFamily="34" charset="0"/>
+                <a:ea typeface="Arial" pitchFamily="34" charset="-122"/>
+                <a:cs typeface="Arial" pitchFamily="34" charset="-120"/>
+              </a:rPr>
+              <a:t>Approve  G3</a:t>
+            </a:r>
+            <a:endParaRPr lang="en-US" sz="1100" dirty="0"/>
+          </a:p>
+        </p:txBody>
+      </p:sp>
+      <p:sp>
+        <p:nvSpPr>
+          <p:cNvPr id="26" name="Text 24"/>
+          <p:cNvSpPr txBox="1"/>
+          <p:nvPr/>
+        </p:nvSpPr>
+        <p:spPr>
+          <a:xfrm>
+            <a:off x="5212080" y="3739896"/>
+            <a:ext cx="6293815" cy="457200"/>
+          </a:xfrm>
+          <a:prstGeom prst="rect">
+            <a:avLst/>
+          </a:prstGeom>
+          <a:noFill/>
+          <a:ln/>
+        </p:spPr>
+        <p:txBody>
+          <a:bodyPr wrap="square" lIns="0" tIns="0" rIns="0" bIns="0" rtlCol="0" anchor="ctr"/>
+          <a:lstStyle/>
+          <a:p>
+            <a:pPr indent="0" marL="0">
+              <a:buNone/>
+            </a:pPr>
+            <a:r>
+              <a:rPr lang="en-US" sz="1300" b="1" dirty="0">
+                <a:solidFill>
+                  <a:srgbClr val="F0A497"/>
+                </a:solidFill>
+                <a:latin typeface="Arial" pitchFamily="34" charset="0"/>
+                <a:ea typeface="Arial" pitchFamily="34" charset="-122"/>
+                <a:cs typeface="Arial" pitchFamily="34" charset="-120"/>
+              </a:rPr>
+              <a:t>409</a:t>
+            </a:r>
+            <a:pPr indent="0" marL="0">
+              <a:buNone/>
+            </a:pPr>
+            <a:r>
+              <a:rPr lang="en-US" sz="1300" dirty="0">
+                <a:solidFill>
+                  <a:srgbClr val="E4D8C6"/>
+                </a:solidFill>
+                <a:latin typeface="Arial" pitchFamily="34" charset="0"/>
+                <a:ea typeface="Arial" pitchFamily="34" charset="-122"/>
+                <a:cs typeface="Arial" pitchFamily="34" charset="-120"/>
+              </a:rPr>
+              <a:t> — The reviewer must differ from the builder.</a:t>
+            </a:r>
+            <a:endParaRPr lang="en-US" sz="1300" dirty="0"/>
+          </a:p>
+        </p:txBody>
+      </p:sp>
+      <p:sp>
+        <p:nvSpPr>
+          <p:cNvPr id="27" name="Shape 25"/>
+          <p:cNvSpPr/>
+          <p:nvPr/>
+        </p:nvSpPr>
+        <p:spPr>
+          <a:xfrm>
+            <a:off x="685800" y="4270248"/>
+            <a:ext cx="10820095" cy="0"/>
+          </a:xfrm>
+          <a:prstGeom prst="line">
+            <a:avLst/>
+          </a:prstGeom>
+          <a:noFill/>
+          <a:ln w="9525">
+            <a:solidFill>
               <a:srgbClr val="332A1F"/>
             </a:solidFill>
             <a:prstDash val="solid"/>
@@ -17130,14 +17816,14 @@
       </p:sp>
       <p:sp>
         <p:nvSpPr>
-          <p:cNvPr id="18" name="Text 16"/>
-          <p:cNvSpPr txBox="1"/>
-          <p:nvPr/>
-        </p:nvSpPr>
-        <p:spPr>
-          <a:xfrm>
-            <a:off x="8417357" y="2240280"/>
-            <a:ext cx="2722778" cy="713232"/>
+          <p:cNvPr id="28" name="Text 26"/>
+          <p:cNvSpPr txBox="1"/>
+          <p:nvPr/>
+        </p:nvSpPr>
+        <p:spPr>
+          <a:xfrm>
+            <a:off x="685800" y="4315968"/>
+            <a:ext cx="640080" cy="457200"/>
           </a:xfrm>
           <a:prstGeom prst="rect">
             <a:avLst/>
@@ -17153,61 +17839,209 @@
               <a:buNone/>
             </a:pPr>
             <a:r>
-              <a:rPr lang="en-US" sz="1200" b="1" dirty="0">
-                <a:solidFill>
-                  <a:srgbClr val="FFF6E6"/>
-                </a:solidFill>
-                <a:latin typeface="Arial" pitchFamily="34" charset="0"/>
-                <a:ea typeface="Arial" pitchFamily="34" charset="-122"/>
-                <a:cs typeface="Arial" pitchFamily="34" charset="-120"/>
-              </a:rPr>
-              <a:t>One link.</a:t>
-            </a:r>
-            <a:pPr indent="0" marL="0">
-              <a:buNone/>
-            </a:pPr>
+              <a:rPr lang="en-US" sz="1200" dirty="0">
+                <a:solidFill>
+                  <a:srgbClr val="B5A186"/>
+                </a:solidFill>
+                <a:latin typeface="Courier New" pitchFamily="34" charset="0"/>
+                <a:ea typeface="Courier New" pitchFamily="34" charset="-122"/>
+                <a:cs typeface="Courier New" pitchFamily="34" charset="-120"/>
+              </a:rPr>
+              <a:t>0:42</a:t>
+            </a:r>
             <a:endParaRPr lang="en-US" sz="1200" dirty="0"/>
           </a:p>
-          <a:p>
-            <a:pPr indent="0" marL="0">
-              <a:buNone/>
-            </a:pPr>
-            <a:r>
-              <a:rPr lang="en-US" sz="1050" dirty="0">
-                <a:solidFill>
-                  <a:srgbClr val="E4D8C6"/>
-                </a:solidFill>
-                <a:latin typeface="Arial" pitchFamily="34" charset="0"/>
-                <a:ea typeface="Arial" pitchFamily="34" charset="-122"/>
-                <a:cs typeface="Arial" pitchFamily="34" charset="-120"/>
-              </a:rPr>
-              <a:t>The client's AI answers; an hour later: BRD, gap list, break-even table. Sells on its own.</a:t>
-            </a:r>
-            <a:endParaRPr lang="en-US" sz="1200" dirty="0"/>
-          </a:p>
-        </p:txBody>
-      </p:sp>
-      <p:sp>
-        <p:nvSpPr>
-          <p:cNvPr id="19" name="Shape 17"/>
-          <p:cNvSpPr/>
-          <p:nvPr/>
-        </p:nvSpPr>
-        <p:spPr>
-          <a:xfrm>
-            <a:off x="8280197" y="3063240"/>
-            <a:ext cx="2997098" cy="713232"/>
+        </p:txBody>
+      </p:sp>
+      <p:sp>
+        <p:nvSpPr>
+          <p:cNvPr id="29" name="Text 27"/>
+          <p:cNvSpPr txBox="1"/>
+          <p:nvPr/>
+        </p:nvSpPr>
+        <p:spPr>
+          <a:xfrm>
+            <a:off x="1371600" y="4315968"/>
+            <a:ext cx="1463040" cy="457200"/>
+          </a:xfrm>
+          <a:prstGeom prst="rect">
+            <a:avLst/>
+          </a:prstGeom>
+          <a:noFill/>
+          <a:ln/>
+        </p:spPr>
+        <p:txBody>
+          <a:bodyPr wrap="square" lIns="0" tIns="0" rIns="0" bIns="0" rtlCol="0" anchor="ctr"/>
+          <a:lstStyle/>
+          <a:p>
+            <a:pPr indent="0" marL="0">
+              <a:buNone/>
+            </a:pPr>
+            <a:r>
+              <a:rPr lang="en-US" sz="750" spc="200" kern="0" dirty="0">
+                <a:solidFill>
+                  <a:srgbClr val="8C7961"/>
+                </a:solidFill>
+                <a:latin typeface="Arial" pitchFamily="34" charset="0"/>
+                <a:ea typeface="Arial" pitchFamily="34" charset="-122"/>
+                <a:cs typeface="Arial" pitchFamily="34" charset="-120"/>
+              </a:rPr>
+              <a:t>MORGAN DIAZ · DA</a:t>
+            </a:r>
+            <a:endParaRPr lang="en-US" sz="750" dirty="0"/>
+          </a:p>
+        </p:txBody>
+      </p:sp>
+      <p:sp>
+        <p:nvSpPr>
+          <p:cNvPr id="30" name="Shape 28"/>
+          <p:cNvSpPr/>
+          <p:nvPr/>
+        </p:nvSpPr>
+        <p:spPr>
+          <a:xfrm>
+            <a:off x="2880360" y="4389120"/>
+            <a:ext cx="2103120" cy="310896"/>
           </a:xfrm>
           <a:prstGeom prst="roundRect">
             <a:avLst>
-              <a:gd name="adj" fmla="val 10256"/>
+              <a:gd name="adj" fmla="val 50000"/>
             </a:avLst>
           </a:prstGeom>
           <a:solidFill>
-            <a:srgbClr val="281D15"/>
+            <a:srgbClr val="F3D9A4"/>
           </a:solidFill>
           <a:ln w="9525">
             <a:solidFill>
+              <a:srgbClr val="F3D9A4"/>
+            </a:solidFill>
+            <a:prstDash val="solid"/>
+          </a:ln>
+        </p:spPr>
+      </p:sp>
+      <p:sp>
+        <p:nvSpPr>
+          <p:cNvPr id="31" name="Text 29"/>
+          <p:cNvSpPr txBox="1"/>
+          <p:nvPr/>
+        </p:nvSpPr>
+        <p:spPr>
+          <a:xfrm>
+            <a:off x="2880360" y="4389120"/>
+            <a:ext cx="2103120" cy="310896"/>
+          </a:xfrm>
+          <a:prstGeom prst="rect">
+            <a:avLst/>
+          </a:prstGeom>
+          <a:noFill/>
+          <a:ln/>
+        </p:spPr>
+        <p:txBody>
+          <a:bodyPr wrap="square" lIns="0" tIns="0" rIns="0" bIns="0" rtlCol="0" anchor="ctr"/>
+          <a:lstStyle/>
+          <a:p>
+            <a:pPr algn="ctr" indent="0" marL="0">
+              <a:buNone/>
+            </a:pPr>
+            <a:r>
+              <a:rPr lang="en-US" sz="1100" b="1" dirty="0">
+                <a:solidFill>
+                  <a:srgbClr val="2A1B0C"/>
+                </a:solidFill>
+                <a:latin typeface="Arial" pitchFamily="34" charset="0"/>
+                <a:ea typeface="Arial" pitchFamily="34" charset="-122"/>
+                <a:cs typeface="Arial" pitchFamily="34" charset="-120"/>
+              </a:rPr>
+              <a:t>Approve  G3</a:t>
+            </a:r>
+            <a:endParaRPr lang="en-US" sz="1100" dirty="0"/>
+          </a:p>
+        </p:txBody>
+      </p:sp>
+      <p:sp>
+        <p:nvSpPr>
+          <p:cNvPr id="32" name="Text 30"/>
+          <p:cNvSpPr txBox="1"/>
+          <p:nvPr/>
+        </p:nvSpPr>
+        <p:spPr>
+          <a:xfrm>
+            <a:off x="5212080" y="4315968"/>
+            <a:ext cx="6293815" cy="457200"/>
+          </a:xfrm>
+          <a:prstGeom prst="rect">
+            <a:avLst/>
+          </a:prstGeom>
+          <a:noFill/>
+          <a:ln/>
+        </p:spPr>
+        <p:txBody>
+          <a:bodyPr wrap="square" lIns="0" tIns="0" rIns="0" bIns="0" rtlCol="0" anchor="ctr"/>
+          <a:lstStyle/>
+          <a:p>
+            <a:pPr indent="0" marL="0">
+              <a:buNone/>
+            </a:pPr>
+            <a:r>
+              <a:rPr lang="en-US" sz="1300" dirty="0">
+                <a:solidFill>
+                  <a:srgbClr val="E4D8C6"/>
+                </a:solidFill>
+                <a:latin typeface="Arial" pitchFamily="34" charset="0"/>
+                <a:ea typeface="Arial" pitchFamily="34" charset="-122"/>
+                <a:cs typeface="Arial" pitchFamily="34" charset="-120"/>
+              </a:rPr>
+              <a:t>Approved by a </a:t>
+            </a:r>
+            <a:pPr indent="0" marL="0">
+              <a:buNone/>
+            </a:pPr>
+            <a:r>
+              <a:rPr lang="en-US" sz="1300" b="1" dirty="0">
+                <a:solidFill>
+                  <a:srgbClr val="FFF6E6"/>
+                </a:solidFill>
+                <a:latin typeface="Arial" pitchFamily="34" charset="0"/>
+                <a:ea typeface="Arial" pitchFamily="34" charset="-122"/>
+                <a:cs typeface="Arial" pitchFamily="34" charset="-120"/>
+              </a:rPr>
+              <a:t>different person</a:t>
+            </a:r>
+            <a:pPr indent="0" marL="0">
+              <a:buNone/>
+            </a:pPr>
+            <a:r>
+              <a:rPr lang="en-US" sz="1300" dirty="0">
+                <a:solidFill>
+                  <a:srgbClr val="E4D8C6"/>
+                </a:solidFill>
+                <a:latin typeface="Arial" pitchFamily="34" charset="0"/>
+                <a:ea typeface="Arial" pitchFamily="34" charset="-122"/>
+                <a:cs typeface="Arial" pitchFamily="34" charset="-120"/>
+              </a:rPr>
+              <a:t> in the role</a:t>
+            </a:r>
+            <a:endParaRPr lang="en-US" sz="1300" dirty="0"/>
+          </a:p>
+        </p:txBody>
+      </p:sp>
+      <p:sp>
+        <p:nvSpPr>
+          <p:cNvPr id="33" name="Shape 31"/>
+          <p:cNvSpPr/>
+          <p:nvPr/>
+        </p:nvSpPr>
+        <p:spPr>
+          <a:xfrm>
+            <a:off x="685800" y="4846320"/>
+            <a:ext cx="10820095" cy="0"/>
+          </a:xfrm>
+          <a:prstGeom prst="line">
+            <a:avLst/>
+          </a:prstGeom>
+          <a:noFill/>
+          <a:ln w="9525">
+            <a:solidFill>
               <a:srgbClr val="332A1F"/>
             </a:solidFill>
             <a:prstDash val="solid"/>
@@ -17216,14 +18050,14 @@
       </p:sp>
       <p:sp>
         <p:nvSpPr>
-          <p:cNvPr id="20" name="Text 18"/>
-          <p:cNvSpPr txBox="1"/>
-          <p:nvPr/>
-        </p:nvSpPr>
-        <p:spPr>
-          <a:xfrm>
-            <a:off x="8417357" y="3063240"/>
-            <a:ext cx="2722778" cy="713232"/>
+          <p:cNvPr id="34" name="Text 32"/>
+          <p:cNvSpPr txBox="1"/>
+          <p:nvPr/>
+        </p:nvSpPr>
+        <p:spPr>
+          <a:xfrm>
+            <a:off x="685800" y="4892040"/>
+            <a:ext cx="640080" cy="457200"/>
           </a:xfrm>
           <a:prstGeom prst="rect">
             <a:avLst/>
@@ -17239,50 +18073,30 @@
               <a:buNone/>
             </a:pPr>
             <a:r>
-              <a:rPr lang="en-US" sz="1200" b="1" dirty="0">
-                <a:solidFill>
-                  <a:srgbClr val="FFF6E6"/>
-                </a:solidFill>
-                <a:latin typeface="Arial" pitchFamily="34" charset="0"/>
-                <a:ea typeface="Arial" pitchFamily="34" charset="-122"/>
-                <a:cs typeface="Arial" pitchFamily="34" charset="-120"/>
-              </a:rPr>
-              <a:t>SDLC makes it recurring.</a:t>
-            </a:r>
-            <a:pPr indent="0" marL="0">
-              <a:buNone/>
-            </a:pPr>
+              <a:rPr lang="en-US" sz="1200" dirty="0">
+                <a:solidFill>
+                  <a:srgbClr val="B5A186"/>
+                </a:solidFill>
+                <a:latin typeface="Courier New" pitchFamily="34" charset="0"/>
+                <a:ea typeface="Courier New" pitchFamily="34" charset="-122"/>
+                <a:cs typeface="Courier New" pitchFamily="34" charset="-120"/>
+              </a:rPr>
+              <a:t>0:50</a:t>
+            </a:r>
             <a:endParaRPr lang="en-US" sz="1200" dirty="0"/>
           </a:p>
-          <a:p>
-            <a:pPr indent="0" marL="0">
-              <a:buNone/>
-            </a:pPr>
-            <a:r>
-              <a:rPr lang="en-US" sz="1050" dirty="0">
-                <a:solidFill>
-                  <a:srgbClr val="E4D8C6"/>
-                </a:solidFill>
-                <a:latin typeface="Arial" pitchFamily="34" charset="0"/>
-                <a:ea typeface="Arial" pitchFamily="34" charset="-122"/>
-                <a:cs typeface="Arial" pitchFamily="34" charset="-120"/>
-              </a:rPr>
-              <a:t>Specs, tickets, gated delivery, client updates for the life of the account.</a:t>
-            </a:r>
-            <a:endParaRPr lang="en-US" sz="1200" dirty="0"/>
-          </a:p>
-        </p:txBody>
-      </p:sp>
-      <p:sp>
-        <p:nvSpPr>
-          <p:cNvPr id="21" name="Text 19"/>
-          <p:cNvSpPr txBox="1"/>
-          <p:nvPr/>
-        </p:nvSpPr>
-        <p:spPr>
-          <a:xfrm>
-            <a:off x="8325917" y="2880360"/>
-            <a:ext cx="274320" cy="182880"/>
+        </p:txBody>
+      </p:sp>
+      <p:sp>
+        <p:nvSpPr>
+          <p:cNvPr id="35" name="Text 33"/>
+          <p:cNvSpPr txBox="1"/>
+          <p:nvPr/>
+        </p:nvSpPr>
+        <p:spPr>
+          <a:xfrm>
+            <a:off x="1371600" y="4892040"/>
+            <a:ext cx="1463040" cy="457200"/>
           </a:xfrm>
           <a:prstGeom prst="rect">
             <a:avLst/>
@@ -17298,41 +18112,170 @@
               <a:buNone/>
             </a:pPr>
             <a:r>
-              <a:rPr lang="en-US" sz="1000" dirty="0">
-                <a:solidFill>
-                  <a:srgbClr val="C9955A"/>
-                </a:solidFill>
-                <a:latin typeface="Arial" pitchFamily="34" charset="0"/>
-                <a:ea typeface="Arial" pitchFamily="34" charset="-122"/>
-                <a:cs typeface="Arial" pitchFamily="34" charset="-120"/>
-              </a:rPr>
-              <a:t>↓</a:t>
-            </a:r>
-            <a:endParaRPr lang="en-US" sz="1000" dirty="0"/>
-          </a:p>
-        </p:txBody>
-      </p:sp>
-      <p:sp>
-        <p:nvSpPr>
-          <p:cNvPr id="22" name="Shape 20"/>
-          <p:cNvSpPr/>
-          <p:nvPr/>
-        </p:nvSpPr>
-        <p:spPr>
-          <a:xfrm>
-            <a:off x="8280197" y="3886200"/>
-            <a:ext cx="2997098" cy="713232"/>
+              <a:rPr lang="en-US" sz="750" spc="200" kern="0" dirty="0">
+                <a:solidFill>
+                  <a:srgbClr val="8C7961"/>
+                </a:solidFill>
+                <a:latin typeface="Arial" pitchFamily="34" charset="0"/>
+                <a:ea typeface="Arial" pitchFamily="34" charset="-122"/>
+                <a:cs typeface="Arial" pitchFamily="34" charset="-120"/>
+              </a:rPr>
+              <a:t>AVERY PARK · OWNER</a:t>
+            </a:r>
+            <a:endParaRPr lang="en-US" sz="750" dirty="0"/>
+          </a:p>
+        </p:txBody>
+      </p:sp>
+      <p:sp>
+        <p:nvSpPr>
+          <p:cNvPr id="36" name="Shape 34"/>
+          <p:cNvSpPr/>
+          <p:nvPr/>
+        </p:nvSpPr>
+        <p:spPr>
+          <a:xfrm>
+            <a:off x="2880360" y="4965192"/>
+            <a:ext cx="2103120" cy="310896"/>
           </a:xfrm>
           <a:prstGeom prst="roundRect">
             <a:avLst>
-              <a:gd name="adj" fmla="val 10256"/>
+              <a:gd name="adj" fmla="val 50000"/>
             </a:avLst>
           </a:prstGeom>
           <a:solidFill>
-            <a:srgbClr val="281D15"/>
+            <a:srgbClr val="F3D9A4"/>
           </a:solidFill>
           <a:ln w="9525">
             <a:solidFill>
+              <a:srgbClr val="F3D9A4"/>
+            </a:solidFill>
+            <a:prstDash val="solid"/>
+          </a:ln>
+        </p:spPr>
+      </p:sp>
+      <p:sp>
+        <p:nvSpPr>
+          <p:cNvPr id="37" name="Text 35"/>
+          <p:cNvSpPr txBox="1"/>
+          <p:nvPr/>
+        </p:nvSpPr>
+        <p:spPr>
+          <a:xfrm>
+            <a:off x="2880360" y="4965192"/>
+            <a:ext cx="2103120" cy="310896"/>
+          </a:xfrm>
+          <a:prstGeom prst="rect">
+            <a:avLst/>
+          </a:prstGeom>
+          <a:noFill/>
+          <a:ln/>
+        </p:spPr>
+        <p:txBody>
+          <a:bodyPr wrap="square" lIns="0" tIns="0" rIns="0" bIns="0" rtlCol="0" anchor="ctr"/>
+          <a:lstStyle/>
+          <a:p>
+            <a:pPr algn="ctr" indent="0" marL="0">
+              <a:buNone/>
+            </a:pPr>
+            <a:r>
+              <a:rPr lang="en-US" sz="1100" b="1" dirty="0">
+                <a:solidFill>
+                  <a:srgbClr val="2A1B0C"/>
+                </a:solidFill>
+                <a:latin typeface="Arial" pitchFamily="34" charset="0"/>
+                <a:ea typeface="Arial" pitchFamily="34" charset="-122"/>
+                <a:cs typeface="Arial" pitchFamily="34" charset="-120"/>
+              </a:rPr>
+              <a:t>Release SPEC-003…  G4</a:t>
+            </a:r>
+            <a:endParaRPr lang="en-US" sz="1100" dirty="0"/>
+          </a:p>
+        </p:txBody>
+      </p:sp>
+      <p:sp>
+        <p:nvSpPr>
+          <p:cNvPr id="38" name="Text 36"/>
+          <p:cNvSpPr txBox="1"/>
+          <p:nvPr/>
+        </p:nvSpPr>
+        <p:spPr>
+          <a:xfrm>
+            <a:off x="5212080" y="4892040"/>
+            <a:ext cx="6293815" cy="457200"/>
+          </a:xfrm>
+          <a:prstGeom prst="rect">
+            <a:avLst/>
+          </a:prstGeom>
+          <a:noFill/>
+          <a:ln/>
+        </p:spPr>
+        <p:txBody>
+          <a:bodyPr wrap="square" lIns="0" tIns="0" rIns="0" bIns="0" rtlCol="0" anchor="ctr"/>
+          <a:lstStyle/>
+          <a:p>
+            <a:pPr indent="0" marL="0">
+              <a:buNone/>
+            </a:pPr>
+            <a:r>
+              <a:rPr lang="en-US" sz="1300" dirty="0">
+                <a:solidFill>
+                  <a:srgbClr val="E4D8C6"/>
+                </a:solidFill>
+                <a:latin typeface="Arial" pitchFamily="34" charset="0"/>
+                <a:ea typeface="Arial" pitchFamily="34" charset="-122"/>
+                <a:cs typeface="Arial" pitchFamily="34" charset="-120"/>
+              </a:rPr>
+              <a:t>Release notes + client summary; </a:t>
+            </a:r>
+            <a:pPr indent="0" marL="0">
+              <a:buNone/>
+            </a:pPr>
+            <a:r>
+              <a:rPr lang="en-US" sz="1300" b="1" dirty="0">
+                <a:solidFill>
+                  <a:srgbClr val="FFF6E6"/>
+                </a:solidFill>
+                <a:latin typeface="Arial" pitchFamily="34" charset="0"/>
+                <a:ea typeface="Arial" pitchFamily="34" charset="-122"/>
+                <a:cs typeface="Arial" pitchFamily="34" charset="-120"/>
+              </a:rPr>
+              <a:t>client sign-off</a:t>
+            </a:r>
+            <a:pPr indent="0" marL="0">
+              <a:buNone/>
+            </a:pPr>
+            <a:r>
+              <a:rPr lang="en-US" sz="1300" dirty="0">
+                <a:solidFill>
+                  <a:srgbClr val="E4D8C6"/>
+                </a:solidFill>
+                <a:latin typeface="Arial" pitchFamily="34" charset="0"/>
+                <a:ea typeface="Arial" pitchFamily="34" charset="-122"/>
+                <a:cs typeface="Arial" pitchFamily="34" charset="-120"/>
+              </a:rPr>
+              <a:t> recorded because it touches their ad account</a:t>
+            </a:r>
+            <a:endParaRPr lang="en-US" sz="1300" dirty="0"/>
+          </a:p>
+        </p:txBody>
+      </p:sp>
+      <p:sp>
+        <p:nvSpPr>
+          <p:cNvPr id="39" name="Shape 37"/>
+          <p:cNvSpPr/>
+          <p:nvPr/>
+        </p:nvSpPr>
+        <p:spPr>
+          <a:xfrm>
+            <a:off x="685800" y="5422392"/>
+            <a:ext cx="10820095" cy="0"/>
+          </a:xfrm>
+          <a:prstGeom prst="line">
+            <a:avLst/>
+          </a:prstGeom>
+          <a:noFill/>
+          <a:ln w="9525">
+            <a:solidFill>
               <a:srgbClr val="332A1F"/>
             </a:solidFill>
             <a:prstDash val="solid"/>
@@ -17341,14 +18284,14 @@
       </p:sp>
       <p:sp>
         <p:nvSpPr>
-          <p:cNvPr id="23" name="Text 21"/>
-          <p:cNvSpPr txBox="1"/>
-          <p:nvPr/>
-        </p:nvSpPr>
-        <p:spPr>
-          <a:xfrm>
-            <a:off x="8417357" y="3886200"/>
-            <a:ext cx="2722778" cy="713232"/>
+          <p:cNvPr id="40" name="Text 38"/>
+          <p:cNvSpPr txBox="1"/>
+          <p:nvPr/>
+        </p:nvSpPr>
+        <p:spPr>
+          <a:xfrm>
+            <a:off x="685800" y="5468112"/>
+            <a:ext cx="640080" cy="457200"/>
           </a:xfrm>
           <a:prstGeom prst="rect">
             <a:avLst/>
@@ -17364,7 +18307,165 @@
               <a:buNone/>
             </a:pPr>
             <a:r>
-              <a:rPr lang="en-US" sz="1200" b="1" dirty="0">
+              <a:rPr lang="en-US" sz="1200" dirty="0">
+                <a:solidFill>
+                  <a:srgbClr val="B5A186"/>
+                </a:solidFill>
+                <a:latin typeface="Courier New" pitchFamily="34" charset="0"/>
+                <a:ea typeface="Courier New" pitchFamily="34" charset="-122"/>
+                <a:cs typeface="Courier New" pitchFamily="34" charset="-120"/>
+              </a:rPr>
+              <a:t>0:58</a:t>
+            </a:r>
+            <a:endParaRPr lang="en-US" sz="1200" dirty="0"/>
+          </a:p>
+        </p:txBody>
+      </p:sp>
+      <p:sp>
+        <p:nvSpPr>
+          <p:cNvPr id="41" name="Text 39"/>
+          <p:cNvSpPr txBox="1"/>
+          <p:nvPr/>
+        </p:nvSpPr>
+        <p:spPr>
+          <a:xfrm>
+            <a:off x="1371600" y="5468112"/>
+            <a:ext cx="1463040" cy="457200"/>
+          </a:xfrm>
+          <a:prstGeom prst="rect">
+            <a:avLst/>
+          </a:prstGeom>
+          <a:noFill/>
+          <a:ln/>
+        </p:spPr>
+        <p:txBody>
+          <a:bodyPr wrap="square" lIns="0" tIns="0" rIns="0" bIns="0" rtlCol="0" anchor="ctr"/>
+          <a:lstStyle/>
+          <a:p>
+            <a:pPr indent="0" marL="0">
+              <a:buNone/>
+            </a:pPr>
+            <a:r>
+              <a:rPr lang="en-US" sz="750" spc="200" kern="0" dirty="0">
+                <a:solidFill>
+                  <a:srgbClr val="8C7961"/>
+                </a:solidFill>
+                <a:latin typeface="Arial" pitchFamily="34" charset="0"/>
+                <a:ea typeface="Arial" pitchFamily="34" charset="-122"/>
+                <a:cs typeface="Arial" pitchFamily="34" charset="-120"/>
+              </a:rPr>
+              <a:t>AVERY PARK · OWNER</a:t>
+            </a:r>
+            <a:endParaRPr lang="en-US" sz="750" dirty="0"/>
+          </a:p>
+        </p:txBody>
+      </p:sp>
+      <p:sp>
+        <p:nvSpPr>
+          <p:cNvPr id="42" name="Shape 40"/>
+          <p:cNvSpPr/>
+          <p:nvPr/>
+        </p:nvSpPr>
+        <p:spPr>
+          <a:xfrm>
+            <a:off x="2880360" y="5541264"/>
+            <a:ext cx="2103120" cy="310896"/>
+          </a:xfrm>
+          <a:prstGeom prst="roundRect">
+            <a:avLst>
+              <a:gd name="adj" fmla="val 50000"/>
+            </a:avLst>
+          </a:prstGeom>
+          <a:solidFill>
+            <a:srgbClr val="F3D9A4"/>
+          </a:solidFill>
+          <a:ln w="9525">
+            <a:solidFill>
+              <a:srgbClr val="F3D9A4"/>
+            </a:solidFill>
+            <a:prstDash val="solid"/>
+          </a:ln>
+        </p:spPr>
+      </p:sp>
+      <p:sp>
+        <p:nvSpPr>
+          <p:cNvPr id="43" name="Text 41"/>
+          <p:cNvSpPr txBox="1"/>
+          <p:nvPr/>
+        </p:nvSpPr>
+        <p:spPr>
+          <a:xfrm>
+            <a:off x="2880360" y="5541264"/>
+            <a:ext cx="2103120" cy="310896"/>
+          </a:xfrm>
+          <a:prstGeom prst="rect">
+            <a:avLst/>
+          </a:prstGeom>
+          <a:noFill/>
+          <a:ln/>
+        </p:spPr>
+        <p:txBody>
+          <a:bodyPr wrap="square" lIns="0" tIns="0" rIns="0" bIns="0" rtlCol="0" anchor="ctr"/>
+          <a:lstStyle/>
+          <a:p>
+            <a:pPr algn="ctr" indent="0" marL="0">
+              <a:buNone/>
+            </a:pPr>
+            <a:r>
+              <a:rPr lang="en-US" sz="1100" b="1" dirty="0">
+                <a:solidFill>
+                  <a:srgbClr val="2A1B0C"/>
+                </a:solidFill>
+                <a:latin typeface="Arial" pitchFamily="34" charset="0"/>
+                <a:ea typeface="Arial" pitchFamily="34" charset="-122"/>
+                <a:cs typeface="Arial" pitchFamily="34" charset="-120"/>
+              </a:rPr>
+              <a:t>Approve &amp; send  G5</a:t>
+            </a:r>
+            <a:endParaRPr lang="en-US" sz="1100" dirty="0"/>
+          </a:p>
+        </p:txBody>
+      </p:sp>
+      <p:sp>
+        <p:nvSpPr>
+          <p:cNvPr id="44" name="Text 42"/>
+          <p:cNvSpPr txBox="1"/>
+          <p:nvPr/>
+        </p:nvSpPr>
+        <p:spPr>
+          <a:xfrm>
+            <a:off x="5212080" y="5468112"/>
+            <a:ext cx="6293815" cy="457200"/>
+          </a:xfrm>
+          <a:prstGeom prst="rect">
+            <a:avLst/>
+          </a:prstGeom>
+          <a:noFill/>
+          <a:ln/>
+        </p:spPr>
+        <p:txBody>
+          <a:bodyPr wrap="square" lIns="0" tIns="0" rIns="0" bIns="0" rtlCol="0" anchor="ctr"/>
+          <a:lstStyle/>
+          <a:p>
+            <a:pPr indent="0" marL="0">
+              <a:buNone/>
+            </a:pPr>
+            <a:r>
+              <a:rPr lang="en-US" sz="1300" dirty="0">
+                <a:solidFill>
+                  <a:srgbClr val="E4D8C6"/>
+                </a:solidFill>
+                <a:latin typeface="Arial" pitchFamily="34" charset="0"/>
+                <a:ea typeface="Arial" pitchFamily="34" charset="-122"/>
+                <a:cs typeface="Arial" pitchFamily="34" charset="-120"/>
+              </a:rPr>
+              <a:t>Plain-language </a:t>
+            </a:r>
+            <a:pPr indent="0" marL="0">
+              <a:buNone/>
+            </a:pPr>
+            <a:r>
+              <a:rPr lang="en-US" sz="1300" b="1" dirty="0">
                 <a:solidFill>
                   <a:srgbClr val="FFF6E6"/>
                 </a:solidFill>
@@ -17372,19 +18473,13 @@
                 <a:ea typeface="Arial" pitchFamily="34" charset="-122"/>
                 <a:cs typeface="Arial" pitchFamily="34" charset="-120"/>
               </a:rPr>
-              <a:t>Every agency workflow.</a:t>
-            </a:r>
-            <a:pPr indent="0" marL="0">
-              <a:buNone/>
-            </a:pPr>
-            <a:endParaRPr lang="en-US" sz="1200" dirty="0"/>
-          </a:p>
-          <a:p>
-            <a:pPr indent="0" marL="0">
-              <a:buNone/>
-            </a:pPr>
-            <a:r>
-              <a:rPr lang="en-US" sz="1050" dirty="0">
+              <a:t>client update</a:t>
+            </a:r>
+            <a:pPr indent="0" marL="0">
+              <a:buNone/>
+            </a:pPr>
+            <a:r>
+              <a:rPr lang="en-US" sz="1300" dirty="0">
                 <a:solidFill>
                   <a:srgbClr val="E4D8C6"/>
                 </a:solidFill>
@@ -17392,99 +18487,7 @@
                 <a:ea typeface="Arial" pitchFamily="34" charset="-122"/>
                 <a:cs typeface="Arial" pitchFamily="34" charset="-120"/>
               </a:rPr>
-              <a:t>The checklist is config; the gates are generic.</a:t>
-            </a:r>
-            <a:endParaRPr lang="en-US" sz="1200" dirty="0"/>
-          </a:p>
-        </p:txBody>
-      </p:sp>
-      <p:sp>
-        <p:nvSpPr>
-          <p:cNvPr id="24" name="Text 22"/>
-          <p:cNvSpPr txBox="1"/>
-          <p:nvPr/>
-        </p:nvSpPr>
-        <p:spPr>
-          <a:xfrm>
-            <a:off x="8325917" y="3703320"/>
-            <a:ext cx="274320" cy="182880"/>
-          </a:xfrm>
-          <a:prstGeom prst="rect">
-            <a:avLst/>
-          </a:prstGeom>
-          <a:noFill/>
-          <a:ln/>
-        </p:spPr>
-        <p:txBody>
-          <a:bodyPr wrap="square" lIns="0" tIns="0" rIns="0" bIns="0" rtlCol="0" anchor="ctr"/>
-          <a:lstStyle/>
-          <a:p>
-            <a:pPr indent="0" marL="0">
-              <a:buNone/>
-            </a:pPr>
-            <a:r>
-              <a:rPr lang="en-US" sz="1000" dirty="0">
-                <a:solidFill>
-                  <a:srgbClr val="C9955A"/>
-                </a:solidFill>
-                <a:latin typeface="Arial" pitchFamily="34" charset="0"/>
-                <a:ea typeface="Arial" pitchFamily="34" charset="-122"/>
-                <a:cs typeface="Arial" pitchFamily="34" charset="-120"/>
-              </a:rPr>
-              <a:t>↓</a:t>
-            </a:r>
-            <a:endParaRPr lang="en-US" sz="1000" dirty="0"/>
-          </a:p>
-        </p:txBody>
-      </p:sp>
-      <p:sp>
-        <p:nvSpPr>
-          <p:cNvPr id="25" name="Text 23"/>
-          <p:cNvSpPr txBox="1"/>
-          <p:nvPr/>
-        </p:nvSpPr>
-        <p:spPr>
-          <a:xfrm>
-            <a:off x="685800" y="4983480"/>
-            <a:ext cx="10820095" cy="822960"/>
-          </a:xfrm>
-          <a:prstGeom prst="rect">
-            <a:avLst/>
-          </a:prstGeom>
-          <a:noFill/>
-          <a:ln/>
-        </p:spPr>
-        <p:txBody>
-          <a:bodyPr wrap="square" lIns="0" tIns="0" rIns="0" bIns="0" rtlCol="0" anchor="t"/>
-          <a:lstStyle/>
-          <a:p>
-            <a:pPr indent="0" marL="0">
-              <a:buNone/>
-            </a:pPr>
-            <a:r>
-              <a:rPr lang="en-US" sz="1300" b="1" dirty="0">
-                <a:solidFill>
-                  <a:srgbClr val="F3D9A4"/>
-                </a:solidFill>
-                <a:latin typeface="Arial" pitchFamily="34" charset="0"/>
-                <a:ea typeface="Arial" pitchFamily="34" charset="-122"/>
-                <a:cs typeface="Arial" pitchFamily="34" charset="-120"/>
-              </a:rPr>
-              <a:t>Why now: </a:t>
-            </a:r>
-            <a:pPr indent="0" marL="0">
-              <a:buNone/>
-            </a:pPr>
-            <a:r>
-              <a:rPr lang="en-US" sz="1300" dirty="0">
-                <a:solidFill>
-                  <a:srgbClr val="E4D8C6"/>
-                </a:solidFill>
-                <a:latin typeface="Arial" pitchFamily="34" charset="0"/>
-                <a:ea typeface="Arial" pitchFamily="34" charset="-122"/>
-                <a:cs typeface="Arial" pitchFamily="34" charset="-120"/>
-              </a:rPr>
-              <a:t>owners already work inside AI assistants, and MCP lets them call another company's tools · a desk-side 128 GB box runs capable open models · NVIDIA's sandbox makes an unattended agent acceptable.</a:t>
+              <a:t> with a follow-up question per open gap → back to the client's AI</a:t>
             </a:r>
             <a:endParaRPr lang="en-US" sz="1300" dirty="0"/>
           </a:p>
